--- a/Презентация.pptx
+++ b/Презентация.pptx
@@ -211,7 +211,7 @@
           <a:p>
             <a:fld id="{1BD069A4-CB1F-4171-8BFA-91DF1381155B}" type="datetimeFigureOut">
               <a:rPr lang="ru-RU" smtClean="0"/>
-              <a:t>31.03.2026</a:t>
+              <a:t>01.04.2026</a:t>
             </a:fld>
             <a:endParaRPr lang="ru-RU"/>
           </a:p>
@@ -718,7 +718,7 @@
           <a:p>
             <a:fld id="{7D3979F6-D24E-47C2-A27A-E4EF5F938B5D}" type="datetime1">
               <a:rPr lang="ru-RU" smtClean="0"/>
-              <a:t>31.03.2026</a:t>
+              <a:t>01.04.2026</a:t>
             </a:fld>
             <a:endParaRPr lang="ru-RU"/>
           </a:p>
@@ -926,7 +926,7 @@
           <a:p>
             <a:fld id="{0682B616-F629-4014-86A1-BA1CB29A7BB9}" type="datetime1">
               <a:rPr lang="ru-RU" smtClean="0"/>
-              <a:t>31.03.2026</a:t>
+              <a:t>01.04.2026</a:t>
             </a:fld>
             <a:endParaRPr lang="ru-RU"/>
           </a:p>
@@ -1182,7 +1182,7 @@
           <a:p>
             <a:fld id="{C1FCC3FD-F2AE-4461-B23D-77B050CF3ABF}" type="datetime1">
               <a:rPr lang="ru-RU" smtClean="0"/>
-              <a:t>31.03.2026</a:t>
+              <a:t>01.04.2026</a:t>
             </a:fld>
             <a:endParaRPr lang="ru-RU"/>
           </a:p>
@@ -1352,7 +1352,7 @@
           <a:p>
             <a:fld id="{E956BD20-12E1-452E-BD5F-0A0D752D139A}" type="datetime1">
               <a:rPr lang="ru-RU" smtClean="0"/>
-              <a:t>31.03.2026</a:t>
+              <a:t>01.04.2026</a:t>
             </a:fld>
             <a:endParaRPr lang="ru-RU"/>
           </a:p>
@@ -1695,7 +1695,7 @@
           <a:p>
             <a:fld id="{036018E1-4B20-46F0-92E3-679BB36C6235}" type="datetime1">
               <a:rPr lang="ru-RU" smtClean="0"/>
-              <a:t>31.03.2026</a:t>
+              <a:t>01.04.2026</a:t>
             </a:fld>
             <a:endParaRPr lang="ru-RU"/>
           </a:p>
@@ -1970,7 +1970,7 @@
           <a:p>
             <a:fld id="{257B68B8-2C20-4CB0-9EC9-41EB711C303F}" type="datetime1">
               <a:rPr lang="ru-RU" smtClean="0"/>
-              <a:t>31.03.2026</a:t>
+              <a:t>01.04.2026</a:t>
             </a:fld>
             <a:endParaRPr lang="ru-RU"/>
           </a:p>
@@ -2349,7 +2349,7 @@
           <a:p>
             <a:fld id="{4988CF67-1E21-48C6-8513-84CD8C6BB31A}" type="datetime1">
               <a:rPr lang="ru-RU" smtClean="0"/>
-              <a:t>31.03.2026</a:t>
+              <a:t>01.04.2026</a:t>
             </a:fld>
             <a:endParaRPr lang="ru-RU"/>
           </a:p>
@@ -2467,7 +2467,7 @@
           <a:p>
             <a:fld id="{3E1A2EEC-B1C3-4208-B263-39B570A113CA}" type="datetime1">
               <a:rPr lang="ru-RU" smtClean="0"/>
-              <a:t>31.03.2026</a:t>
+              <a:t>01.04.2026</a:t>
             </a:fld>
             <a:endParaRPr lang="ru-RU"/>
           </a:p>
@@ -2638,7 +2638,7 @@
           <a:p>
             <a:fld id="{262B3C35-94BF-4A5E-9485-3EAD2583A63F}" type="datetime1">
               <a:rPr lang="ru-RU" smtClean="0"/>
-              <a:t>31.03.2026</a:t>
+              <a:t>01.04.2026</a:t>
             </a:fld>
             <a:endParaRPr lang="ru-RU"/>
           </a:p>
@@ -2992,7 +2992,7 @@
           <a:p>
             <a:fld id="{BDFFE024-7BB8-43AF-BB4F-7336D6936167}" type="datetime1">
               <a:rPr lang="ru-RU" smtClean="0"/>
-              <a:t>31.03.2026</a:t>
+              <a:t>01.04.2026</a:t>
             </a:fld>
             <a:endParaRPr lang="ru-RU"/>
           </a:p>
@@ -3369,7 +3369,7 @@
           <a:p>
             <a:fld id="{779AC94A-3C4C-4AA2-B858-501161EC3B80}" type="datetime1">
               <a:rPr lang="ru-RU" smtClean="0"/>
-              <a:t>31.03.2026</a:t>
+              <a:t>01.04.2026</a:t>
             </a:fld>
             <a:endParaRPr lang="ru-RU"/>
           </a:p>
@@ -3670,7 +3670,7 @@
           <a:p>
             <a:fld id="{3D7F385B-51D8-4C55-8700-712BF29E8802}" type="datetime1">
               <a:rPr lang="ru-RU" smtClean="0"/>
-              <a:t>31.03.2026</a:t>
+              <a:t>01.04.2026</a:t>
             </a:fld>
             <a:endParaRPr lang="ru-RU"/>
           </a:p>
@@ -4414,12 +4414,20 @@
               </a:rPr>
             </a:br>
             <a:r>
+              <a:rPr lang="ru-RU" sz="2000">
+                <a:solidFill>
+                  <a:schemeClr val="tx2"/>
+                </a:solidFill>
+              </a:rPr>
+              <a:t> Реферат </a:t>
+            </a:r>
+            <a:r>
               <a:rPr lang="ru-RU" sz="2000" dirty="0">
                 <a:solidFill>
                   <a:schemeClr val="tx2"/>
                 </a:solidFill>
               </a:rPr>
-              <a:t> Презентация на тему:</a:t>
+              <a:t>на тему:</a:t>
             </a:r>
             <a:br>
               <a:rPr lang="ru-RU" sz="2000" dirty="0">

--- a/Презентация.pptx
+++ b/Презентация.pptx
@@ -5,7 +5,7 @@
     <p:sldMasterId id="2147483672" r:id="rId1"/>
   </p:sldMasterIdLst>
   <p:notesMasterIdLst>
-    <p:notesMasterId r:id="rId17"/>
+    <p:notesMasterId r:id="rId18"/>
   </p:notesMasterIdLst>
   <p:sldIdLst>
     <p:sldId id="256" r:id="rId2"/>
@@ -19,10 +19,11 @@
     <p:sldId id="269" r:id="rId10"/>
     <p:sldId id="262" r:id="rId11"/>
     <p:sldId id="263" r:id="rId12"/>
-    <p:sldId id="270" r:id="rId13"/>
-    <p:sldId id="271" r:id="rId14"/>
-    <p:sldId id="264" r:id="rId15"/>
-    <p:sldId id="265" r:id="rId16"/>
+    <p:sldId id="272" r:id="rId13"/>
+    <p:sldId id="270" r:id="rId14"/>
+    <p:sldId id="271" r:id="rId15"/>
+    <p:sldId id="264" r:id="rId16"/>
+    <p:sldId id="265" r:id="rId17"/>
   </p:sldIdLst>
   <p:sldSz cx="12192000" cy="6858000"/>
   <p:notesSz cx="6858000" cy="9144000"/>
@@ -4803,10 +4804,10 @@
       </p:sp>
       <p:pic>
         <p:nvPicPr>
-          <p:cNvPr id="7" name="Рисунок 6">
+          <p:cNvPr id="8" name="Рисунок 7">
             <a:extLst>
               <a:ext uri="{FF2B5EF4-FFF2-40B4-BE49-F238E27FC236}">
-                <a16:creationId xmlns:a16="http://schemas.microsoft.com/office/drawing/2014/main" id="{21161D93-FC55-0B59-C24A-CF533104E6CF}"/>
+                <a16:creationId xmlns:a16="http://schemas.microsoft.com/office/drawing/2014/main" id="{D50B61BB-D4B2-4A4B-9697-38CE47FE4EBF}"/>
               </a:ext>
             </a:extLst>
           </p:cNvPr>
@@ -4823,8 +4824,8 @@
         </p:blipFill>
         <p:spPr>
           <a:xfrm>
-            <a:off x="628850" y="1144569"/>
-            <a:ext cx="10934299" cy="4568862"/>
+            <a:off x="979517" y="1086044"/>
+            <a:ext cx="10422032" cy="5022660"/>
           </a:xfrm>
           <a:prstGeom prst="rect">
             <a:avLst/>
@@ -5295,6 +5296,485 @@
 <file path=ppt/slides/slide12.xml><?xml version="1.0" encoding="utf-8"?>
 <p:sld xmlns:a="http://schemas.openxmlformats.org/drawingml/2006/main" xmlns:r="http://schemas.openxmlformats.org/officeDocument/2006/relationships" xmlns:p="http://schemas.openxmlformats.org/presentationml/2006/main">
   <p:cSld>
+    <p:spTree>
+      <p:nvGrpSpPr>
+        <p:cNvPr id="1" name="">
+          <a:extLst>
+            <a:ext uri="{FF2B5EF4-FFF2-40B4-BE49-F238E27FC236}">
+              <a16:creationId xmlns:a16="http://schemas.microsoft.com/office/drawing/2014/main" id="{60C8EB8F-A8D6-8ECE-4296-7766A1B08C35}"/>
+            </a:ext>
+          </a:extLst>
+        </p:cNvPr>
+        <p:cNvGrpSpPr/>
+        <p:nvPr/>
+      </p:nvGrpSpPr>
+      <p:grpSpPr>
+        <a:xfrm>
+          <a:off x="0" y="0"/>
+          <a:ext cx="0" cy="0"/>
+          <a:chOff x="0" y="0"/>
+          <a:chExt cx="0" cy="0"/>
+        </a:xfrm>
+      </p:grpSpPr>
+      <p:sp>
+        <p:nvSpPr>
+          <p:cNvPr id="2" name="Заголовок 1">
+            <a:extLst>
+              <a:ext uri="{FF2B5EF4-FFF2-40B4-BE49-F238E27FC236}">
+                <a16:creationId xmlns:a16="http://schemas.microsoft.com/office/drawing/2014/main" id="{E99A630E-A8E9-6780-DE26-21D3461EC3E9}"/>
+              </a:ext>
+            </a:extLst>
+          </p:cNvPr>
+          <p:cNvSpPr>
+            <a:spLocks noGrp="1"/>
+          </p:cNvSpPr>
+          <p:nvPr>
+            <p:ph type="title"/>
+          </p:nvPr>
+        </p:nvSpPr>
+        <p:spPr>
+          <a:xfrm>
+            <a:off x="1066800" y="672336"/>
+            <a:ext cx="10058400" cy="801533"/>
+          </a:xfrm>
+        </p:spPr>
+        <p:txBody>
+          <a:bodyPr/>
+          <a:lstStyle/>
+          <a:p>
+            <a:pPr algn="ctr"/>
+            <a:r>
+              <a:rPr lang="ru-RU" dirty="0"/>
+              <a:t>Пример </a:t>
+            </a:r>
+            <a:r>
+              <a:rPr lang="ru-RU" dirty="0" err="1"/>
+              <a:t>датасета</a:t>
+            </a:r>
+            <a:endParaRPr lang="ru-RU" dirty="0"/>
+          </a:p>
+        </p:txBody>
+      </p:sp>
+      <p:sp>
+        <p:nvSpPr>
+          <p:cNvPr id="4" name="Номер слайда 3">
+            <a:extLst>
+              <a:ext uri="{FF2B5EF4-FFF2-40B4-BE49-F238E27FC236}">
+                <a16:creationId xmlns:a16="http://schemas.microsoft.com/office/drawing/2014/main" id="{D44B5FF5-C00C-336B-6C04-0685094DD9D3}"/>
+              </a:ext>
+            </a:extLst>
+          </p:cNvPr>
+          <p:cNvSpPr>
+            <a:spLocks noGrp="1"/>
+          </p:cNvSpPr>
+          <p:nvPr>
+            <p:ph type="sldNum" sz="quarter" idx="12"/>
+          </p:nvPr>
+        </p:nvSpPr>
+        <p:spPr/>
+        <p:txBody>
+          <a:bodyPr/>
+          <a:lstStyle/>
+          <a:p>
+            <a:fld id="{25726283-AA38-4E85-AA5F-A5EF301525D1}" type="slidenum">
+              <a:rPr lang="ru-RU" smtClean="0"/>
+              <a:t>12</a:t>
+            </a:fld>
+            <a:endParaRPr lang="ru-RU"/>
+          </a:p>
+        </p:txBody>
+      </p:sp>
+      <p:sp>
+        <p:nvSpPr>
+          <p:cNvPr id="5" name="Объект 2">
+            <a:extLst>
+              <a:ext uri="{FF2B5EF4-FFF2-40B4-BE49-F238E27FC236}">
+                <a16:creationId xmlns:a16="http://schemas.microsoft.com/office/drawing/2014/main" id="{9C968E1E-FB54-8D99-75C7-E438991E89BB}"/>
+              </a:ext>
+            </a:extLst>
+          </p:cNvPr>
+          <p:cNvSpPr txBox="1">
+            <a:spLocks/>
+          </p:cNvSpPr>
+          <p:nvPr/>
+        </p:nvSpPr>
+        <p:spPr>
+          <a:xfrm>
+            <a:off x="6525768" y="2785450"/>
+            <a:ext cx="4599432" cy="3400214"/>
+          </a:xfrm>
+          <a:prstGeom prst="rect">
+            <a:avLst/>
+          </a:prstGeom>
+        </p:spPr>
+        <p:txBody>
+          <a:bodyPr vert="horz" lIns="0" tIns="45720" rIns="0" bIns="45720" rtlCol="0">
+            <a:normAutofit/>
+          </a:bodyPr>
+          <a:lstStyle>
+            <a:lvl1pPr marL="91440" indent="-91440" algn="l" defTabSz="914400" rtl="0" eaLnBrk="1" latinLnBrk="0" hangingPunct="1">
+              <a:lnSpc>
+                <a:spcPct val="90000"/>
+              </a:lnSpc>
+              <a:spcBef>
+                <a:spcPts val="1200"/>
+              </a:spcBef>
+              <a:spcAft>
+                <a:spcPts val="200"/>
+              </a:spcAft>
+              <a:buClr>
+                <a:schemeClr val="accent1"/>
+              </a:buClr>
+              <a:buSzPct val="100000"/>
+              <a:buFont typeface="Calibri" panose="020F0502020204030204" pitchFamily="34" charset="0"/>
+              <a:buChar char=" "/>
+              <a:defRPr sz="2000" kern="1200">
+                <a:solidFill>
+                  <a:schemeClr val="tx1">
+                    <a:lumMod val="75000"/>
+                    <a:lumOff val="25000"/>
+                  </a:schemeClr>
+                </a:solidFill>
+                <a:latin typeface="+mn-lt"/>
+                <a:ea typeface="+mn-ea"/>
+                <a:cs typeface="+mn-cs"/>
+              </a:defRPr>
+            </a:lvl1pPr>
+            <a:lvl2pPr marL="384048" indent="-182880" algn="l" defTabSz="914400" rtl="0" eaLnBrk="1" latinLnBrk="0" hangingPunct="1">
+              <a:lnSpc>
+                <a:spcPct val="90000"/>
+              </a:lnSpc>
+              <a:spcBef>
+                <a:spcPts val="200"/>
+              </a:spcBef>
+              <a:spcAft>
+                <a:spcPts val="400"/>
+              </a:spcAft>
+              <a:buClr>
+                <a:schemeClr val="accent1"/>
+              </a:buClr>
+              <a:buFont typeface="Calibri" pitchFamily="34" charset="0"/>
+              <a:buChar char="◦"/>
+              <a:defRPr sz="1800" kern="1200">
+                <a:solidFill>
+                  <a:schemeClr val="tx1">
+                    <a:lumMod val="75000"/>
+                    <a:lumOff val="25000"/>
+                  </a:schemeClr>
+                </a:solidFill>
+                <a:latin typeface="+mn-lt"/>
+                <a:ea typeface="+mn-ea"/>
+                <a:cs typeface="+mn-cs"/>
+              </a:defRPr>
+            </a:lvl2pPr>
+            <a:lvl3pPr marL="566928" indent="-182880" algn="l" defTabSz="914400" rtl="0" eaLnBrk="1" latinLnBrk="0" hangingPunct="1">
+              <a:lnSpc>
+                <a:spcPct val="90000"/>
+              </a:lnSpc>
+              <a:spcBef>
+                <a:spcPts val="200"/>
+              </a:spcBef>
+              <a:spcAft>
+                <a:spcPts val="400"/>
+              </a:spcAft>
+              <a:buClr>
+                <a:schemeClr val="accent1"/>
+              </a:buClr>
+              <a:buFont typeface="Calibri" pitchFamily="34" charset="0"/>
+              <a:buChar char="◦"/>
+              <a:defRPr sz="1400" kern="1200">
+                <a:solidFill>
+                  <a:schemeClr val="tx1">
+                    <a:lumMod val="75000"/>
+                    <a:lumOff val="25000"/>
+                  </a:schemeClr>
+                </a:solidFill>
+                <a:latin typeface="+mn-lt"/>
+                <a:ea typeface="+mn-ea"/>
+                <a:cs typeface="+mn-cs"/>
+              </a:defRPr>
+            </a:lvl3pPr>
+            <a:lvl4pPr marL="749808" indent="-182880" algn="l" defTabSz="914400" rtl="0" eaLnBrk="1" latinLnBrk="0" hangingPunct="1">
+              <a:lnSpc>
+                <a:spcPct val="90000"/>
+              </a:lnSpc>
+              <a:spcBef>
+                <a:spcPts val="200"/>
+              </a:spcBef>
+              <a:spcAft>
+                <a:spcPts val="400"/>
+              </a:spcAft>
+              <a:buClr>
+                <a:schemeClr val="accent1"/>
+              </a:buClr>
+              <a:buFont typeface="Calibri" pitchFamily="34" charset="0"/>
+              <a:buChar char="◦"/>
+              <a:defRPr sz="1400" kern="1200">
+                <a:solidFill>
+                  <a:schemeClr val="tx1">
+                    <a:lumMod val="75000"/>
+                    <a:lumOff val="25000"/>
+                  </a:schemeClr>
+                </a:solidFill>
+                <a:latin typeface="+mn-lt"/>
+                <a:ea typeface="+mn-ea"/>
+                <a:cs typeface="+mn-cs"/>
+              </a:defRPr>
+            </a:lvl4pPr>
+            <a:lvl5pPr marL="932688" indent="-182880" algn="l" defTabSz="914400" rtl="0" eaLnBrk="1" latinLnBrk="0" hangingPunct="1">
+              <a:lnSpc>
+                <a:spcPct val="90000"/>
+              </a:lnSpc>
+              <a:spcBef>
+                <a:spcPts val="200"/>
+              </a:spcBef>
+              <a:spcAft>
+                <a:spcPts val="400"/>
+              </a:spcAft>
+              <a:buClr>
+                <a:schemeClr val="accent1"/>
+              </a:buClr>
+              <a:buFont typeface="Calibri" pitchFamily="34" charset="0"/>
+              <a:buChar char="◦"/>
+              <a:defRPr sz="1400" kern="1200">
+                <a:solidFill>
+                  <a:schemeClr val="tx1">
+                    <a:lumMod val="75000"/>
+                    <a:lumOff val="25000"/>
+                  </a:schemeClr>
+                </a:solidFill>
+                <a:latin typeface="+mn-lt"/>
+                <a:ea typeface="+mn-ea"/>
+                <a:cs typeface="+mn-cs"/>
+              </a:defRPr>
+            </a:lvl5pPr>
+            <a:lvl6pPr marL="1100000" indent="-228600" algn="l" defTabSz="914400" rtl="0" eaLnBrk="1" latinLnBrk="0" hangingPunct="1">
+              <a:lnSpc>
+                <a:spcPct val="90000"/>
+              </a:lnSpc>
+              <a:spcBef>
+                <a:spcPts val="200"/>
+              </a:spcBef>
+              <a:spcAft>
+                <a:spcPts val="400"/>
+              </a:spcAft>
+              <a:buClr>
+                <a:schemeClr val="accent1"/>
+              </a:buClr>
+              <a:buFont typeface="Calibri" pitchFamily="34" charset="0"/>
+              <a:buChar char="◦"/>
+              <a:defRPr sz="1400" kern="1200">
+                <a:solidFill>
+                  <a:schemeClr val="tx1">
+                    <a:lumMod val="75000"/>
+                    <a:lumOff val="25000"/>
+                  </a:schemeClr>
+                </a:solidFill>
+                <a:latin typeface="+mn-lt"/>
+                <a:ea typeface="+mn-ea"/>
+                <a:cs typeface="+mn-cs"/>
+              </a:defRPr>
+            </a:lvl6pPr>
+            <a:lvl7pPr marL="1300000" indent="-228600" algn="l" defTabSz="914400" rtl="0" eaLnBrk="1" latinLnBrk="0" hangingPunct="1">
+              <a:lnSpc>
+                <a:spcPct val="90000"/>
+              </a:lnSpc>
+              <a:spcBef>
+                <a:spcPts val="200"/>
+              </a:spcBef>
+              <a:spcAft>
+                <a:spcPts val="400"/>
+              </a:spcAft>
+              <a:buClr>
+                <a:schemeClr val="accent1"/>
+              </a:buClr>
+              <a:buFont typeface="Calibri" pitchFamily="34" charset="0"/>
+              <a:buChar char="◦"/>
+              <a:defRPr sz="1400" kern="1200">
+                <a:solidFill>
+                  <a:schemeClr val="tx1">
+                    <a:lumMod val="75000"/>
+                    <a:lumOff val="25000"/>
+                  </a:schemeClr>
+                </a:solidFill>
+                <a:latin typeface="+mn-lt"/>
+                <a:ea typeface="+mn-ea"/>
+                <a:cs typeface="+mn-cs"/>
+              </a:defRPr>
+            </a:lvl7pPr>
+            <a:lvl8pPr marL="1500000" indent="-228600" algn="l" defTabSz="914400" rtl="0" eaLnBrk="1" latinLnBrk="0" hangingPunct="1">
+              <a:lnSpc>
+                <a:spcPct val="90000"/>
+              </a:lnSpc>
+              <a:spcBef>
+                <a:spcPts val="200"/>
+              </a:spcBef>
+              <a:spcAft>
+                <a:spcPts val="400"/>
+              </a:spcAft>
+              <a:buClr>
+                <a:schemeClr val="accent1"/>
+              </a:buClr>
+              <a:buFont typeface="Calibri" pitchFamily="34" charset="0"/>
+              <a:buChar char="◦"/>
+              <a:defRPr sz="1400" kern="1200">
+                <a:solidFill>
+                  <a:schemeClr val="tx1">
+                    <a:lumMod val="75000"/>
+                    <a:lumOff val="25000"/>
+                  </a:schemeClr>
+                </a:solidFill>
+                <a:latin typeface="+mn-lt"/>
+                <a:ea typeface="+mn-ea"/>
+                <a:cs typeface="+mn-cs"/>
+              </a:defRPr>
+            </a:lvl8pPr>
+            <a:lvl9pPr marL="1700000" indent="-228600" algn="l" defTabSz="914400" rtl="0" eaLnBrk="1" latinLnBrk="0" hangingPunct="1">
+              <a:lnSpc>
+                <a:spcPct val="90000"/>
+              </a:lnSpc>
+              <a:spcBef>
+                <a:spcPts val="200"/>
+              </a:spcBef>
+              <a:spcAft>
+                <a:spcPts val="400"/>
+              </a:spcAft>
+              <a:buClr>
+                <a:schemeClr val="accent1"/>
+              </a:buClr>
+              <a:buFont typeface="Calibri" pitchFamily="34" charset="0"/>
+              <a:buChar char="◦"/>
+              <a:defRPr sz="1400" kern="1200">
+                <a:solidFill>
+                  <a:schemeClr val="tx1">
+                    <a:lumMod val="75000"/>
+                    <a:lumOff val="25000"/>
+                  </a:schemeClr>
+                </a:solidFill>
+                <a:latin typeface="+mn-lt"/>
+                <a:ea typeface="+mn-ea"/>
+                <a:cs typeface="+mn-cs"/>
+              </a:defRPr>
+            </a:lvl9pPr>
+          </a:lstStyle>
+          <a:p>
+            <a:pPr algn="just"/>
+            <a:r>
+              <a:rPr lang="ru-RU" dirty="0"/>
+              <a:t>Датасеты:</a:t>
+            </a:r>
+          </a:p>
+          <a:p>
+            <a:pPr marL="457200" indent="-457200" algn="just">
+              <a:buFont typeface="+mj-lt"/>
+              <a:buAutoNum type="arabicPeriod"/>
+            </a:pPr>
+            <a:r>
+              <a:rPr lang="en-US" dirty="0" err="1"/>
+              <a:t>CarPrice_Assignment</a:t>
+            </a:r>
+            <a:endParaRPr lang="ru-RU" dirty="0"/>
+          </a:p>
+          <a:p>
+            <a:pPr marL="457200" indent="-457200" algn="just">
+              <a:buFont typeface="+mj-lt"/>
+              <a:buAutoNum type="arabicPeriod"/>
+            </a:pPr>
+            <a:r>
+              <a:rPr lang="en-US" dirty="0"/>
+              <a:t>Healthcare</a:t>
+            </a:r>
+            <a:endParaRPr lang="ru-RU" dirty="0"/>
+          </a:p>
+          <a:p>
+            <a:pPr marL="457200" indent="-457200" algn="just">
+              <a:buFont typeface="+mj-lt"/>
+              <a:buAutoNum type="arabicPeriod"/>
+            </a:pPr>
+            <a:r>
+              <a:rPr lang="en-US" dirty="0" err="1"/>
+              <a:t>Historical_Pandemic_Epidemic_Dataset</a:t>
+            </a:r>
+            <a:endParaRPr lang="ru-RU" dirty="0"/>
+          </a:p>
+        </p:txBody>
+      </p:sp>
+      <p:sp>
+        <p:nvSpPr>
+          <p:cNvPr id="8" name="Объект 6">
+            <a:extLst>
+              <a:ext uri="{FF2B5EF4-FFF2-40B4-BE49-F238E27FC236}">
+                <a16:creationId xmlns:a16="http://schemas.microsoft.com/office/drawing/2014/main" id="{9CE21E67-362F-4600-A84A-68D2C96C429D}"/>
+              </a:ext>
+            </a:extLst>
+          </p:cNvPr>
+          <p:cNvSpPr>
+            <a:spLocks noGrp="1"/>
+          </p:cNvSpPr>
+          <p:nvPr>
+            <p:ph idx="1"/>
+          </p:nvPr>
+        </p:nvSpPr>
+        <p:spPr>
+          <a:xfrm>
+            <a:off x="1097280" y="1845734"/>
+            <a:ext cx="10058400" cy="4023360"/>
+          </a:xfrm>
+        </p:spPr>
+        <p:txBody>
+          <a:bodyPr/>
+          <a:lstStyle/>
+          <a:p>
+            <a:endParaRPr lang="ru-RU" dirty="0"/>
+          </a:p>
+        </p:txBody>
+      </p:sp>
+      <p:pic>
+        <p:nvPicPr>
+          <p:cNvPr id="10" name="Рисунок 9">
+            <a:extLst>
+              <a:ext uri="{FF2B5EF4-FFF2-40B4-BE49-F238E27FC236}">
+                <a16:creationId xmlns:a16="http://schemas.microsoft.com/office/drawing/2014/main" id="{0D4FC80D-AA1D-486E-BEF8-DE03C8098016}"/>
+              </a:ext>
+            </a:extLst>
+          </p:cNvPr>
+          <p:cNvPicPr>
+            <a:picLocks noChangeAspect="1"/>
+          </p:cNvPicPr>
+          <p:nvPr/>
+        </p:nvPicPr>
+        <p:blipFill>
+          <a:blip r:embed="rId2"/>
+          <a:stretch>
+            <a:fillRect/>
+          </a:stretch>
+        </p:blipFill>
+        <p:spPr>
+          <a:xfrm>
+            <a:off x="627731" y="1473869"/>
+            <a:ext cx="11231189" cy="4383464"/>
+          </a:xfrm>
+          <a:prstGeom prst="rect">
+            <a:avLst/>
+          </a:prstGeom>
+        </p:spPr>
+      </p:pic>
+    </p:spTree>
+    <p:extLst>
+      <p:ext uri="{BB962C8B-B14F-4D97-AF65-F5344CB8AC3E}">
+        <p14:creationId xmlns:p14="http://schemas.microsoft.com/office/powerpoint/2010/main" val="1902899161"/>
+      </p:ext>
+    </p:extLst>
+  </p:cSld>
+  <p:clrMapOvr>
+    <a:masterClrMapping/>
+  </p:clrMapOvr>
+</p:sld>
+</file>
+
+<file path=ppt/slides/slide13.xml><?xml version="1.0" encoding="utf-8"?>
+<p:sld xmlns:a="http://schemas.openxmlformats.org/drawingml/2006/main" xmlns:r="http://schemas.openxmlformats.org/officeDocument/2006/relationships" xmlns:p="http://schemas.openxmlformats.org/presentationml/2006/main">
+  <p:cSld>
     <p:bg>
       <p:bgPr>
         <a:solidFill>
@@ -5580,7 +6060,7 @@
         </p:nvSpPr>
         <p:spPr>
           <a:xfrm>
-            <a:off x="616174" y="4746596"/>
+            <a:off x="609459" y="4711473"/>
             <a:ext cx="10909073" cy="1057655"/>
           </a:xfrm>
         </p:spPr>
@@ -5634,36 +6114,6 @@
           </a:p>
         </p:txBody>
       </p:sp>
-      <p:pic>
-        <p:nvPicPr>
-          <p:cNvPr id="10" name="Рисунок 9">
-            <a:extLst>
-              <a:ext uri="{FF2B5EF4-FFF2-40B4-BE49-F238E27FC236}">
-                <a16:creationId xmlns:a16="http://schemas.microsoft.com/office/drawing/2014/main" id="{11945AA6-EB58-F785-43A5-D9F67F3EC50F}"/>
-              </a:ext>
-            </a:extLst>
-          </p:cNvPr>
-          <p:cNvPicPr>
-            <a:picLocks noChangeAspect="1"/>
-          </p:cNvPicPr>
-          <p:nvPr/>
-        </p:nvPicPr>
-        <p:blipFill>
-          <a:blip r:embed="rId2"/>
-          <a:stretch>
-            <a:fillRect/>
-          </a:stretch>
-        </p:blipFill>
-        <p:spPr>
-          <a:xfrm>
-            <a:off x="616174" y="816675"/>
-            <a:ext cx="5131653" cy="2959253"/>
-          </a:xfrm>
-          <a:prstGeom prst="rect">
-            <a:avLst/>
-          </a:prstGeom>
-        </p:spPr>
-      </p:pic>
       <p:sp>
         <p:nvSpPr>
           <p:cNvPr id="23" name="Rectangle 22">
@@ -5724,36 +6174,6 @@
           </a:p>
         </p:txBody>
       </p:sp>
-      <p:pic>
-        <p:nvPicPr>
-          <p:cNvPr id="6" name="Рисунок 5">
-            <a:extLst>
-              <a:ext uri="{FF2B5EF4-FFF2-40B4-BE49-F238E27FC236}">
-                <a16:creationId xmlns:a16="http://schemas.microsoft.com/office/drawing/2014/main" id="{A8315649-5021-A6CA-11BF-2875216A1103}"/>
-              </a:ext>
-            </a:extLst>
-          </p:cNvPr>
-          <p:cNvPicPr>
-            <a:picLocks noChangeAspect="1"/>
-          </p:cNvPicPr>
-          <p:nvPr/>
-        </p:nvPicPr>
-        <p:blipFill>
-          <a:blip r:embed="rId3"/>
-          <a:stretch>
-            <a:fillRect/>
-          </a:stretch>
-        </p:blipFill>
-        <p:spPr>
-          <a:xfrm>
-            <a:off x="6369856" y="115020"/>
-            <a:ext cx="5441967" cy="4799160"/>
-          </a:xfrm>
-          <a:prstGeom prst="rect">
-            <a:avLst/>
-          </a:prstGeom>
-        </p:spPr>
-      </p:pic>
       <p:cxnSp>
         <p:nvCxnSpPr>
           <p:cNvPr id="25" name="Straight Connector 24">
@@ -5972,12 +6392,42 @@
                   <a:spcPts val="600"/>
                 </a:spcAft>
               </a:pPr>
-              <a:t>12</a:t>
+              <a:t>13</a:t>
             </a:fld>
             <a:endParaRPr lang="en-US"/>
           </a:p>
         </p:txBody>
       </p:sp>
+      <p:pic>
+        <p:nvPicPr>
+          <p:cNvPr id="8" name="Рисунок 7">
+            <a:extLst>
+              <a:ext uri="{FF2B5EF4-FFF2-40B4-BE49-F238E27FC236}">
+                <a16:creationId xmlns:a16="http://schemas.microsoft.com/office/drawing/2014/main" id="{32857F67-499D-45E7-A8CF-6FDD2134621F}"/>
+              </a:ext>
+            </a:extLst>
+          </p:cNvPr>
+          <p:cNvPicPr>
+            <a:picLocks noChangeAspect="1"/>
+          </p:cNvPicPr>
+          <p:nvPr/>
+        </p:nvPicPr>
+        <p:blipFill>
+          <a:blip r:embed="rId2"/>
+          <a:stretch>
+            <a:fillRect/>
+          </a:stretch>
+        </p:blipFill>
+        <p:spPr>
+          <a:xfrm>
+            <a:off x="679283" y="654877"/>
+            <a:ext cx="10897441" cy="3770283"/>
+          </a:xfrm>
+          <a:prstGeom prst="rect">
+            <a:avLst/>
+          </a:prstGeom>
+        </p:spPr>
+      </p:pic>
     </p:spTree>
     <p:extLst>
       <p:ext uri="{BB962C8B-B14F-4D97-AF65-F5344CB8AC3E}">
@@ -5991,7 +6441,7 @@
 </p:sld>
 </file>
 
-<file path=ppt/slides/slide13.xml><?xml version="1.0" encoding="utf-8"?>
+<file path=ppt/slides/slide14.xml><?xml version="1.0" encoding="utf-8"?>
 <p:sld xmlns:a="http://schemas.openxmlformats.org/drawingml/2006/main" xmlns:r="http://schemas.openxmlformats.org/officeDocument/2006/relationships" xmlns:p="http://schemas.openxmlformats.org/presentationml/2006/main">
   <p:cSld>
     <p:spTree>
@@ -6113,7 +6563,7 @@
           <a:p>
             <a:fld id="{25726283-AA38-4E85-AA5F-A5EF301525D1}" type="slidenum">
               <a:rPr lang="ru-RU" smtClean="0"/>
-              <a:t>13</a:t>
+              <a:t>14</a:t>
             </a:fld>
             <a:endParaRPr lang="ru-RU"/>
           </a:p>
@@ -6162,7 +6612,7 @@
 </p:sld>
 </file>
 
-<file path=ppt/slides/slide14.xml><?xml version="1.0" encoding="utf-8"?>
+<file path=ppt/slides/slide15.xml><?xml version="1.0" encoding="utf-8"?>
 <p:sld xmlns:a="http://schemas.openxmlformats.org/drawingml/2006/main" xmlns:r="http://schemas.openxmlformats.org/officeDocument/2006/relationships" xmlns:p="http://schemas.openxmlformats.org/presentationml/2006/main">
   <p:cSld>
     <p:spTree>
@@ -6242,7 +6692,7 @@
           <a:p>
             <a:fld id="{25726283-AA38-4E85-AA5F-A5EF301525D1}" type="slidenum">
               <a:rPr lang="ru-RU" smtClean="0"/>
-              <a:t>14</a:t>
+              <a:t>15</a:t>
             </a:fld>
             <a:endParaRPr lang="ru-RU"/>
           </a:p>
@@ -6352,7 +6802,7 @@
 </p:sld>
 </file>
 
-<file path=ppt/slides/slide15.xml><?xml version="1.0" encoding="utf-8"?>
+<file path=ppt/slides/slide16.xml><?xml version="1.0" encoding="utf-8"?>
 <p:sld xmlns:a="http://schemas.openxmlformats.org/drawingml/2006/main" xmlns:r="http://schemas.openxmlformats.org/officeDocument/2006/relationships" xmlns:p="http://schemas.openxmlformats.org/presentationml/2006/main">
   <p:cSld>
     <p:spTree>
@@ -6398,7 +6848,7 @@
           <a:p>
             <a:fld id="{25726283-AA38-4E85-AA5F-A5EF301525D1}" type="slidenum">
               <a:rPr lang="ru-RU" smtClean="0"/>
-              <a:t>15</a:t>
+              <a:t>16</a:t>
             </a:fld>
             <a:endParaRPr lang="ru-RU"/>
           </a:p>

--- a/Презентация.pptx
+++ b/Презентация.pptx
@@ -2,10 +2,10 @@
 <file path=ppt/presentation.xml><?xml version="1.0" encoding="utf-8"?>
 <p:presentation xmlns:a="http://schemas.openxmlformats.org/drawingml/2006/main" xmlns:r="http://schemas.openxmlformats.org/officeDocument/2006/relationships" xmlns:p="http://schemas.openxmlformats.org/presentationml/2006/main" saveSubsetFonts="1">
   <p:sldMasterIdLst>
-    <p:sldMasterId id="2147483672" r:id="rId1"/>
+    <p:sldMasterId id="2147483708" r:id="rId1"/>
   </p:sldMasterIdLst>
   <p:notesMasterIdLst>
-    <p:notesMasterId r:id="rId18"/>
+    <p:notesMasterId r:id="rId27"/>
   </p:notesMasterIdLst>
   <p:sldIdLst>
     <p:sldId id="256" r:id="rId2"/>
@@ -19,11 +19,20 @@
     <p:sldId id="269" r:id="rId10"/>
     <p:sldId id="262" r:id="rId11"/>
     <p:sldId id="263" r:id="rId12"/>
-    <p:sldId id="272" r:id="rId13"/>
-    <p:sldId id="270" r:id="rId14"/>
-    <p:sldId id="271" r:id="rId15"/>
-    <p:sldId id="264" r:id="rId16"/>
-    <p:sldId id="265" r:id="rId17"/>
+    <p:sldId id="280" r:id="rId13"/>
+    <p:sldId id="273" r:id="rId14"/>
+    <p:sldId id="274" r:id="rId15"/>
+    <p:sldId id="276" r:id="rId16"/>
+    <p:sldId id="277" r:id="rId17"/>
+    <p:sldId id="278" r:id="rId18"/>
+    <p:sldId id="279" r:id="rId19"/>
+    <p:sldId id="275" r:id="rId20"/>
+    <p:sldId id="272" r:id="rId21"/>
+    <p:sldId id="270" r:id="rId22"/>
+    <p:sldId id="281" r:id="rId23"/>
+    <p:sldId id="271" r:id="rId24"/>
+    <p:sldId id="264" r:id="rId25"/>
+    <p:sldId id="265" r:id="rId26"/>
   </p:sldIdLst>
   <p:sldSz cx="12192000" cy="6858000"/>
   <p:notesSz cx="6858000" cy="9144000"/>
@@ -212,7 +221,7 @@
           <a:p>
             <a:fld id="{1BD069A4-CB1F-4171-8BFA-91DF1381155B}" type="datetimeFigureOut">
               <a:rPr lang="ru-RU" smtClean="0"/>
-              <a:t>01.04.2026</a:t>
+              <a:t>07.04.2026</a:t>
             </a:fld>
             <a:endParaRPr lang="ru-RU"/>
           </a:p>
@@ -533,13 +542,6 @@
             <a:schemeClr val="lt1"/>
           </a:fontRef>
         </p:style>
-        <p:txBody>
-          <a:bodyPr/>
-          <a:lstStyle/>
-          <a:p>
-            <a:endParaRPr lang="ru-RU"/>
-          </a:p>
-        </p:txBody>
       </p:sp>
       <p:sp>
         <p:nvSpPr>
@@ -578,13 +580,6 @@
             <a:schemeClr val="lt1"/>
           </a:fontRef>
         </p:style>
-        <p:txBody>
-          <a:bodyPr/>
-          <a:lstStyle/>
-          <a:p>
-            <a:endParaRPr lang="ru-RU"/>
-          </a:p>
-        </p:txBody>
       </p:sp>
       <p:sp>
         <p:nvSpPr>
@@ -719,7 +714,7 @@
           <a:p>
             <a:fld id="{7D3979F6-D24E-47C2-A27A-E4EF5F938B5D}" type="datetime1">
               <a:rPr lang="ru-RU" smtClean="0"/>
-              <a:t>01.04.2026</a:t>
+              <a:t>07.04.2026</a:t>
             </a:fld>
             <a:endParaRPr lang="ru-RU"/>
           </a:p>
@@ -808,7 +803,7 @@
     </p:spTree>
     <p:extLst>
       <p:ext uri="{BB962C8B-B14F-4D97-AF65-F5344CB8AC3E}">
-        <p14:creationId xmlns:p14="http://schemas.microsoft.com/office/powerpoint/2010/main" val="2699492843"/>
+        <p14:creationId xmlns:p14="http://schemas.microsoft.com/office/powerpoint/2010/main" val="2698335055"/>
       </p:ext>
     </p:extLst>
   </p:cSld>
@@ -927,7 +922,7 @@
           <a:p>
             <a:fld id="{0682B616-F629-4014-86A1-BA1CB29A7BB9}" type="datetime1">
               <a:rPr lang="ru-RU" smtClean="0"/>
-              <a:t>01.04.2026</a:t>
+              <a:t>07.04.2026</a:t>
             </a:fld>
             <a:endParaRPr lang="ru-RU"/>
           </a:p>
@@ -978,7 +973,7 @@
     </p:spTree>
     <p:extLst>
       <p:ext uri="{BB962C8B-B14F-4D97-AF65-F5344CB8AC3E}">
-        <p14:creationId xmlns:p14="http://schemas.microsoft.com/office/powerpoint/2010/main" val="1851808528"/>
+        <p14:creationId xmlns:p14="http://schemas.microsoft.com/office/powerpoint/2010/main" val="3802969904"/>
       </p:ext>
     </p:extLst>
   </p:cSld>
@@ -1183,7 +1178,7 @@
           <a:p>
             <a:fld id="{C1FCC3FD-F2AE-4461-B23D-77B050CF3ABF}" type="datetime1">
               <a:rPr lang="ru-RU" smtClean="0"/>
-              <a:t>01.04.2026</a:t>
+              <a:t>07.04.2026</a:t>
             </a:fld>
             <a:endParaRPr lang="ru-RU"/>
           </a:p>
@@ -1234,7 +1229,7 @@
     </p:spTree>
     <p:extLst>
       <p:ext uri="{BB962C8B-B14F-4D97-AF65-F5344CB8AC3E}">
-        <p14:creationId xmlns:p14="http://schemas.microsoft.com/office/powerpoint/2010/main" val="164940558"/>
+        <p14:creationId xmlns:p14="http://schemas.microsoft.com/office/powerpoint/2010/main" val="832802334"/>
       </p:ext>
     </p:extLst>
   </p:cSld>
@@ -1353,7 +1348,7 @@
           <a:p>
             <a:fld id="{E956BD20-12E1-452E-BD5F-0A0D752D139A}" type="datetime1">
               <a:rPr lang="ru-RU" smtClean="0"/>
-              <a:t>01.04.2026</a:t>
+              <a:t>07.04.2026</a:t>
             </a:fld>
             <a:endParaRPr lang="ru-RU"/>
           </a:p>
@@ -1404,7 +1399,7 @@
     </p:spTree>
     <p:extLst>
       <p:ext uri="{BB962C8B-B14F-4D97-AF65-F5344CB8AC3E}">
-        <p14:creationId xmlns:p14="http://schemas.microsoft.com/office/powerpoint/2010/main" val="4104693928"/>
+        <p14:creationId xmlns:p14="http://schemas.microsoft.com/office/powerpoint/2010/main" val="4059325452"/>
       </p:ext>
     </p:extLst>
   </p:cSld>
@@ -1696,7 +1691,7 @@
           <a:p>
             <a:fld id="{036018E1-4B20-46F0-92E3-679BB36C6235}" type="datetime1">
               <a:rPr lang="ru-RU" smtClean="0"/>
-              <a:t>01.04.2026</a:t>
+              <a:t>07.04.2026</a:t>
             </a:fld>
             <a:endParaRPr lang="ru-RU"/>
           </a:p>
@@ -1785,7 +1780,7 @@
     </p:spTree>
     <p:extLst>
       <p:ext uri="{BB962C8B-B14F-4D97-AF65-F5344CB8AC3E}">
-        <p14:creationId xmlns:p14="http://schemas.microsoft.com/office/powerpoint/2010/main" val="1694369113"/>
+        <p14:creationId xmlns:p14="http://schemas.microsoft.com/office/powerpoint/2010/main" val="1703138611"/>
       </p:ext>
     </p:extLst>
   </p:cSld>
@@ -1971,7 +1966,7 @@
           <a:p>
             <a:fld id="{257B68B8-2C20-4CB0-9EC9-41EB711C303F}" type="datetime1">
               <a:rPr lang="ru-RU" smtClean="0"/>
-              <a:t>01.04.2026</a:t>
+              <a:t>07.04.2026</a:t>
             </a:fld>
             <a:endParaRPr lang="ru-RU"/>
           </a:p>
@@ -2022,7 +2017,7 @@
     </p:spTree>
     <p:extLst>
       <p:ext uri="{BB962C8B-B14F-4D97-AF65-F5344CB8AC3E}">
-        <p14:creationId xmlns:p14="http://schemas.microsoft.com/office/powerpoint/2010/main" val="970789208"/>
+        <p14:creationId xmlns:p14="http://schemas.microsoft.com/office/powerpoint/2010/main" val="1670423518"/>
       </p:ext>
     </p:extLst>
   </p:cSld>
@@ -2350,7 +2345,7 @@
           <a:p>
             <a:fld id="{4988CF67-1E21-48C6-8513-84CD8C6BB31A}" type="datetime1">
               <a:rPr lang="ru-RU" smtClean="0"/>
-              <a:t>01.04.2026</a:t>
+              <a:t>07.04.2026</a:t>
             </a:fld>
             <a:endParaRPr lang="ru-RU"/>
           </a:p>
@@ -2401,7 +2396,7 @@
     </p:spTree>
     <p:extLst>
       <p:ext uri="{BB962C8B-B14F-4D97-AF65-F5344CB8AC3E}">
-        <p14:creationId xmlns:p14="http://schemas.microsoft.com/office/powerpoint/2010/main" val="897502778"/>
+        <p14:creationId xmlns:p14="http://schemas.microsoft.com/office/powerpoint/2010/main" val="1259166640"/>
       </p:ext>
     </p:extLst>
   </p:cSld>
@@ -2468,7 +2463,7 @@
           <a:p>
             <a:fld id="{3E1A2EEC-B1C3-4208-B263-39B570A113CA}" type="datetime1">
               <a:rPr lang="ru-RU" smtClean="0"/>
-              <a:t>01.04.2026</a:t>
+              <a:t>07.04.2026</a:t>
             </a:fld>
             <a:endParaRPr lang="ru-RU"/>
           </a:p>
@@ -2519,7 +2514,7 @@
     </p:spTree>
     <p:extLst>
       <p:ext uri="{BB962C8B-B14F-4D97-AF65-F5344CB8AC3E}">
-        <p14:creationId xmlns:p14="http://schemas.microsoft.com/office/powerpoint/2010/main" val="3947348739"/>
+        <p14:creationId xmlns:p14="http://schemas.microsoft.com/office/powerpoint/2010/main" val="2043306958"/>
       </p:ext>
     </p:extLst>
   </p:cSld>
@@ -2639,7 +2634,7 @@
           <a:p>
             <a:fld id="{262B3C35-94BF-4A5E-9485-3EAD2583A63F}" type="datetime1">
               <a:rPr lang="ru-RU" smtClean="0"/>
-              <a:t>01.04.2026</a:t>
+              <a:t>07.04.2026</a:t>
             </a:fld>
             <a:endParaRPr lang="ru-RU"/>
           </a:p>
@@ -2698,7 +2693,7 @@
     </p:spTree>
     <p:extLst>
       <p:ext uri="{BB962C8B-B14F-4D97-AF65-F5344CB8AC3E}">
-        <p14:creationId xmlns:p14="http://schemas.microsoft.com/office/powerpoint/2010/main" val="2465882003"/>
+        <p14:creationId xmlns:p14="http://schemas.microsoft.com/office/powerpoint/2010/main" val="2873263685"/>
       </p:ext>
     </p:extLst>
   </p:cSld>
@@ -2993,7 +2988,7 @@
           <a:p>
             <a:fld id="{BDFFE024-7BB8-43AF-BB4F-7336D6936167}" type="datetime1">
               <a:rPr lang="ru-RU" smtClean="0"/>
-              <a:t>01.04.2026</a:t>
+              <a:t>07.04.2026</a:t>
             </a:fld>
             <a:endParaRPr lang="ru-RU"/>
           </a:p>
@@ -3065,7 +3060,7 @@
     </p:spTree>
     <p:extLst>
       <p:ext uri="{BB962C8B-B14F-4D97-AF65-F5344CB8AC3E}">
-        <p14:creationId xmlns:p14="http://schemas.microsoft.com/office/powerpoint/2010/main" val="3833943114"/>
+        <p14:creationId xmlns:p14="http://schemas.microsoft.com/office/powerpoint/2010/main" val="3846419984"/>
       </p:ext>
     </p:extLst>
   </p:cSld>
@@ -3370,7 +3365,7 @@
           <a:p>
             <a:fld id="{779AC94A-3C4C-4AA2-B858-501161EC3B80}" type="datetime1">
               <a:rPr lang="ru-RU" smtClean="0"/>
-              <a:t>01.04.2026</a:t>
+              <a:t>07.04.2026</a:t>
             </a:fld>
             <a:endParaRPr lang="ru-RU"/>
           </a:p>
@@ -3421,7 +3416,7 @@
     </p:spTree>
     <p:extLst>
       <p:ext uri="{BB962C8B-B14F-4D97-AF65-F5344CB8AC3E}">
-        <p14:creationId xmlns:p14="http://schemas.microsoft.com/office/powerpoint/2010/main" val="948123150"/>
+        <p14:creationId xmlns:p14="http://schemas.microsoft.com/office/powerpoint/2010/main" val="555768188"/>
       </p:ext>
     </p:extLst>
   </p:cSld>
@@ -3490,13 +3485,6 @@
             <a:schemeClr val="lt1"/>
           </a:fontRef>
         </p:style>
-        <p:txBody>
-          <a:bodyPr/>
-          <a:lstStyle/>
-          <a:p>
-            <a:endParaRPr lang="ru-RU"/>
-          </a:p>
-        </p:txBody>
       </p:sp>
       <p:sp>
         <p:nvSpPr>
@@ -3535,13 +3523,6 @@
             <a:schemeClr val="lt1"/>
           </a:fontRef>
         </p:style>
-        <p:txBody>
-          <a:bodyPr/>
-          <a:lstStyle/>
-          <a:p>
-            <a:endParaRPr lang="ru-RU"/>
-          </a:p>
-        </p:txBody>
       </p:sp>
       <p:sp>
         <p:nvSpPr>
@@ -3671,7 +3652,7 @@
           <a:p>
             <a:fld id="{3D7F385B-51D8-4C55-8700-712BF29E8802}" type="datetime1">
               <a:rPr lang="ru-RU" smtClean="0"/>
-              <a:t>01.04.2026</a:t>
+              <a:t>07.04.2026</a:t>
             </a:fld>
             <a:endParaRPr lang="ru-RU"/>
           </a:p>
@@ -3792,23 +3773,23 @@
     </p:spTree>
     <p:extLst>
       <p:ext uri="{BB962C8B-B14F-4D97-AF65-F5344CB8AC3E}">
-        <p14:creationId xmlns:p14="http://schemas.microsoft.com/office/powerpoint/2010/main" val="2051397201"/>
+        <p14:creationId xmlns:p14="http://schemas.microsoft.com/office/powerpoint/2010/main" val="1364477042"/>
       </p:ext>
     </p:extLst>
   </p:cSld>
   <p:clrMap bg1="lt1" tx1="dk1" bg2="lt2" tx2="dk2" accent1="accent1" accent2="accent2" accent3="accent3" accent4="accent4" accent5="accent5" accent6="accent6" hlink="hlink" folHlink="folHlink"/>
   <p:sldLayoutIdLst>
-    <p:sldLayoutId id="2147483673" r:id="rId1"/>
-    <p:sldLayoutId id="2147483674" r:id="rId2"/>
-    <p:sldLayoutId id="2147483675" r:id="rId3"/>
-    <p:sldLayoutId id="2147483676" r:id="rId4"/>
-    <p:sldLayoutId id="2147483677" r:id="rId5"/>
-    <p:sldLayoutId id="2147483678" r:id="rId6"/>
-    <p:sldLayoutId id="2147483679" r:id="rId7"/>
-    <p:sldLayoutId id="2147483680" r:id="rId8"/>
-    <p:sldLayoutId id="2147483681" r:id="rId9"/>
-    <p:sldLayoutId id="2147483682" r:id="rId10"/>
-    <p:sldLayoutId id="2147483683" r:id="rId11"/>
+    <p:sldLayoutId id="2147483709" r:id="rId1"/>
+    <p:sldLayoutId id="2147483710" r:id="rId2"/>
+    <p:sldLayoutId id="2147483711" r:id="rId3"/>
+    <p:sldLayoutId id="2147483712" r:id="rId4"/>
+    <p:sldLayoutId id="2147483713" r:id="rId5"/>
+    <p:sldLayoutId id="2147483714" r:id="rId6"/>
+    <p:sldLayoutId id="2147483715" r:id="rId7"/>
+    <p:sldLayoutId id="2147483716" r:id="rId8"/>
+    <p:sldLayoutId id="2147483717" r:id="rId9"/>
+    <p:sldLayoutId id="2147483718" r:id="rId10"/>
+    <p:sldLayoutId id="2147483719" r:id="rId11"/>
   </p:sldLayoutIdLst>
   <p:hf hdr="0" ftr="0" dt="0"/>
   <p:txStyles>
@@ -4204,66 +4185,6 @@
           <a:chExt cx="0" cy="0"/>
         </a:xfrm>
       </p:grpSpPr>
-      <p:sp useBgFill="1">
-        <p:nvSpPr>
-          <p:cNvPr id="27" name="Rectangle 18">
-            <a:extLst>
-              <a:ext uri="{FF2B5EF4-FFF2-40B4-BE49-F238E27FC236}">
-                <a16:creationId xmlns:a16="http://schemas.microsoft.com/office/drawing/2014/main" id="{8C6E698C-8155-4B8B-BDC9-B7299772B509}"/>
-              </a:ext>
-              <a:ext uri="{C183D7F6-B498-43B3-948B-1728B52AA6E4}">
-                <adec:decorative xmlns:adec="http://schemas.microsoft.com/office/drawing/2017/decorative" val="1"/>
-              </a:ext>
-            </a:extLst>
-          </p:cNvPr>
-          <p:cNvSpPr>
-            <a:spLocks noGrp="1" noRot="1" noChangeAspect="1" noMove="1" noResize="1" noEditPoints="1" noAdjustHandles="1" noChangeArrowheads="1" noChangeShapeType="1" noTextEdit="1"/>
-          </p:cNvSpPr>
-          <p:nvPr>
-            <p:extLst>
-              <p:ext uri="{386F3935-93C4-4BCD-93E2-E3B085C9AB24}">
-                <p16:designElem xmlns:p16="http://schemas.microsoft.com/office/powerpoint/2015/main" val="1"/>
-              </p:ext>
-            </p:extLst>
-          </p:nvPr>
-        </p:nvSpPr>
-        <p:spPr>
-          <a:xfrm>
-            <a:off x="0" y="0"/>
-            <a:ext cx="12188952" cy="6858000"/>
-          </a:xfrm>
-          <a:prstGeom prst="rect">
-            <a:avLst/>
-          </a:prstGeom>
-          <a:ln>
-            <a:noFill/>
-          </a:ln>
-        </p:spPr>
-        <p:style>
-          <a:lnRef idx="2">
-            <a:schemeClr val="accent1">
-              <a:shade val="50000"/>
-            </a:schemeClr>
-          </a:lnRef>
-          <a:fillRef idx="1">
-            <a:schemeClr val="accent1"/>
-          </a:fillRef>
-          <a:effectRef idx="0">
-            <a:schemeClr val="accent1"/>
-          </a:effectRef>
-          <a:fontRef idx="minor">
-            <a:schemeClr val="lt1"/>
-          </a:fontRef>
-        </p:style>
-        <p:txBody>
-          <a:bodyPr rtlCol="0" anchor="ctr"/>
-          <a:lstStyle/>
-          <a:p>
-            <a:pPr algn="ctr"/>
-            <a:endParaRPr lang="en-US"/>
-          </a:p>
-        </p:txBody>
-      </p:sp>
       <p:sp>
         <p:nvSpPr>
           <p:cNvPr id="2" name="Заголовок 1">
@@ -4547,130 +4468,6 @@
                 <a:schemeClr val="tx2"/>
               </a:solidFill>
             </a:endParaRPr>
-          </a:p>
-        </p:txBody>
-      </p:sp>
-      <p:sp>
-        <p:nvSpPr>
-          <p:cNvPr id="28" name="Rectangle 20">
-            <a:extLst>
-              <a:ext uri="{FF2B5EF4-FFF2-40B4-BE49-F238E27FC236}">
-                <a16:creationId xmlns:a16="http://schemas.microsoft.com/office/drawing/2014/main" id="{0EEF5601-A8BC-411D-AA64-3E79320BA122}"/>
-              </a:ext>
-              <a:ext uri="{C183D7F6-B498-43B3-948B-1728B52AA6E4}">
-                <adec:decorative xmlns:adec="http://schemas.microsoft.com/office/drawing/2017/decorative" val="1"/>
-              </a:ext>
-            </a:extLst>
-          </p:cNvPr>
-          <p:cNvSpPr>
-            <a:spLocks noGrp="1" noRot="1" noChangeAspect="1" noMove="1" noResize="1" noEditPoints="1" noAdjustHandles="1" noChangeArrowheads="1" noChangeShapeType="1" noTextEdit="1"/>
-          </p:cNvSpPr>
-          <p:nvPr>
-            <p:extLst>
-              <p:ext uri="{386F3935-93C4-4BCD-93E2-E3B085C9AB24}">
-                <p16:designElem xmlns:p16="http://schemas.microsoft.com/office/powerpoint/2015/main" val="1"/>
-              </p:ext>
-            </p:extLst>
-          </p:nvPr>
-        </p:nvSpPr>
-        <p:spPr bwMode="white">
-          <a:xfrm>
-            <a:off x="0" y="0"/>
-            <a:ext cx="4584734" cy="6858000"/>
-          </a:xfrm>
-          <a:prstGeom prst="rect">
-            <a:avLst/>
-          </a:prstGeom>
-          <a:solidFill>
-            <a:schemeClr val="accent2"/>
-          </a:solidFill>
-          <a:ln>
-            <a:noFill/>
-          </a:ln>
-        </p:spPr>
-        <p:style>
-          <a:lnRef idx="2">
-            <a:schemeClr val="accent1">
-              <a:shade val="50000"/>
-            </a:schemeClr>
-          </a:lnRef>
-          <a:fillRef idx="1">
-            <a:schemeClr val="accent1"/>
-          </a:fillRef>
-          <a:effectRef idx="0">
-            <a:schemeClr val="accent1"/>
-          </a:effectRef>
-          <a:fontRef idx="minor">
-            <a:schemeClr val="lt1"/>
-          </a:fontRef>
-        </p:style>
-        <p:txBody>
-          <a:bodyPr/>
-          <a:lstStyle/>
-          <a:p>
-            <a:endParaRPr lang="ru-RU"/>
-          </a:p>
-        </p:txBody>
-      </p:sp>
-      <p:sp>
-        <p:nvSpPr>
-          <p:cNvPr id="29" name="Rectangle 22">
-            <a:extLst>
-              <a:ext uri="{FF2B5EF4-FFF2-40B4-BE49-F238E27FC236}">
-                <a16:creationId xmlns:a16="http://schemas.microsoft.com/office/drawing/2014/main" id="{33209156-242F-4B26-8D07-CEB2B68A9F9A}"/>
-              </a:ext>
-              <a:ext uri="{C183D7F6-B498-43B3-948B-1728B52AA6E4}">
-                <adec:decorative xmlns:adec="http://schemas.microsoft.com/office/drawing/2017/decorative" val="1"/>
-              </a:ext>
-            </a:extLst>
-          </p:cNvPr>
-          <p:cNvSpPr>
-            <a:spLocks noGrp="1" noRot="1" noChangeAspect="1" noMove="1" noResize="1" noEditPoints="1" noAdjustHandles="1" noChangeArrowheads="1" noChangeShapeType="1" noTextEdit="1"/>
-          </p:cNvSpPr>
-          <p:nvPr>
-            <p:extLst>
-              <p:ext uri="{386F3935-93C4-4BCD-93E2-E3B085C9AB24}">
-                <p16:designElem xmlns:p16="http://schemas.microsoft.com/office/powerpoint/2015/main" val="1"/>
-              </p:ext>
-            </p:extLst>
-          </p:nvPr>
-        </p:nvSpPr>
-        <p:spPr>
-          <a:xfrm>
-            <a:off x="4584734" y="0"/>
-            <a:ext cx="64008" cy="6858000"/>
-          </a:xfrm>
-          <a:prstGeom prst="rect">
-            <a:avLst/>
-          </a:prstGeom>
-          <a:solidFill>
-            <a:schemeClr val="accent1"/>
-          </a:solidFill>
-          <a:ln>
-            <a:noFill/>
-          </a:ln>
-        </p:spPr>
-        <p:style>
-          <a:lnRef idx="2">
-            <a:schemeClr val="accent1">
-              <a:shade val="50000"/>
-            </a:schemeClr>
-          </a:lnRef>
-          <a:fillRef idx="1">
-            <a:schemeClr val="accent1"/>
-          </a:fillRef>
-          <a:effectRef idx="0">
-            <a:schemeClr val="accent1"/>
-          </a:effectRef>
-          <a:fontRef idx="minor">
-            <a:schemeClr val="lt1"/>
-          </a:fontRef>
-        </p:style>
-        <p:txBody>
-          <a:bodyPr/>
-          <a:lstStyle/>
-          <a:p>
-            <a:endParaRPr lang="ru-RU"/>
           </a:p>
         </p:txBody>
       </p:sp>
@@ -4804,10 +4601,10 @@
       </p:sp>
       <p:pic>
         <p:nvPicPr>
-          <p:cNvPr id="8" name="Рисунок 7">
+          <p:cNvPr id="5" name="Рисунок 4">
             <a:extLst>
               <a:ext uri="{FF2B5EF4-FFF2-40B4-BE49-F238E27FC236}">
-                <a16:creationId xmlns:a16="http://schemas.microsoft.com/office/drawing/2014/main" id="{D50B61BB-D4B2-4A4B-9697-38CE47FE4EBF}"/>
+                <a16:creationId xmlns:a16="http://schemas.microsoft.com/office/drawing/2014/main" id="{A4BD591A-304E-0BA2-89B2-B832D1CA4124}"/>
               </a:ext>
             </a:extLst>
           </p:cNvPr>
@@ -4824,8 +4621,8 @@
         </p:blipFill>
         <p:spPr>
           <a:xfrm>
-            <a:off x="979517" y="1086044"/>
-            <a:ext cx="10422032" cy="5022660"/>
+            <a:off x="589781" y="1229384"/>
+            <a:ext cx="11012437" cy="5087060"/>
           </a:xfrm>
           <a:prstGeom prst="rect">
             <a:avLst/>
@@ -5296,12 +5093,20 @@
 <file path=ppt/slides/slide12.xml><?xml version="1.0" encoding="utf-8"?>
 <p:sld xmlns:a="http://schemas.openxmlformats.org/drawingml/2006/main" xmlns:r="http://schemas.openxmlformats.org/officeDocument/2006/relationships" xmlns:p="http://schemas.openxmlformats.org/presentationml/2006/main">
   <p:cSld>
+    <p:bg>
+      <p:bgPr>
+        <a:solidFill>
+          <a:schemeClr val="bg1"/>
+        </a:solidFill>
+        <a:effectLst/>
+      </p:bgPr>
+    </p:bg>
     <p:spTree>
       <p:nvGrpSpPr>
         <p:cNvPr id="1" name="">
           <a:extLst>
             <a:ext uri="{FF2B5EF4-FFF2-40B4-BE49-F238E27FC236}">
-              <a16:creationId xmlns:a16="http://schemas.microsoft.com/office/drawing/2014/main" id="{60C8EB8F-A8D6-8ECE-4296-7766A1B08C35}"/>
+              <a16:creationId xmlns:a16="http://schemas.microsoft.com/office/drawing/2014/main" id="{5DDEFE94-A052-2D90-04FE-3AB80F242F60}"/>
             </a:ext>
           </a:extLst>
         </p:cNvPr>
@@ -5318,10 +5123,83 @@
       </p:grpSpPr>
       <p:sp>
         <p:nvSpPr>
+          <p:cNvPr id="4" name="Номер слайда 3">
+            <a:extLst>
+              <a:ext uri="{FF2B5EF4-FFF2-40B4-BE49-F238E27FC236}">
+                <a16:creationId xmlns:a16="http://schemas.microsoft.com/office/drawing/2014/main" id="{77D1F7AC-D7ED-3C01-DC50-27CB2F152661}"/>
+              </a:ext>
+            </a:extLst>
+          </p:cNvPr>
+          <p:cNvSpPr>
+            <a:spLocks noGrp="1"/>
+          </p:cNvSpPr>
+          <p:nvPr>
+            <p:ph type="sldNum" sz="quarter" idx="12"/>
+          </p:nvPr>
+        </p:nvSpPr>
+        <p:spPr/>
+        <p:txBody>
+          <a:bodyPr vert="horz" lIns="91440" tIns="45720" rIns="91440" bIns="45720" rtlCol="0" anchor="ctr">
+            <a:normAutofit/>
+          </a:bodyPr>
+          <a:lstStyle/>
+          <a:p>
+            <a:pPr defTabSz="914400">
+              <a:spcAft>
+                <a:spcPts val="600"/>
+              </a:spcAft>
+            </a:pPr>
+            <a:fld id="{25726283-AA38-4E85-AA5F-A5EF301525D1}" type="slidenum">
+              <a:rPr lang="en-US" smtClean="0"/>
+              <a:pPr defTabSz="914400">
+                <a:spcAft>
+                  <a:spcPts val="600"/>
+                </a:spcAft>
+              </a:pPr>
+              <a:t>12</a:t>
+            </a:fld>
+            <a:endParaRPr lang="en-US"/>
+          </a:p>
+        </p:txBody>
+      </p:sp>
+      <p:pic>
+        <p:nvPicPr>
+          <p:cNvPr id="7" name="Объект 6">
+            <a:extLst>
+              <a:ext uri="{FF2B5EF4-FFF2-40B4-BE49-F238E27FC236}">
+                <a16:creationId xmlns:a16="http://schemas.microsoft.com/office/drawing/2014/main" id="{51CEC34C-8B39-BD50-89D9-008DA9EFA79C}"/>
+              </a:ext>
+            </a:extLst>
+          </p:cNvPr>
+          <p:cNvPicPr>
+            <a:picLocks noGrp="1" noChangeAspect="1"/>
+          </p:cNvPicPr>
+          <p:nvPr>
+            <p:ph idx="4294967295"/>
+          </p:nvPr>
+        </p:nvPicPr>
+        <p:blipFill>
+          <a:blip r:embed="rId2"/>
+          <a:stretch>
+            <a:fillRect/>
+          </a:stretch>
+        </p:blipFill>
+        <p:spPr>
+          <a:xfrm>
+            <a:off x="731519" y="77002"/>
+            <a:ext cx="4016375" cy="6243638"/>
+          </a:xfrm>
+          <a:prstGeom prst="rect">
+            <a:avLst/>
+          </a:prstGeom>
+        </p:spPr>
+      </p:pic>
+      <p:sp>
+        <p:nvSpPr>
           <p:cNvPr id="2" name="Заголовок 1">
             <a:extLst>
               <a:ext uri="{FF2B5EF4-FFF2-40B4-BE49-F238E27FC236}">
-                <a16:creationId xmlns:a16="http://schemas.microsoft.com/office/drawing/2014/main" id="{E99A630E-A8E9-6780-DE26-21D3461EC3E9}"/>
+                <a16:creationId xmlns:a16="http://schemas.microsoft.com/office/drawing/2014/main" id="{B7DF0EC8-FA18-5C48-AC8E-F72ED910D348}"/>
               </a:ext>
             </a:extLst>
           </p:cNvPr>
@@ -5329,6 +5207,158 @@
             <a:spLocks noGrp="1"/>
           </p:cNvSpPr>
           <p:nvPr>
+            <p:ph type="title" idx="4294967295"/>
+          </p:nvPr>
+        </p:nvSpPr>
+        <p:spPr>
+          <a:xfrm>
+            <a:off x="5334903" y="1260124"/>
+            <a:ext cx="6456044" cy="3273375"/>
+          </a:xfrm>
+        </p:spPr>
+        <p:txBody>
+          <a:bodyPr vert="horz" lIns="91440" tIns="45720" rIns="91440" bIns="45720" rtlCol="0" anchor="b">
+            <a:normAutofit/>
+          </a:bodyPr>
+          <a:lstStyle/>
+          <a:p>
+            <a:r>
+              <a:rPr lang="en-US" sz="6800" dirty="0" err="1">
+                <a:solidFill>
+                  <a:schemeClr val="tx1">
+                    <a:lumMod val="85000"/>
+                    <a:lumOff val="15000"/>
+                  </a:schemeClr>
+                </a:solidFill>
+              </a:rPr>
+              <a:t>Алгоритм</a:t>
+            </a:r>
+            <a:r>
+              <a:rPr lang="en-US" sz="6800" dirty="0">
+                <a:solidFill>
+                  <a:schemeClr val="tx1">
+                    <a:lumMod val="85000"/>
+                    <a:lumOff val="15000"/>
+                  </a:schemeClr>
+                </a:solidFill>
+              </a:rPr>
+              <a:t> </a:t>
+            </a:r>
+            <a:r>
+              <a:rPr lang="en-US" sz="6800" dirty="0" err="1">
+                <a:solidFill>
+                  <a:schemeClr val="tx1">
+                    <a:lumMod val="85000"/>
+                    <a:lumOff val="15000"/>
+                  </a:schemeClr>
+                </a:solidFill>
+              </a:rPr>
+              <a:t>выбора</a:t>
+            </a:r>
+            <a:r>
+              <a:rPr lang="en-US" sz="6800" dirty="0">
+                <a:solidFill>
+                  <a:schemeClr val="tx1">
+                    <a:lumMod val="85000"/>
+                    <a:lumOff val="15000"/>
+                  </a:schemeClr>
+                </a:solidFill>
+              </a:rPr>
+              <a:t> </a:t>
+            </a:r>
+            <a:r>
+              <a:rPr lang="en-US" sz="6800" dirty="0" err="1">
+                <a:solidFill>
+                  <a:schemeClr val="tx1">
+                    <a:lumMod val="85000"/>
+                    <a:lumOff val="15000"/>
+                  </a:schemeClr>
+                </a:solidFill>
+              </a:rPr>
+              <a:t>целевой</a:t>
+            </a:r>
+            <a:r>
+              <a:rPr lang="en-US" sz="6800" dirty="0">
+                <a:solidFill>
+                  <a:schemeClr val="tx1">
+                    <a:lumMod val="85000"/>
+                    <a:lumOff val="15000"/>
+                  </a:schemeClr>
+                </a:solidFill>
+              </a:rPr>
+              <a:t> </a:t>
+            </a:r>
+            <a:r>
+              <a:rPr lang="en-US" sz="6800" dirty="0" err="1">
+                <a:solidFill>
+                  <a:schemeClr val="tx1">
+                    <a:lumMod val="85000"/>
+                    <a:lumOff val="15000"/>
+                  </a:schemeClr>
+                </a:solidFill>
+              </a:rPr>
+              <a:t>переменной</a:t>
+            </a:r>
+            <a:endParaRPr lang="en-US" sz="6800" dirty="0">
+              <a:solidFill>
+                <a:schemeClr val="tx1">
+                  <a:lumMod val="85000"/>
+                  <a:lumOff val="15000"/>
+                </a:schemeClr>
+              </a:solidFill>
+            </a:endParaRPr>
+          </a:p>
+        </p:txBody>
+      </p:sp>
+    </p:spTree>
+    <p:extLst>
+      <p:ext uri="{BB962C8B-B14F-4D97-AF65-F5344CB8AC3E}">
+        <p14:creationId xmlns:p14="http://schemas.microsoft.com/office/powerpoint/2010/main" val="17064739"/>
+      </p:ext>
+    </p:extLst>
+  </p:cSld>
+  <p:clrMapOvr>
+    <a:masterClrMapping/>
+  </p:clrMapOvr>
+</p:sld>
+</file>
+
+<file path=ppt/slides/slide13.xml><?xml version="1.0" encoding="utf-8"?>
+<p:sld xmlns:a="http://schemas.openxmlformats.org/drawingml/2006/main" xmlns:r="http://schemas.openxmlformats.org/officeDocument/2006/relationships" xmlns:p="http://schemas.openxmlformats.org/presentationml/2006/main">
+  <p:cSld>
+    <p:spTree>
+      <p:nvGrpSpPr>
+        <p:cNvPr id="1" name="">
+          <a:extLst>
+            <a:ext uri="{FF2B5EF4-FFF2-40B4-BE49-F238E27FC236}">
+              <a16:creationId xmlns:a16="http://schemas.microsoft.com/office/drawing/2014/main" id="{5CA3FE9A-7299-9C02-C860-5AF8F09789D1}"/>
+            </a:ext>
+          </a:extLst>
+        </p:cNvPr>
+        <p:cNvGrpSpPr/>
+        <p:nvPr/>
+      </p:nvGrpSpPr>
+      <p:grpSpPr>
+        <a:xfrm>
+          <a:off x="0" y="0"/>
+          <a:ext cx="0" cy="0"/>
+          <a:chOff x="0" y="0"/>
+          <a:chExt cx="0" cy="0"/>
+        </a:xfrm>
+      </p:grpSpPr>
+      <p:sp>
+        <p:nvSpPr>
+          <p:cNvPr id="2" name="Заголовок 1">
+            <a:extLst>
+              <a:ext uri="{FF2B5EF4-FFF2-40B4-BE49-F238E27FC236}">
+                <a16:creationId xmlns:a16="http://schemas.microsoft.com/office/drawing/2014/main" id="{98294507-939F-3969-C0A5-243C543A9193}"/>
+              </a:ext>
+            </a:extLst>
+          </p:cNvPr>
+          <p:cNvSpPr>
+            <a:spLocks noGrp="1"/>
+          </p:cNvSpPr>
+          <p:nvPr>
             <p:ph type="title"/>
           </p:nvPr>
         </p:nvSpPr>
@@ -5339,19 +5369,119 @@
           </a:xfrm>
         </p:spPr>
         <p:txBody>
-          <a:bodyPr/>
+          <a:bodyPr>
+            <a:normAutofit fontScale="90000"/>
+          </a:bodyPr>
           <a:lstStyle/>
           <a:p>
             <a:pPr algn="ctr"/>
             <a:r>
               <a:rPr lang="ru-RU" dirty="0"/>
-              <a:t>Пример </a:t>
-            </a:r>
-            <a:r>
-              <a:rPr lang="ru-RU" dirty="0" err="1"/>
-              <a:t>датасета</a:t>
-            </a:r>
-            <a:endParaRPr lang="ru-RU" dirty="0"/>
+              <a:t>Метрики качества кодирования категориальных признаков</a:t>
+            </a:r>
+          </a:p>
+        </p:txBody>
+      </p:sp>
+      <p:sp>
+        <p:nvSpPr>
+          <p:cNvPr id="3" name="Объект 2">
+            <a:extLst>
+              <a:ext uri="{FF2B5EF4-FFF2-40B4-BE49-F238E27FC236}">
+                <a16:creationId xmlns:a16="http://schemas.microsoft.com/office/drawing/2014/main" id="{779C1D5E-3C30-BFBF-3B99-28865CA63AB7}"/>
+              </a:ext>
+            </a:extLst>
+          </p:cNvPr>
+          <p:cNvSpPr>
+            <a:spLocks noGrp="1"/>
+          </p:cNvSpPr>
+          <p:nvPr>
+            <p:ph idx="1"/>
+          </p:nvPr>
+        </p:nvSpPr>
+        <p:spPr>
+          <a:xfrm>
+            <a:off x="1597152" y="2203187"/>
+            <a:ext cx="9354312" cy="4183128"/>
+          </a:xfrm>
+        </p:spPr>
+        <p:txBody>
+          <a:bodyPr>
+            <a:normAutofit lnSpcReduction="10000"/>
+          </a:bodyPr>
+          <a:lstStyle/>
+          <a:p>
+            <a:pPr marL="457200" indent="-457200">
+              <a:buFont typeface="+mj-lt"/>
+              <a:buAutoNum type="arabicPeriod"/>
+            </a:pPr>
+            <a:r>
+              <a:rPr lang="ru-RU" sz="2800" b="1" dirty="0"/>
+              <a:t>Корреляция Пирсона </a:t>
+            </a:r>
+          </a:p>
+          <a:p>
+            <a:pPr marL="457200" indent="-457200">
+              <a:buFont typeface="+mj-lt"/>
+              <a:buAutoNum type="arabicPeriod"/>
+            </a:pPr>
+            <a:r>
+              <a:rPr lang="ru-RU" sz="2800" b="1" dirty="0"/>
+              <a:t>Корреляция </a:t>
+            </a:r>
+            <a:r>
+              <a:rPr lang="ru-RU" sz="2800" b="1" dirty="0" err="1"/>
+              <a:t>Спирмена</a:t>
+            </a:r>
+            <a:r>
+              <a:rPr lang="ru-RU" sz="2800" b="1" dirty="0"/>
+              <a:t> </a:t>
+            </a:r>
+          </a:p>
+          <a:p>
+            <a:pPr marL="457200" indent="-457200">
+              <a:buFont typeface="+mj-lt"/>
+              <a:buAutoNum type="arabicPeriod"/>
+            </a:pPr>
+            <a:r>
+              <a:rPr lang="ru-RU" sz="2800" b="1" dirty="0"/>
+              <a:t>Взаимная информация</a:t>
+            </a:r>
+            <a:endParaRPr lang="en-US" sz="2800" b="1" dirty="0"/>
+          </a:p>
+          <a:p>
+            <a:pPr marL="457200" indent="-457200">
+              <a:buFont typeface="+mj-lt"/>
+              <a:buAutoNum type="arabicPeriod"/>
+            </a:pPr>
+            <a:r>
+              <a:rPr lang="ru-RU" sz="2800" b="1" dirty="0"/>
+              <a:t>Коэффициент детерминации </a:t>
+            </a:r>
+          </a:p>
+          <a:p>
+            <a:pPr marL="457200" indent="-457200">
+              <a:buFont typeface="+mj-lt"/>
+              <a:buAutoNum type="arabicPeriod"/>
+            </a:pPr>
+            <a:r>
+              <a:rPr lang="ru-RU" sz="2800" b="1" dirty="0"/>
+              <a:t>Качество</a:t>
+            </a:r>
+          </a:p>
+          <a:p>
+            <a:br>
+              <a:rPr lang="ru-RU" dirty="0"/>
+            </a:br>
+            <a:br>
+              <a:rPr lang="en-US" dirty="0"/>
+            </a:br>
+            <a:br>
+              <a:rPr lang="ru-RU" dirty="0"/>
+            </a:br>
+            <a:br>
+              <a:rPr lang="ru-RU" dirty="0"/>
+            </a:br>
+            <a:endParaRPr lang="en-US" b="1" dirty="0"/>
           </a:p>
         </p:txBody>
       </p:sp>
@@ -5360,7 +5490,7 @@
           <p:cNvPr id="4" name="Номер слайда 3">
             <a:extLst>
               <a:ext uri="{FF2B5EF4-FFF2-40B4-BE49-F238E27FC236}">
-                <a16:creationId xmlns:a16="http://schemas.microsoft.com/office/drawing/2014/main" id="{D44B5FF5-C00C-336B-6C04-0685094DD9D3}"/>
+                <a16:creationId xmlns:a16="http://schemas.microsoft.com/office/drawing/2014/main" id="{BD221EF8-EAC5-AF28-ADA2-079439BAC86B}"/>
               </a:ext>
             </a:extLst>
           </p:cNvPr>
@@ -5378,7 +5508,1502 @@
           <a:p>
             <a:fld id="{25726283-AA38-4E85-AA5F-A5EF301525D1}" type="slidenum">
               <a:rPr lang="ru-RU" smtClean="0"/>
-              <a:t>12</a:t>
+              <a:t>13</a:t>
+            </a:fld>
+            <a:endParaRPr lang="ru-RU"/>
+          </a:p>
+        </p:txBody>
+      </p:sp>
+    </p:spTree>
+    <p:extLst>
+      <p:ext uri="{BB962C8B-B14F-4D97-AF65-F5344CB8AC3E}">
+        <p14:creationId xmlns:p14="http://schemas.microsoft.com/office/powerpoint/2010/main" val="3436810805"/>
+      </p:ext>
+    </p:extLst>
+  </p:cSld>
+  <p:clrMapOvr>
+    <a:masterClrMapping/>
+  </p:clrMapOvr>
+</p:sld>
+</file>
+
+<file path=ppt/slides/slide14.xml><?xml version="1.0" encoding="utf-8"?>
+<p:sld xmlns:a="http://schemas.openxmlformats.org/drawingml/2006/main" xmlns:r="http://schemas.openxmlformats.org/officeDocument/2006/relationships" xmlns:p="http://schemas.openxmlformats.org/presentationml/2006/main">
+  <p:cSld>
+    <p:spTree>
+      <p:nvGrpSpPr>
+        <p:cNvPr id="1" name="">
+          <a:extLst>
+            <a:ext uri="{FF2B5EF4-FFF2-40B4-BE49-F238E27FC236}">
+              <a16:creationId xmlns:a16="http://schemas.microsoft.com/office/drawing/2014/main" id="{F3FD9131-A186-4FD9-CB08-CD216DD0B591}"/>
+            </a:ext>
+          </a:extLst>
+        </p:cNvPr>
+        <p:cNvGrpSpPr/>
+        <p:nvPr/>
+      </p:nvGrpSpPr>
+      <p:grpSpPr>
+        <a:xfrm>
+          <a:off x="0" y="0"/>
+          <a:ext cx="0" cy="0"/>
+          <a:chOff x="0" y="0"/>
+          <a:chExt cx="0" cy="0"/>
+        </a:xfrm>
+      </p:grpSpPr>
+      <p:sp>
+        <p:nvSpPr>
+          <p:cNvPr id="2" name="Заголовок 1">
+            <a:extLst>
+              <a:ext uri="{FF2B5EF4-FFF2-40B4-BE49-F238E27FC236}">
+                <a16:creationId xmlns:a16="http://schemas.microsoft.com/office/drawing/2014/main" id="{BA5DF96D-6F53-9775-AEAF-C3A1395F7C00}"/>
+              </a:ext>
+            </a:extLst>
+          </p:cNvPr>
+          <p:cNvSpPr>
+            <a:spLocks noGrp="1"/>
+          </p:cNvSpPr>
+          <p:nvPr>
+            <p:ph type="title"/>
+          </p:nvPr>
+        </p:nvSpPr>
+        <p:spPr>
+          <a:xfrm>
+            <a:off x="1066800" y="233424"/>
+            <a:ext cx="10058400" cy="801533"/>
+          </a:xfrm>
+        </p:spPr>
+        <p:txBody>
+          <a:bodyPr/>
+          <a:lstStyle/>
+          <a:p>
+            <a:pPr algn="ctr"/>
+            <a:r>
+              <a:rPr lang="ru-RU" dirty="0"/>
+              <a:t>Корреляция Пирсона </a:t>
+            </a:r>
+          </a:p>
+        </p:txBody>
+      </p:sp>
+      <p:sp>
+        <p:nvSpPr>
+          <p:cNvPr id="3" name="Объект 2">
+            <a:extLst>
+              <a:ext uri="{FF2B5EF4-FFF2-40B4-BE49-F238E27FC236}">
+                <a16:creationId xmlns:a16="http://schemas.microsoft.com/office/drawing/2014/main" id="{3CBC3E72-0DDD-1919-0180-B0722F98E9A0}"/>
+              </a:ext>
+            </a:extLst>
+          </p:cNvPr>
+          <p:cNvSpPr>
+            <a:spLocks noGrp="1"/>
+          </p:cNvSpPr>
+          <p:nvPr>
+            <p:ph idx="1"/>
+          </p:nvPr>
+        </p:nvSpPr>
+        <p:spPr>
+          <a:xfrm>
+            <a:off x="1066800" y="1408360"/>
+            <a:ext cx="10847832" cy="5051425"/>
+          </a:xfrm>
+        </p:spPr>
+        <p:txBody>
+          <a:bodyPr>
+            <a:normAutofit fontScale="47500" lnSpcReduction="20000"/>
+          </a:bodyPr>
+          <a:lstStyle/>
+          <a:p>
+            <a:pPr algn="just"/>
+            <a:r>
+              <a:rPr lang="ru-RU" sz="4000" dirty="0"/>
+              <a:t>Формула:</a:t>
+            </a:r>
+          </a:p>
+          <a:p>
+            <a:pPr algn="just"/>
+            <a:r>
+              <a:rPr lang="en-US" sz="4000" dirty="0"/>
+              <a:t>r = </a:t>
+            </a:r>
+            <a:r>
+              <a:rPr lang="el-GR" sz="4000" dirty="0"/>
+              <a:t>Σ[(</a:t>
+            </a:r>
+            <a:r>
+              <a:rPr lang="en-US" sz="4000" dirty="0" err="1"/>
+              <a:t>X_i</a:t>
+            </a:r>
+            <a:r>
+              <a:rPr lang="en-US" sz="4000" dirty="0"/>
+              <a:t> – X̄)(</a:t>
+            </a:r>
+            <a:r>
+              <a:rPr lang="en-US" sz="4000" dirty="0" err="1"/>
+              <a:t>Y_i</a:t>
+            </a:r>
+            <a:r>
+              <a:rPr lang="en-US" sz="4000" dirty="0"/>
+              <a:t> – Ȳ)] / √[</a:t>
+            </a:r>
+            <a:r>
+              <a:rPr lang="el-GR" sz="4000" dirty="0"/>
+              <a:t>Σ(</a:t>
+            </a:r>
+            <a:r>
+              <a:rPr lang="en-US" sz="4000" dirty="0" err="1"/>
+              <a:t>X_i</a:t>
+            </a:r>
+            <a:r>
+              <a:rPr lang="en-US" sz="4000" dirty="0"/>
+              <a:t> – X̄)² * </a:t>
+            </a:r>
+            <a:r>
+              <a:rPr lang="el-GR" sz="4000" dirty="0"/>
+              <a:t>Σ(</a:t>
+            </a:r>
+            <a:r>
+              <a:rPr lang="en-US" sz="4000" dirty="0" err="1"/>
+              <a:t>Y_i</a:t>
+            </a:r>
+            <a:r>
+              <a:rPr lang="en-US" sz="4000" dirty="0"/>
+              <a:t> – Ȳ)²]</a:t>
+            </a:r>
+            <a:endParaRPr lang="ru-RU" sz="4000" dirty="0"/>
+          </a:p>
+          <a:p>
+            <a:pPr algn="just"/>
+            <a:r>
+              <a:rPr lang="ru-RU" sz="4000" dirty="0"/>
+              <a:t>Формула в альтернативной форме:</a:t>
+            </a:r>
+          </a:p>
+          <a:p>
+            <a:pPr algn="just"/>
+            <a:r>
+              <a:rPr lang="en-US" sz="4000" dirty="0"/>
+              <a:t>r = </a:t>
+            </a:r>
+            <a:r>
+              <a:rPr lang="en-US" sz="4000" dirty="0" err="1"/>
+              <a:t>cov</a:t>
+            </a:r>
+            <a:r>
+              <a:rPr lang="en-US" sz="4000" dirty="0"/>
+              <a:t>(X,Y) / (</a:t>
+            </a:r>
+            <a:r>
+              <a:rPr lang="el-GR" sz="4000" dirty="0"/>
+              <a:t>σ_</a:t>
+            </a:r>
+            <a:r>
+              <a:rPr lang="en-US" sz="4000" dirty="0"/>
+              <a:t>X * </a:t>
+            </a:r>
+            <a:r>
+              <a:rPr lang="el-GR" sz="4000" dirty="0"/>
+              <a:t>σ_</a:t>
+            </a:r>
+            <a:r>
+              <a:rPr lang="en-US" sz="4000" dirty="0"/>
+              <a:t>Y)</a:t>
+            </a:r>
+            <a:endParaRPr lang="ru-RU" sz="4000" dirty="0"/>
+          </a:p>
+          <a:p>
+            <a:pPr algn="just"/>
+            <a:r>
+              <a:rPr lang="ru-RU" sz="4000" dirty="0"/>
+              <a:t>где:</a:t>
+            </a:r>
+          </a:p>
+          <a:p>
+            <a:pPr marL="457200" indent="-457200" algn="just">
+              <a:buFont typeface="+mj-lt"/>
+              <a:buAutoNum type="arabicPeriod"/>
+            </a:pPr>
+            <a:r>
+              <a:rPr lang="ru-RU" sz="4000" dirty="0" err="1"/>
+              <a:t>Xi</a:t>
+            </a:r>
+            <a:r>
+              <a:rPr lang="ru-RU" sz="4000" dirty="0"/>
+              <a:t>, </a:t>
+            </a:r>
+            <a:r>
+              <a:rPr lang="ru-RU" sz="4000" dirty="0" err="1"/>
+              <a:t>Yi</a:t>
+            </a:r>
+            <a:r>
+              <a:rPr lang="ru-RU" sz="4000" dirty="0"/>
+              <a:t> — значения переменных X и Y соответственно</a:t>
+            </a:r>
+          </a:p>
+          <a:p>
+            <a:pPr marL="457200" indent="-457200" algn="just">
+              <a:buFont typeface="+mj-lt"/>
+              <a:buAutoNum type="arabicPeriod"/>
+            </a:pPr>
+            <a:r>
+              <a:rPr lang="ru-RU" sz="4000" dirty="0"/>
+              <a:t>X̄, Ȳ — средние значения переменных X и Y</a:t>
+            </a:r>
+          </a:p>
+          <a:p>
+            <a:pPr marL="457200" indent="-457200" algn="just">
+              <a:buFont typeface="+mj-lt"/>
+              <a:buAutoNum type="arabicPeriod"/>
+            </a:pPr>
+            <a:r>
+              <a:rPr lang="ru-RU" sz="4000" dirty="0" err="1"/>
+              <a:t>cov</a:t>
+            </a:r>
+            <a:r>
+              <a:rPr lang="ru-RU" sz="4000" dirty="0"/>
+              <a:t>(X,Y) — ковариация между X и Y</a:t>
+            </a:r>
+          </a:p>
+          <a:p>
+            <a:pPr marL="457200" indent="-457200" algn="just">
+              <a:buFont typeface="+mj-lt"/>
+              <a:buAutoNum type="arabicPeriod"/>
+            </a:pPr>
+            <a:r>
+              <a:rPr lang="ru-RU" sz="4000" dirty="0" err="1"/>
+              <a:t>σX</a:t>
+            </a:r>
+            <a:r>
+              <a:rPr lang="ru-RU" sz="4000" dirty="0"/>
+              <a:t>, </a:t>
+            </a:r>
+            <a:r>
+              <a:rPr lang="ru-RU" sz="4000" dirty="0" err="1"/>
+              <a:t>σY</a:t>
+            </a:r>
+            <a:r>
+              <a:rPr lang="ru-RU" sz="4000" dirty="0"/>
+              <a:t> — стандартные отклонения переменных X и Y</a:t>
+            </a:r>
+          </a:p>
+          <a:p>
+            <a:pPr marL="0" indent="0" algn="just">
+              <a:buNone/>
+            </a:pPr>
+            <a:r>
+              <a:rPr lang="ru-RU" sz="4000" dirty="0"/>
+              <a:t>Диапазон значений:	от 0  до 1</a:t>
+            </a:r>
+          </a:p>
+          <a:p>
+            <a:pPr marL="0" indent="0" algn="just">
+              <a:buNone/>
+            </a:pPr>
+            <a:r>
+              <a:rPr lang="ru-RU" sz="4000" dirty="0"/>
+              <a:t>Показывает линейную связь между закодированным значением и целевой переменной.</a:t>
+            </a:r>
+          </a:p>
+          <a:p>
+            <a:pPr marL="0" indent="0" algn="just">
+              <a:buNone/>
+            </a:pPr>
+            <a:r>
+              <a:rPr lang="ru-RU" sz="4000" dirty="0"/>
+              <a:t>• 1.0 — идеальная линейная зависимость</a:t>
+            </a:r>
+          </a:p>
+          <a:p>
+            <a:pPr marL="0" indent="0" algn="just">
+              <a:buNone/>
+            </a:pPr>
+            <a:r>
+              <a:rPr lang="ru-RU" sz="4000" dirty="0"/>
+              <a:t>• 0 — линейной связи нет</a:t>
+            </a:r>
+            <a:endParaRPr lang="en-US" sz="4000" dirty="0"/>
+          </a:p>
+          <a:p>
+            <a:pPr algn="just"/>
+            <a:endParaRPr lang="ru-RU" dirty="0"/>
+          </a:p>
+          <a:p>
+            <a:pPr algn="just"/>
+            <a:endParaRPr lang="en-US" dirty="0"/>
+          </a:p>
+          <a:p>
+            <a:pPr algn="just"/>
+            <a:endParaRPr lang="en-US" dirty="0"/>
+          </a:p>
+          <a:p>
+            <a:pPr algn="just"/>
+            <a:endParaRPr lang="ru-RU" dirty="0"/>
+          </a:p>
+        </p:txBody>
+      </p:sp>
+      <p:sp>
+        <p:nvSpPr>
+          <p:cNvPr id="4" name="Номер слайда 3">
+            <a:extLst>
+              <a:ext uri="{FF2B5EF4-FFF2-40B4-BE49-F238E27FC236}">
+                <a16:creationId xmlns:a16="http://schemas.microsoft.com/office/drawing/2014/main" id="{02EC01AE-9B70-C12F-566D-C6E4A95FC9CF}"/>
+              </a:ext>
+            </a:extLst>
+          </p:cNvPr>
+          <p:cNvSpPr>
+            <a:spLocks noGrp="1"/>
+          </p:cNvSpPr>
+          <p:nvPr>
+            <p:ph type="sldNum" sz="quarter" idx="12"/>
+          </p:nvPr>
+        </p:nvSpPr>
+        <p:spPr/>
+        <p:txBody>
+          <a:bodyPr/>
+          <a:lstStyle/>
+          <a:p>
+            <a:fld id="{25726283-AA38-4E85-AA5F-A5EF301525D1}" type="slidenum">
+              <a:rPr lang="ru-RU" smtClean="0"/>
+              <a:t>14</a:t>
+            </a:fld>
+            <a:endParaRPr lang="ru-RU"/>
+          </a:p>
+        </p:txBody>
+      </p:sp>
+      <p:pic>
+        <p:nvPicPr>
+          <p:cNvPr id="8" name="Рисунок 7">
+            <a:extLst>
+              <a:ext uri="{FF2B5EF4-FFF2-40B4-BE49-F238E27FC236}">
+                <a16:creationId xmlns:a16="http://schemas.microsoft.com/office/drawing/2014/main" id="{DD1034AB-6334-1095-A982-2D4F5BF4437B}"/>
+              </a:ext>
+            </a:extLst>
+          </p:cNvPr>
+          <p:cNvPicPr>
+            <a:picLocks noChangeAspect="1"/>
+          </p:cNvPicPr>
+          <p:nvPr/>
+        </p:nvPicPr>
+        <p:blipFill>
+          <a:blip r:embed="rId2"/>
+          <a:stretch>
+            <a:fillRect/>
+          </a:stretch>
+        </p:blipFill>
+        <p:spPr>
+          <a:xfrm>
+            <a:off x="6490716" y="1809186"/>
+            <a:ext cx="5270788" cy="1416591"/>
+          </a:xfrm>
+          <a:prstGeom prst="rect">
+            <a:avLst/>
+          </a:prstGeom>
+        </p:spPr>
+      </p:pic>
+    </p:spTree>
+    <p:extLst>
+      <p:ext uri="{BB962C8B-B14F-4D97-AF65-F5344CB8AC3E}">
+        <p14:creationId xmlns:p14="http://schemas.microsoft.com/office/powerpoint/2010/main" val="3773085539"/>
+      </p:ext>
+    </p:extLst>
+  </p:cSld>
+  <p:clrMapOvr>
+    <a:masterClrMapping/>
+  </p:clrMapOvr>
+</p:sld>
+</file>
+
+<file path=ppt/slides/slide15.xml><?xml version="1.0" encoding="utf-8"?>
+<p:sld xmlns:a="http://schemas.openxmlformats.org/drawingml/2006/main" xmlns:r="http://schemas.openxmlformats.org/officeDocument/2006/relationships" xmlns:p="http://schemas.openxmlformats.org/presentationml/2006/main">
+  <p:cSld>
+    <p:spTree>
+      <p:nvGrpSpPr>
+        <p:cNvPr id="1" name="">
+          <a:extLst>
+            <a:ext uri="{FF2B5EF4-FFF2-40B4-BE49-F238E27FC236}">
+              <a16:creationId xmlns:a16="http://schemas.microsoft.com/office/drawing/2014/main" id="{782659AE-5CCA-3B5B-22B8-F94600BB3629}"/>
+            </a:ext>
+          </a:extLst>
+        </p:cNvPr>
+        <p:cNvGrpSpPr/>
+        <p:nvPr/>
+      </p:nvGrpSpPr>
+      <p:grpSpPr>
+        <a:xfrm>
+          <a:off x="0" y="0"/>
+          <a:ext cx="0" cy="0"/>
+          <a:chOff x="0" y="0"/>
+          <a:chExt cx="0" cy="0"/>
+        </a:xfrm>
+      </p:grpSpPr>
+      <p:sp>
+        <p:nvSpPr>
+          <p:cNvPr id="2" name="Заголовок 1">
+            <a:extLst>
+              <a:ext uri="{FF2B5EF4-FFF2-40B4-BE49-F238E27FC236}">
+                <a16:creationId xmlns:a16="http://schemas.microsoft.com/office/drawing/2014/main" id="{8D1DE8D9-A3FE-4423-8A97-C295BCB910B8}"/>
+              </a:ext>
+            </a:extLst>
+          </p:cNvPr>
+          <p:cNvSpPr>
+            <a:spLocks noGrp="1"/>
+          </p:cNvSpPr>
+          <p:nvPr>
+            <p:ph type="title"/>
+          </p:nvPr>
+        </p:nvSpPr>
+        <p:spPr>
+          <a:xfrm>
+            <a:off x="1066800" y="484960"/>
+            <a:ext cx="10058400" cy="801533"/>
+          </a:xfrm>
+        </p:spPr>
+        <p:txBody>
+          <a:bodyPr/>
+          <a:lstStyle/>
+          <a:p>
+            <a:pPr algn="ctr"/>
+            <a:r>
+              <a:rPr lang="ru-RU" dirty="0"/>
+              <a:t> Корреляция </a:t>
+            </a:r>
+            <a:r>
+              <a:rPr lang="ru-RU" dirty="0" err="1"/>
+              <a:t>Спирмена</a:t>
+            </a:r>
+            <a:endParaRPr lang="ru-RU" dirty="0"/>
+          </a:p>
+        </p:txBody>
+      </p:sp>
+      <p:sp>
+        <p:nvSpPr>
+          <p:cNvPr id="3" name="Объект 2">
+            <a:extLst>
+              <a:ext uri="{FF2B5EF4-FFF2-40B4-BE49-F238E27FC236}">
+                <a16:creationId xmlns:a16="http://schemas.microsoft.com/office/drawing/2014/main" id="{833FC8E5-6EF8-9138-D038-9DC9BC00D5E6}"/>
+              </a:ext>
+            </a:extLst>
+          </p:cNvPr>
+          <p:cNvSpPr>
+            <a:spLocks noGrp="1"/>
+          </p:cNvSpPr>
+          <p:nvPr>
+            <p:ph idx="1"/>
+          </p:nvPr>
+        </p:nvSpPr>
+        <p:spPr>
+          <a:xfrm>
+            <a:off x="573024" y="1923235"/>
+            <a:ext cx="9110472" cy="3648272"/>
+          </a:xfrm>
+        </p:spPr>
+        <p:txBody>
+          <a:bodyPr>
+            <a:normAutofit fontScale="55000" lnSpcReduction="20000"/>
+          </a:bodyPr>
+          <a:lstStyle/>
+          <a:p>
+            <a:pPr algn="just"/>
+            <a:r>
+              <a:rPr lang="ru-RU" sz="4000" dirty="0"/>
+              <a:t>Формула:</a:t>
+            </a:r>
+          </a:p>
+          <a:p>
+            <a:pPr algn="just"/>
+            <a:r>
+              <a:rPr lang="pt-BR" sz="4000" dirty="0"/>
+              <a:t>ρ = 1 – (6 * Σd²) / (n * (n² – 1))</a:t>
+            </a:r>
+          </a:p>
+          <a:p>
+            <a:pPr marL="742950" indent="-742950" algn="just">
+              <a:buFont typeface="+mj-lt"/>
+              <a:buAutoNum type="arabicPeriod"/>
+            </a:pPr>
+            <a:r>
+              <a:rPr lang="ru-RU" sz="4000" dirty="0"/>
+              <a:t>ρ (</a:t>
+            </a:r>
+            <a:r>
+              <a:rPr lang="ru-RU" sz="4000" dirty="0" err="1"/>
+              <a:t>ро</a:t>
+            </a:r>
+            <a:r>
+              <a:rPr lang="ru-RU" sz="4000" dirty="0"/>
+              <a:t>) — коэффициент корреляции </a:t>
+            </a:r>
+            <a:r>
+              <a:rPr lang="ru-RU" sz="4000" dirty="0" err="1"/>
+              <a:t>Спирмена</a:t>
+            </a:r>
+            <a:endParaRPr lang="ru-RU" sz="4000" dirty="0"/>
+          </a:p>
+          <a:p>
+            <a:pPr marL="742950" indent="-742950" algn="just">
+              <a:buFont typeface="+mj-lt"/>
+              <a:buAutoNum type="arabicPeriod"/>
+            </a:pPr>
+            <a:r>
+              <a:rPr lang="ru-RU" sz="4000" dirty="0"/>
+              <a:t>d — разность между рангами соответствующих признаков</a:t>
+            </a:r>
+          </a:p>
+          <a:p>
+            <a:pPr marL="742950" indent="-742950" algn="just">
+              <a:buFont typeface="+mj-lt"/>
+              <a:buAutoNum type="arabicPeriod"/>
+            </a:pPr>
+            <a:r>
+              <a:rPr lang="ru-RU" sz="4000" dirty="0"/>
+              <a:t>n — количество наблюдений (пар значений)</a:t>
+            </a:r>
+          </a:p>
+          <a:p>
+            <a:pPr marL="0" indent="0" algn="just">
+              <a:buNone/>
+            </a:pPr>
+            <a:r>
+              <a:rPr lang="ru-RU" sz="4000" dirty="0"/>
+              <a:t>Диапазон значений: от 0  до 1</a:t>
+            </a:r>
+          </a:p>
+          <a:p>
+            <a:pPr marL="0" indent="0" algn="just">
+              <a:buNone/>
+            </a:pPr>
+            <a:r>
+              <a:rPr lang="ru-RU" sz="4000" dirty="0"/>
+              <a:t>Показывает монотонную связь между кодом и целевой переменной. Не требует линейности, достаточно, чтобы при увеличении кода целевая переменная в общем случае тоже увеличивалась (или уменьшалась). Устойчива к выбросам, в отличие от корреляции Пирсона.</a:t>
+            </a:r>
+            <a:endParaRPr lang="ru-RU" dirty="0"/>
+          </a:p>
+          <a:p>
+            <a:pPr algn="just"/>
+            <a:endParaRPr lang="en-US" dirty="0"/>
+          </a:p>
+          <a:p>
+            <a:pPr algn="just"/>
+            <a:endParaRPr lang="en-US" dirty="0"/>
+          </a:p>
+          <a:p>
+            <a:pPr algn="just"/>
+            <a:endParaRPr lang="ru-RU" dirty="0"/>
+          </a:p>
+        </p:txBody>
+      </p:sp>
+      <p:sp>
+        <p:nvSpPr>
+          <p:cNvPr id="4" name="Номер слайда 3">
+            <a:extLst>
+              <a:ext uri="{FF2B5EF4-FFF2-40B4-BE49-F238E27FC236}">
+                <a16:creationId xmlns:a16="http://schemas.microsoft.com/office/drawing/2014/main" id="{2542B61A-2F02-F2C5-A828-A4880EB211EF}"/>
+              </a:ext>
+            </a:extLst>
+          </p:cNvPr>
+          <p:cNvSpPr>
+            <a:spLocks noGrp="1"/>
+          </p:cNvSpPr>
+          <p:nvPr>
+            <p:ph type="sldNum" sz="quarter" idx="12"/>
+          </p:nvPr>
+        </p:nvSpPr>
+        <p:spPr/>
+        <p:txBody>
+          <a:bodyPr/>
+          <a:lstStyle/>
+          <a:p>
+            <a:fld id="{25726283-AA38-4E85-AA5F-A5EF301525D1}" type="slidenum">
+              <a:rPr lang="ru-RU" smtClean="0"/>
+              <a:t>15</a:t>
+            </a:fld>
+            <a:endParaRPr lang="ru-RU"/>
+          </a:p>
+        </p:txBody>
+      </p:sp>
+      <p:pic>
+        <p:nvPicPr>
+          <p:cNvPr id="2052" name="Picture 4" descr="Picture background">
+            <a:extLst>
+              <a:ext uri="{FF2B5EF4-FFF2-40B4-BE49-F238E27FC236}">
+                <a16:creationId xmlns:a16="http://schemas.microsoft.com/office/drawing/2014/main" id="{A7C14C55-68ED-192C-4B8B-06B7EC8719BE}"/>
+              </a:ext>
+            </a:extLst>
+          </p:cNvPr>
+          <p:cNvPicPr>
+            <a:picLocks noChangeAspect="1" noChangeArrowheads="1"/>
+          </p:cNvPicPr>
+          <p:nvPr/>
+        </p:nvPicPr>
+        <p:blipFill>
+          <a:blip r:embed="rId2">
+            <a:extLst>
+              <a:ext uri="{28A0092B-C50C-407E-A947-70E740481C1C}">
+                <a14:useLocalDpi xmlns:a14="http://schemas.microsoft.com/office/drawing/2010/main" val="0"/>
+              </a:ext>
+            </a:extLst>
+          </a:blip>
+          <a:srcRect/>
+          <a:stretch>
+            <a:fillRect/>
+          </a:stretch>
+        </p:blipFill>
+        <p:spPr bwMode="auto">
+          <a:xfrm>
+            <a:off x="7675112" y="1923235"/>
+            <a:ext cx="3537371" cy="1607938"/>
+          </a:xfrm>
+          <a:prstGeom prst="rect">
+            <a:avLst/>
+          </a:prstGeom>
+          <a:noFill/>
+          <a:extLst>
+            <a:ext uri="{909E8E84-426E-40DD-AFC4-6F175D3DCCD1}">
+              <a14:hiddenFill xmlns:a14="http://schemas.microsoft.com/office/drawing/2010/main">
+                <a:solidFill>
+                  <a:srgbClr val="FFFFFF"/>
+                </a:solidFill>
+              </a14:hiddenFill>
+            </a:ext>
+          </a:extLst>
+        </p:spPr>
+      </p:pic>
+    </p:spTree>
+    <p:extLst>
+      <p:ext uri="{BB962C8B-B14F-4D97-AF65-F5344CB8AC3E}">
+        <p14:creationId xmlns:p14="http://schemas.microsoft.com/office/powerpoint/2010/main" val="1593032782"/>
+      </p:ext>
+    </p:extLst>
+  </p:cSld>
+  <p:clrMapOvr>
+    <a:masterClrMapping/>
+  </p:clrMapOvr>
+</p:sld>
+</file>
+
+<file path=ppt/slides/slide16.xml><?xml version="1.0" encoding="utf-8"?>
+<p:sld xmlns:a="http://schemas.openxmlformats.org/drawingml/2006/main" xmlns:r="http://schemas.openxmlformats.org/officeDocument/2006/relationships" xmlns:p="http://schemas.openxmlformats.org/presentationml/2006/main">
+  <p:cSld>
+    <p:spTree>
+      <p:nvGrpSpPr>
+        <p:cNvPr id="1" name="">
+          <a:extLst>
+            <a:ext uri="{FF2B5EF4-FFF2-40B4-BE49-F238E27FC236}">
+              <a16:creationId xmlns:a16="http://schemas.microsoft.com/office/drawing/2014/main" id="{E7D22DCF-7527-B258-2435-34D5A1C6925A}"/>
+            </a:ext>
+          </a:extLst>
+        </p:cNvPr>
+        <p:cNvGrpSpPr/>
+        <p:nvPr/>
+      </p:nvGrpSpPr>
+      <p:grpSpPr>
+        <a:xfrm>
+          <a:off x="0" y="0"/>
+          <a:ext cx="0" cy="0"/>
+          <a:chOff x="0" y="0"/>
+          <a:chExt cx="0" cy="0"/>
+        </a:xfrm>
+      </p:grpSpPr>
+      <p:sp>
+        <p:nvSpPr>
+          <p:cNvPr id="2" name="Заголовок 1">
+            <a:extLst>
+              <a:ext uri="{FF2B5EF4-FFF2-40B4-BE49-F238E27FC236}">
+                <a16:creationId xmlns:a16="http://schemas.microsoft.com/office/drawing/2014/main" id="{B1A7B606-D54E-E1C5-9F97-AFE9ECE22D31}"/>
+              </a:ext>
+            </a:extLst>
+          </p:cNvPr>
+          <p:cNvSpPr>
+            <a:spLocks noGrp="1"/>
+          </p:cNvSpPr>
+          <p:nvPr>
+            <p:ph type="title"/>
+          </p:nvPr>
+        </p:nvSpPr>
+        <p:spPr>
+          <a:xfrm>
+            <a:off x="1066800" y="484960"/>
+            <a:ext cx="10058400" cy="801533"/>
+          </a:xfrm>
+        </p:spPr>
+        <p:txBody>
+          <a:bodyPr>
+            <a:normAutofit/>
+          </a:bodyPr>
+          <a:lstStyle/>
+          <a:p>
+            <a:pPr algn="ctr"/>
+            <a:r>
+              <a:rPr lang="ru-RU" dirty="0"/>
+              <a:t>Взаимная информация(</a:t>
+            </a:r>
+            <a:r>
+              <a:rPr lang="en-US" dirty="0"/>
+              <a:t>MI</a:t>
+            </a:r>
+            <a:r>
+              <a:rPr lang="ru-RU" dirty="0"/>
+              <a:t>)</a:t>
+            </a:r>
+          </a:p>
+        </p:txBody>
+      </p:sp>
+      <p:sp>
+        <p:nvSpPr>
+          <p:cNvPr id="3" name="Объект 2">
+            <a:extLst>
+              <a:ext uri="{FF2B5EF4-FFF2-40B4-BE49-F238E27FC236}">
+                <a16:creationId xmlns:a16="http://schemas.microsoft.com/office/drawing/2014/main" id="{2CB2DF49-56C4-F94E-D18A-FA89005BCC62}"/>
+              </a:ext>
+            </a:extLst>
+          </p:cNvPr>
+          <p:cNvSpPr>
+            <a:spLocks noGrp="1"/>
+          </p:cNvSpPr>
+          <p:nvPr>
+            <p:ph idx="1"/>
+          </p:nvPr>
+        </p:nvSpPr>
+        <p:spPr>
+          <a:xfrm>
+            <a:off x="1066800" y="1798948"/>
+            <a:ext cx="10482072" cy="4148381"/>
+          </a:xfrm>
+        </p:spPr>
+        <p:txBody>
+          <a:bodyPr>
+            <a:normAutofit fontScale="55000" lnSpcReduction="20000"/>
+          </a:bodyPr>
+          <a:lstStyle/>
+          <a:p>
+            <a:pPr algn="just"/>
+            <a:r>
+              <a:rPr lang="ru-RU" sz="4000" dirty="0"/>
+              <a:t>Формула:</a:t>
+            </a:r>
+          </a:p>
+          <a:p>
+            <a:pPr algn="just"/>
+            <a:endParaRPr lang="ru-RU" sz="4000" dirty="0"/>
+          </a:p>
+          <a:p>
+            <a:pPr marL="0" indent="0" algn="just">
+              <a:buNone/>
+            </a:pPr>
+            <a:endParaRPr lang="ru-RU" sz="4000" dirty="0"/>
+          </a:p>
+          <a:p>
+            <a:pPr algn="just"/>
+            <a:r>
+              <a:rPr lang="ru-RU" sz="4000" dirty="0"/>
+              <a:t>Где</a:t>
+            </a:r>
+            <a:r>
+              <a:rPr lang="en-US" sz="4000" dirty="0"/>
+              <a:t> P(X,Y) </a:t>
+            </a:r>
+            <a:r>
+              <a:rPr lang="ru-RU" sz="4000" dirty="0"/>
+              <a:t>является совместной функцией вероятности распределения</a:t>
+            </a:r>
+            <a:r>
+              <a:rPr lang="en-US" sz="4000" dirty="0"/>
+              <a:t> X </a:t>
+            </a:r>
+            <a:r>
+              <a:rPr lang="ru-RU" sz="4000" dirty="0"/>
+              <a:t>и </a:t>
+            </a:r>
+            <a:r>
+              <a:rPr lang="en-US" sz="4000" dirty="0"/>
+              <a:t>Y</a:t>
+            </a:r>
+            <a:r>
+              <a:rPr lang="ru-RU" sz="4000" dirty="0"/>
+              <a:t>, и </a:t>
+            </a:r>
+            <a:r>
+              <a:rPr lang="en-US" sz="4000" dirty="0" err="1"/>
+              <a:t>Px</a:t>
+            </a:r>
+            <a:r>
+              <a:rPr lang="en-US" sz="4000" dirty="0"/>
+              <a:t> </a:t>
+            </a:r>
+            <a:r>
+              <a:rPr lang="ru-RU" sz="4000" dirty="0"/>
+              <a:t>и </a:t>
+            </a:r>
+            <a:r>
+              <a:rPr lang="en-US" sz="4000" dirty="0"/>
+              <a:t>Py </a:t>
+            </a:r>
+            <a:r>
+              <a:rPr lang="ru-RU" sz="4000" dirty="0"/>
+              <a:t>являются функциями предельной вероятности </a:t>
+            </a:r>
+            <a:r>
+              <a:rPr lang="en-US" sz="4000" dirty="0"/>
+              <a:t>X </a:t>
+            </a:r>
+            <a:r>
+              <a:rPr lang="ru-RU" sz="4000" dirty="0"/>
+              <a:t>и </a:t>
+            </a:r>
+            <a:r>
+              <a:rPr lang="en-US" sz="4000" dirty="0"/>
+              <a:t>Y </a:t>
+            </a:r>
+            <a:r>
+              <a:rPr lang="ru-RU" sz="4000" dirty="0"/>
+              <a:t>соответственно</a:t>
+            </a:r>
+          </a:p>
+          <a:p>
+            <a:pPr marL="0" indent="0" algn="just">
+              <a:buNone/>
+            </a:pPr>
+            <a:r>
+              <a:rPr lang="ru-RU" sz="4000" dirty="0"/>
+              <a:t>Диапазон значений: от 0  до 1</a:t>
+            </a:r>
+          </a:p>
+          <a:p>
+            <a:pPr marL="0" indent="0" algn="just">
+              <a:buNone/>
+            </a:pPr>
+            <a:r>
+              <a:rPr lang="ru-RU" sz="4000" dirty="0"/>
+              <a:t>Показывает любую (в том числе нелинейную) зависимость между кодом и целью. Сколько информации о целевой переменной дает знание закодированного значения. Не чувствительна к типу связи (линейная, нелинейная, периодическая). Значение 0 означает независимость, 1 — полную детерминированность.</a:t>
+            </a:r>
+            <a:endParaRPr lang="en-US" dirty="0"/>
+          </a:p>
+          <a:p>
+            <a:pPr algn="just"/>
+            <a:endParaRPr lang="en-US" dirty="0"/>
+          </a:p>
+          <a:p>
+            <a:pPr algn="just"/>
+            <a:endParaRPr lang="ru-RU" dirty="0"/>
+          </a:p>
+        </p:txBody>
+      </p:sp>
+      <p:sp>
+        <p:nvSpPr>
+          <p:cNvPr id="4" name="Номер слайда 3">
+            <a:extLst>
+              <a:ext uri="{FF2B5EF4-FFF2-40B4-BE49-F238E27FC236}">
+                <a16:creationId xmlns:a16="http://schemas.microsoft.com/office/drawing/2014/main" id="{B4734422-686F-F61A-5F4D-ADB764498CCC}"/>
+              </a:ext>
+            </a:extLst>
+          </p:cNvPr>
+          <p:cNvSpPr>
+            <a:spLocks noGrp="1"/>
+          </p:cNvSpPr>
+          <p:nvPr>
+            <p:ph type="sldNum" sz="quarter" idx="12"/>
+          </p:nvPr>
+        </p:nvSpPr>
+        <p:spPr/>
+        <p:txBody>
+          <a:bodyPr/>
+          <a:lstStyle/>
+          <a:p>
+            <a:fld id="{25726283-AA38-4E85-AA5F-A5EF301525D1}" type="slidenum">
+              <a:rPr lang="ru-RU" smtClean="0"/>
+              <a:t>16</a:t>
+            </a:fld>
+            <a:endParaRPr lang="ru-RU"/>
+          </a:p>
+        </p:txBody>
+      </p:sp>
+      <p:pic>
+        <p:nvPicPr>
+          <p:cNvPr id="56" name="Рисунок 55">
+            <a:extLst>
+              <a:ext uri="{FF2B5EF4-FFF2-40B4-BE49-F238E27FC236}">
+                <a16:creationId xmlns:a16="http://schemas.microsoft.com/office/drawing/2014/main" id="{B12A2248-4B53-8FCC-F4F5-53C458876415}"/>
+              </a:ext>
+            </a:extLst>
+          </p:cNvPr>
+          <p:cNvPicPr>
+            <a:picLocks noChangeAspect="1"/>
+          </p:cNvPicPr>
+          <p:nvPr/>
+        </p:nvPicPr>
+        <p:blipFill>
+          <a:blip r:embed="rId2"/>
+          <a:stretch>
+            <a:fillRect/>
+          </a:stretch>
+        </p:blipFill>
+        <p:spPr>
+          <a:xfrm>
+            <a:off x="1066800" y="2248802"/>
+            <a:ext cx="4201111" cy="714475"/>
+          </a:xfrm>
+          <a:prstGeom prst="rect">
+            <a:avLst/>
+          </a:prstGeom>
+        </p:spPr>
+      </p:pic>
+    </p:spTree>
+    <p:extLst>
+      <p:ext uri="{BB962C8B-B14F-4D97-AF65-F5344CB8AC3E}">
+        <p14:creationId xmlns:p14="http://schemas.microsoft.com/office/powerpoint/2010/main" val="1896231966"/>
+      </p:ext>
+    </p:extLst>
+  </p:cSld>
+  <p:clrMapOvr>
+    <a:masterClrMapping/>
+  </p:clrMapOvr>
+</p:sld>
+</file>
+
+<file path=ppt/slides/slide17.xml><?xml version="1.0" encoding="utf-8"?>
+<p:sld xmlns:a="http://schemas.openxmlformats.org/drawingml/2006/main" xmlns:r="http://schemas.openxmlformats.org/officeDocument/2006/relationships" xmlns:p="http://schemas.openxmlformats.org/presentationml/2006/main">
+  <p:cSld>
+    <p:spTree>
+      <p:nvGrpSpPr>
+        <p:cNvPr id="1" name="">
+          <a:extLst>
+            <a:ext uri="{FF2B5EF4-FFF2-40B4-BE49-F238E27FC236}">
+              <a16:creationId xmlns:a16="http://schemas.microsoft.com/office/drawing/2014/main" id="{147F56B5-CB16-7B3F-A65C-C0536D998A7A}"/>
+            </a:ext>
+          </a:extLst>
+        </p:cNvPr>
+        <p:cNvGrpSpPr/>
+        <p:nvPr/>
+      </p:nvGrpSpPr>
+      <p:grpSpPr>
+        <a:xfrm>
+          <a:off x="0" y="0"/>
+          <a:ext cx="0" cy="0"/>
+          <a:chOff x="0" y="0"/>
+          <a:chExt cx="0" cy="0"/>
+        </a:xfrm>
+      </p:grpSpPr>
+      <p:sp>
+        <p:nvSpPr>
+          <p:cNvPr id="2" name="Заголовок 1">
+            <a:extLst>
+              <a:ext uri="{FF2B5EF4-FFF2-40B4-BE49-F238E27FC236}">
+                <a16:creationId xmlns:a16="http://schemas.microsoft.com/office/drawing/2014/main" id="{DCD8BDFF-8F8A-7C1D-06CF-4C5D2385478C}"/>
+              </a:ext>
+            </a:extLst>
+          </p:cNvPr>
+          <p:cNvSpPr>
+            <a:spLocks noGrp="1"/>
+          </p:cNvSpPr>
+          <p:nvPr>
+            <p:ph type="title"/>
+          </p:nvPr>
+        </p:nvSpPr>
+        <p:spPr>
+          <a:xfrm>
+            <a:off x="1066800" y="484960"/>
+            <a:ext cx="10058400" cy="801533"/>
+          </a:xfrm>
+        </p:spPr>
+        <p:txBody>
+          <a:bodyPr>
+            <a:normAutofit/>
+          </a:bodyPr>
+          <a:lstStyle/>
+          <a:p>
+            <a:pPr algn="ctr"/>
+            <a:r>
+              <a:rPr lang="ru-RU" dirty="0"/>
+              <a:t>Коэффициент детерминации</a:t>
+            </a:r>
+          </a:p>
+        </p:txBody>
+      </p:sp>
+      <p:sp>
+        <p:nvSpPr>
+          <p:cNvPr id="3" name="Объект 2">
+            <a:extLst>
+              <a:ext uri="{FF2B5EF4-FFF2-40B4-BE49-F238E27FC236}">
+                <a16:creationId xmlns:a16="http://schemas.microsoft.com/office/drawing/2014/main" id="{B92112CD-E8BC-C3C1-FAC7-B98A6E6E591E}"/>
+              </a:ext>
+            </a:extLst>
+          </p:cNvPr>
+          <p:cNvSpPr>
+            <a:spLocks noGrp="1"/>
+          </p:cNvSpPr>
+          <p:nvPr>
+            <p:ph idx="1"/>
+          </p:nvPr>
+        </p:nvSpPr>
+        <p:spPr>
+          <a:xfrm>
+            <a:off x="1066800" y="1798948"/>
+            <a:ext cx="10482072" cy="4148381"/>
+          </a:xfrm>
+        </p:spPr>
+        <p:txBody>
+          <a:bodyPr>
+            <a:normAutofit fontScale="62500" lnSpcReduction="20000"/>
+          </a:bodyPr>
+          <a:lstStyle/>
+          <a:p>
+            <a:pPr algn="just"/>
+            <a:r>
+              <a:rPr lang="ru-RU" sz="4000" dirty="0"/>
+              <a:t>Формула:</a:t>
+            </a:r>
+          </a:p>
+          <a:p>
+            <a:pPr algn="just"/>
+            <a:r>
+              <a:rPr lang="nn-NO" sz="4000" dirty="0"/>
+              <a:t>R² = 1 – (Σ(y_i – ŷ_i)² / Σ(y_i – ȳ)²)</a:t>
+            </a:r>
+            <a:endParaRPr lang="ru-RU" sz="4000" dirty="0"/>
+          </a:p>
+          <a:p>
+            <a:pPr marL="0" indent="0" algn="just">
+              <a:buNone/>
+            </a:pPr>
+            <a:r>
+              <a:rPr lang="ru-RU" sz="4000" dirty="0"/>
+              <a:t>где:</a:t>
+            </a:r>
+          </a:p>
+          <a:p>
+            <a:pPr marL="0" indent="0" algn="just">
+              <a:buNone/>
+            </a:pPr>
+            <a:r>
+              <a:rPr lang="ru-RU" sz="4000" dirty="0" err="1"/>
+              <a:t>y_i</a:t>
+            </a:r>
+            <a:r>
+              <a:rPr lang="ru-RU" sz="4000" dirty="0"/>
+              <a:t> — фактические значения</a:t>
+            </a:r>
+          </a:p>
+          <a:p>
+            <a:pPr marL="0" indent="0" algn="just">
+              <a:buNone/>
+            </a:pPr>
+            <a:r>
+              <a:rPr lang="ru-RU" sz="4000" dirty="0" err="1"/>
+              <a:t>ŷ_i</a:t>
+            </a:r>
+            <a:r>
+              <a:rPr lang="ru-RU" sz="4000" dirty="0"/>
+              <a:t> — значения, предсказанные моделью</a:t>
+            </a:r>
+          </a:p>
+          <a:p>
+            <a:pPr marL="0" indent="0" algn="just">
+              <a:buNone/>
+            </a:pPr>
+            <a:r>
+              <a:rPr lang="ru-RU" sz="4000" dirty="0"/>
+              <a:t>ȳ — среднее значение зависимой переменной</a:t>
+            </a:r>
+          </a:p>
+          <a:p>
+            <a:pPr marL="0" indent="0" algn="just">
+              <a:buNone/>
+            </a:pPr>
+            <a:r>
+              <a:rPr lang="ru-RU" sz="4000" dirty="0"/>
+              <a:t>Диапазон значений: от 0  до 1</a:t>
+            </a:r>
+          </a:p>
+          <a:p>
+            <a:pPr marL="0" indent="0" algn="just">
+              <a:buNone/>
+            </a:pPr>
+            <a:r>
+              <a:rPr lang="ru-RU" sz="4000" dirty="0"/>
+              <a:t>Показывает какую долю дисперсии целевой переменной можно объяснить линейной зависимостью от закодированного значения. 1.0 — идеальное линейное предсказание, 0 — модель не лучше среднего значения</a:t>
+            </a:r>
+            <a:endParaRPr lang="ru-RU" dirty="0"/>
+          </a:p>
+        </p:txBody>
+      </p:sp>
+      <p:sp>
+        <p:nvSpPr>
+          <p:cNvPr id="4" name="Номер слайда 3">
+            <a:extLst>
+              <a:ext uri="{FF2B5EF4-FFF2-40B4-BE49-F238E27FC236}">
+                <a16:creationId xmlns:a16="http://schemas.microsoft.com/office/drawing/2014/main" id="{66CCA075-6478-4C9D-3935-585475937C6F}"/>
+              </a:ext>
+            </a:extLst>
+          </p:cNvPr>
+          <p:cNvSpPr>
+            <a:spLocks noGrp="1"/>
+          </p:cNvSpPr>
+          <p:nvPr>
+            <p:ph type="sldNum" sz="quarter" idx="12"/>
+          </p:nvPr>
+        </p:nvSpPr>
+        <p:spPr/>
+        <p:txBody>
+          <a:bodyPr/>
+          <a:lstStyle/>
+          <a:p>
+            <a:fld id="{25726283-AA38-4E85-AA5F-A5EF301525D1}" type="slidenum">
+              <a:rPr lang="ru-RU" smtClean="0"/>
+              <a:t>17</a:t>
+            </a:fld>
+            <a:endParaRPr lang="ru-RU"/>
+          </a:p>
+        </p:txBody>
+      </p:sp>
+      <p:pic>
+        <p:nvPicPr>
+          <p:cNvPr id="4104" name="Picture 8" descr="Picture background">
+            <a:extLst>
+              <a:ext uri="{FF2B5EF4-FFF2-40B4-BE49-F238E27FC236}">
+                <a16:creationId xmlns:a16="http://schemas.microsoft.com/office/drawing/2014/main" id="{3A89A532-A86E-CC01-EA8B-26B077F8A6A5}"/>
+              </a:ext>
+            </a:extLst>
+          </p:cNvPr>
+          <p:cNvPicPr>
+            <a:picLocks noChangeAspect="1" noChangeArrowheads="1"/>
+          </p:cNvPicPr>
+          <p:nvPr/>
+        </p:nvPicPr>
+        <p:blipFill rotWithShape="1">
+          <a:blip r:embed="rId2">
+            <a:extLst>
+              <a:ext uri="{28A0092B-C50C-407E-A947-70E740481C1C}">
+                <a14:useLocalDpi xmlns:a14="http://schemas.microsoft.com/office/drawing/2010/main" val="0"/>
+              </a:ext>
+            </a:extLst>
+          </a:blip>
+          <a:srcRect l="24027" r="38461" b="38825"/>
+          <a:stretch>
+            <a:fillRect/>
+          </a:stretch>
+        </p:blipFill>
+        <p:spPr bwMode="auto">
+          <a:xfrm>
+            <a:off x="6801532" y="2036692"/>
+            <a:ext cx="3098926" cy="1611764"/>
+          </a:xfrm>
+          <a:prstGeom prst="rect">
+            <a:avLst/>
+          </a:prstGeom>
+          <a:noFill/>
+          <a:extLst>
+            <a:ext uri="{909E8E84-426E-40DD-AFC4-6F175D3DCCD1}">
+              <a14:hiddenFill xmlns:a14="http://schemas.microsoft.com/office/drawing/2010/main">
+                <a:solidFill>
+                  <a:srgbClr val="FFFFFF"/>
+                </a:solidFill>
+              </a14:hiddenFill>
+            </a:ext>
+          </a:extLst>
+        </p:spPr>
+      </p:pic>
+    </p:spTree>
+    <p:extLst>
+      <p:ext uri="{BB962C8B-B14F-4D97-AF65-F5344CB8AC3E}">
+        <p14:creationId xmlns:p14="http://schemas.microsoft.com/office/powerpoint/2010/main" val="2002039760"/>
+      </p:ext>
+    </p:extLst>
+  </p:cSld>
+  <p:clrMapOvr>
+    <a:masterClrMapping/>
+  </p:clrMapOvr>
+</p:sld>
+</file>
+
+<file path=ppt/slides/slide18.xml><?xml version="1.0" encoding="utf-8"?>
+<p:sld xmlns:a="http://schemas.openxmlformats.org/drawingml/2006/main" xmlns:r="http://schemas.openxmlformats.org/officeDocument/2006/relationships" xmlns:p="http://schemas.openxmlformats.org/presentationml/2006/main">
+  <p:cSld>
+    <p:spTree>
+      <p:nvGrpSpPr>
+        <p:cNvPr id="1" name="">
+          <a:extLst>
+            <a:ext uri="{FF2B5EF4-FFF2-40B4-BE49-F238E27FC236}">
+              <a16:creationId xmlns:a16="http://schemas.microsoft.com/office/drawing/2014/main" id="{D6F72451-14E1-FECE-D10A-C3B62F1BD90D}"/>
+            </a:ext>
+          </a:extLst>
+        </p:cNvPr>
+        <p:cNvGrpSpPr/>
+        <p:nvPr/>
+      </p:nvGrpSpPr>
+      <p:grpSpPr>
+        <a:xfrm>
+          <a:off x="0" y="0"/>
+          <a:ext cx="0" cy="0"/>
+          <a:chOff x="0" y="0"/>
+          <a:chExt cx="0" cy="0"/>
+        </a:xfrm>
+      </p:grpSpPr>
+      <p:sp>
+        <p:nvSpPr>
+          <p:cNvPr id="2" name="Заголовок 1">
+            <a:extLst>
+              <a:ext uri="{FF2B5EF4-FFF2-40B4-BE49-F238E27FC236}">
+                <a16:creationId xmlns:a16="http://schemas.microsoft.com/office/drawing/2014/main" id="{74A6711D-5137-84E2-8732-350014AE2D61}"/>
+              </a:ext>
+            </a:extLst>
+          </p:cNvPr>
+          <p:cNvSpPr>
+            <a:spLocks noGrp="1"/>
+          </p:cNvSpPr>
+          <p:nvPr>
+            <p:ph type="title"/>
+          </p:nvPr>
+        </p:nvSpPr>
+        <p:spPr>
+          <a:xfrm>
+            <a:off x="1066800" y="484960"/>
+            <a:ext cx="10058400" cy="801533"/>
+          </a:xfrm>
+        </p:spPr>
+        <p:txBody>
+          <a:bodyPr>
+            <a:normAutofit/>
+          </a:bodyPr>
+          <a:lstStyle/>
+          <a:p>
+            <a:pPr algn="ctr"/>
+            <a:r>
+              <a:rPr lang="ru-RU" dirty="0"/>
+              <a:t>Качество кодирования</a:t>
+            </a:r>
+          </a:p>
+        </p:txBody>
+      </p:sp>
+      <p:sp>
+        <p:nvSpPr>
+          <p:cNvPr id="3" name="Объект 2">
+            <a:extLst>
+              <a:ext uri="{FF2B5EF4-FFF2-40B4-BE49-F238E27FC236}">
+                <a16:creationId xmlns:a16="http://schemas.microsoft.com/office/drawing/2014/main" id="{B36B107F-CD53-FE12-A3AA-C571AC08E95B}"/>
+              </a:ext>
+            </a:extLst>
+          </p:cNvPr>
+          <p:cNvSpPr>
+            <a:spLocks noGrp="1"/>
+          </p:cNvSpPr>
+          <p:nvPr>
+            <p:ph idx="1"/>
+          </p:nvPr>
+        </p:nvSpPr>
+        <p:spPr>
+          <a:xfrm>
+            <a:off x="1066800" y="1798948"/>
+            <a:ext cx="10482072" cy="4148381"/>
+          </a:xfrm>
+        </p:spPr>
+        <p:txBody>
+          <a:bodyPr>
+            <a:normAutofit fontScale="77500" lnSpcReduction="20000"/>
+          </a:bodyPr>
+          <a:lstStyle/>
+          <a:p>
+            <a:pPr algn="just"/>
+            <a:r>
+              <a:rPr lang="ru-RU" sz="4000" dirty="0"/>
+              <a:t>Формула:</a:t>
+            </a:r>
+          </a:p>
+          <a:p>
+            <a:pPr algn="just"/>
+            <a:r>
+              <a:rPr lang="ru-RU" sz="4000" dirty="0"/>
+              <a:t>Качество = (Пирсон × 0.35 + </a:t>
+            </a:r>
+            <a:r>
+              <a:rPr lang="ru-RU" sz="4000" dirty="0" err="1"/>
+              <a:t>Спирмен</a:t>
+            </a:r>
+            <a:r>
+              <a:rPr lang="ru-RU" sz="4000" dirty="0"/>
+              <a:t> × 0.25 + MI × 0.25 + R² × 0.15) × 100%</a:t>
+            </a:r>
+          </a:p>
+          <a:p>
+            <a:pPr marL="0" indent="0" algn="just">
+              <a:buNone/>
+            </a:pPr>
+            <a:r>
+              <a:rPr lang="ru-RU" sz="4000" dirty="0"/>
+              <a:t>Диапазон значений: 0% – 100%</a:t>
+            </a:r>
+          </a:p>
+          <a:p>
+            <a:pPr marL="0" indent="0" algn="just">
+              <a:buNone/>
+            </a:pPr>
+            <a:r>
+              <a:rPr lang="ru-RU" sz="4000" dirty="0"/>
+              <a:t>Показывает интегральную оценку качества кодирования. Чем выше, тем лучше числовой код отражает зависимость от целевой переменной. Веса подобраны так, чтобы корреляция Пирсона (линейная связь) имела наибольший приоритет, а R² (предсказательная способность) — наименьший.</a:t>
+            </a:r>
+          </a:p>
+          <a:p>
+            <a:pPr marL="0" indent="0" algn="just">
+              <a:buNone/>
+            </a:pPr>
+            <a:endParaRPr lang="ru-RU" dirty="0"/>
+          </a:p>
+        </p:txBody>
+      </p:sp>
+      <p:sp>
+        <p:nvSpPr>
+          <p:cNvPr id="4" name="Номер слайда 3">
+            <a:extLst>
+              <a:ext uri="{FF2B5EF4-FFF2-40B4-BE49-F238E27FC236}">
+                <a16:creationId xmlns:a16="http://schemas.microsoft.com/office/drawing/2014/main" id="{63797B1A-71D6-DC19-0589-593E92056EE7}"/>
+              </a:ext>
+            </a:extLst>
+          </p:cNvPr>
+          <p:cNvSpPr>
+            <a:spLocks noGrp="1"/>
+          </p:cNvSpPr>
+          <p:nvPr>
+            <p:ph type="sldNum" sz="quarter" idx="12"/>
+          </p:nvPr>
+        </p:nvSpPr>
+        <p:spPr/>
+        <p:txBody>
+          <a:bodyPr/>
+          <a:lstStyle/>
+          <a:p>
+            <a:fld id="{25726283-AA38-4E85-AA5F-A5EF301525D1}" type="slidenum">
+              <a:rPr lang="ru-RU" smtClean="0"/>
+              <a:t>18</a:t>
+            </a:fld>
+            <a:endParaRPr lang="ru-RU"/>
+          </a:p>
+        </p:txBody>
+      </p:sp>
+    </p:spTree>
+    <p:extLst>
+      <p:ext uri="{BB962C8B-B14F-4D97-AF65-F5344CB8AC3E}">
+        <p14:creationId xmlns:p14="http://schemas.microsoft.com/office/powerpoint/2010/main" val="2294383726"/>
+      </p:ext>
+    </p:extLst>
+  </p:cSld>
+  <p:clrMapOvr>
+    <a:masterClrMapping/>
+  </p:clrMapOvr>
+</p:sld>
+</file>
+
+<file path=ppt/slides/slide19.xml><?xml version="1.0" encoding="utf-8"?>
+<p:sld xmlns:a="http://schemas.openxmlformats.org/drawingml/2006/main" xmlns:r="http://schemas.openxmlformats.org/officeDocument/2006/relationships" xmlns:p="http://schemas.openxmlformats.org/presentationml/2006/main">
+  <p:cSld>
+    <p:spTree>
+      <p:nvGrpSpPr>
+        <p:cNvPr id="1" name="">
+          <a:extLst>
+            <a:ext uri="{FF2B5EF4-FFF2-40B4-BE49-F238E27FC236}">
+              <a16:creationId xmlns:a16="http://schemas.microsoft.com/office/drawing/2014/main" id="{C8760F65-C32B-334E-4187-CA0AC205EBC3}"/>
+            </a:ext>
+          </a:extLst>
+        </p:cNvPr>
+        <p:cNvGrpSpPr/>
+        <p:nvPr/>
+      </p:nvGrpSpPr>
+      <p:grpSpPr>
+        <a:xfrm>
+          <a:off x="0" y="0"/>
+          <a:ext cx="0" cy="0"/>
+          <a:chOff x="0" y="0"/>
+          <a:chExt cx="0" cy="0"/>
+        </a:xfrm>
+      </p:grpSpPr>
+      <p:sp>
+        <p:nvSpPr>
+          <p:cNvPr id="2" name="Заголовок 1">
+            <a:extLst>
+              <a:ext uri="{FF2B5EF4-FFF2-40B4-BE49-F238E27FC236}">
+                <a16:creationId xmlns:a16="http://schemas.microsoft.com/office/drawing/2014/main" id="{3E61A088-A7A2-6C80-5DBE-02D31307D32B}"/>
+              </a:ext>
+            </a:extLst>
+          </p:cNvPr>
+          <p:cNvSpPr>
+            <a:spLocks noGrp="1"/>
+          </p:cNvSpPr>
+          <p:nvPr>
+            <p:ph type="title"/>
+          </p:nvPr>
+        </p:nvSpPr>
+        <p:spPr>
+          <a:xfrm>
+            <a:off x="1066800" y="672336"/>
+            <a:ext cx="10058400" cy="801533"/>
+          </a:xfrm>
+        </p:spPr>
+        <p:txBody>
+          <a:bodyPr/>
+          <a:lstStyle/>
+          <a:p>
+            <a:pPr algn="ctr"/>
+            <a:r>
+              <a:rPr lang="ru-RU" dirty="0"/>
+              <a:t>Сравнительный анализ методов</a:t>
+            </a:r>
+          </a:p>
+        </p:txBody>
+      </p:sp>
+      <p:sp>
+        <p:nvSpPr>
+          <p:cNvPr id="3" name="Объект 2">
+            <a:extLst>
+              <a:ext uri="{FF2B5EF4-FFF2-40B4-BE49-F238E27FC236}">
+                <a16:creationId xmlns:a16="http://schemas.microsoft.com/office/drawing/2014/main" id="{D9B08D1A-8BB2-D024-6FF0-399AD7F00AC7}"/>
+              </a:ext>
+            </a:extLst>
+          </p:cNvPr>
+          <p:cNvSpPr>
+            <a:spLocks noGrp="1"/>
+          </p:cNvSpPr>
+          <p:nvPr>
+            <p:ph idx="1"/>
+          </p:nvPr>
+        </p:nvSpPr>
+        <p:spPr>
+          <a:xfrm>
+            <a:off x="1014984" y="2286000"/>
+            <a:ext cx="4599432" cy="3400214"/>
+          </a:xfrm>
+        </p:spPr>
+        <p:txBody>
+          <a:bodyPr/>
+          <a:lstStyle/>
+          <a:p>
+            <a:pPr algn="just"/>
+            <a:r>
+              <a:rPr lang="ru-RU" dirty="0"/>
+              <a:t>Для оценки эффективности различных методов кодирования категориальных признаков было проведено тестирование на трех датасетах различной структуры и размерности. Сравнение выполнялось по следующим критериям: качество кодирования (в процентах), размерность выходного пространства, время выполнения и потеря информации.</a:t>
+            </a:r>
+          </a:p>
+        </p:txBody>
+      </p:sp>
+      <p:sp>
+        <p:nvSpPr>
+          <p:cNvPr id="4" name="Номер слайда 3">
+            <a:extLst>
+              <a:ext uri="{FF2B5EF4-FFF2-40B4-BE49-F238E27FC236}">
+                <a16:creationId xmlns:a16="http://schemas.microsoft.com/office/drawing/2014/main" id="{91A71584-5C72-30EF-C3D8-60FCA58564F8}"/>
+              </a:ext>
+            </a:extLst>
+          </p:cNvPr>
+          <p:cNvSpPr>
+            <a:spLocks noGrp="1"/>
+          </p:cNvSpPr>
+          <p:nvPr>
+            <p:ph type="sldNum" sz="quarter" idx="12"/>
+          </p:nvPr>
+        </p:nvSpPr>
+        <p:spPr/>
+        <p:txBody>
+          <a:bodyPr/>
+          <a:lstStyle/>
+          <a:p>
+            <a:fld id="{25726283-AA38-4E85-AA5F-A5EF301525D1}" type="slidenum">
+              <a:rPr lang="ru-RU" smtClean="0"/>
+              <a:t>19</a:t>
             </a:fld>
             <a:endParaRPr lang="ru-RU"/>
           </a:p>
@@ -5389,7 +7014,7 @@
           <p:cNvPr id="5" name="Объект 2">
             <a:extLst>
               <a:ext uri="{FF2B5EF4-FFF2-40B4-BE49-F238E27FC236}">
-                <a16:creationId xmlns:a16="http://schemas.microsoft.com/office/drawing/2014/main" id="{9C968E1E-FB54-8D99-75C7-E438991E89BB}"/>
+                <a16:creationId xmlns:a16="http://schemas.microsoft.com/office/drawing/2014/main" id="{C5CBD727-94A1-BB86-34CE-405241EEB455}"/>
               </a:ext>
             </a:extLst>
           </p:cNvPr>
@@ -5699,6 +7324,320 @@
           </a:p>
         </p:txBody>
       </p:sp>
+    </p:spTree>
+    <p:extLst>
+      <p:ext uri="{BB962C8B-B14F-4D97-AF65-F5344CB8AC3E}">
+        <p14:creationId xmlns:p14="http://schemas.microsoft.com/office/powerpoint/2010/main" val="1306420059"/>
+      </p:ext>
+    </p:extLst>
+  </p:cSld>
+  <p:clrMapOvr>
+    <a:masterClrMapping/>
+  </p:clrMapOvr>
+</p:sld>
+</file>
+
+<file path=ppt/slides/slide2.xml><?xml version="1.0" encoding="utf-8"?>
+<p:sld xmlns:a="http://schemas.openxmlformats.org/drawingml/2006/main" xmlns:r="http://schemas.openxmlformats.org/officeDocument/2006/relationships" xmlns:p="http://schemas.openxmlformats.org/presentationml/2006/main">
+  <p:cSld>
+    <p:spTree>
+      <p:nvGrpSpPr>
+        <p:cNvPr id="1" name=""/>
+        <p:cNvGrpSpPr/>
+        <p:nvPr/>
+      </p:nvGrpSpPr>
+      <p:grpSpPr>
+        <a:xfrm>
+          <a:off x="0" y="0"/>
+          <a:ext cx="0" cy="0"/>
+          <a:chOff x="0" y="0"/>
+          <a:chExt cx="0" cy="0"/>
+        </a:xfrm>
+      </p:grpSpPr>
+      <p:sp>
+        <p:nvSpPr>
+          <p:cNvPr id="2" name="Заголовок 1">
+            <a:extLst>
+              <a:ext uri="{FF2B5EF4-FFF2-40B4-BE49-F238E27FC236}">
+                <a16:creationId xmlns:a16="http://schemas.microsoft.com/office/drawing/2014/main" id="{5C752277-5DE6-44A2-ADB8-C7CB9675725C}"/>
+              </a:ext>
+            </a:extLst>
+          </p:cNvPr>
+          <p:cNvSpPr>
+            <a:spLocks noGrp="1"/>
+          </p:cNvSpPr>
+          <p:nvPr>
+            <p:ph type="title"/>
+          </p:nvPr>
+        </p:nvSpPr>
+        <p:spPr>
+          <a:xfrm>
+            <a:off x="1066800" y="672336"/>
+            <a:ext cx="10058400" cy="801533"/>
+          </a:xfrm>
+        </p:spPr>
+        <p:txBody>
+          <a:bodyPr/>
+          <a:lstStyle/>
+          <a:p>
+            <a:pPr algn="ctr"/>
+            <a:r>
+              <a:rPr lang="ru-RU" dirty="0"/>
+              <a:t>Цель и задачи работы</a:t>
+            </a:r>
+          </a:p>
+        </p:txBody>
+      </p:sp>
+      <p:sp>
+        <p:nvSpPr>
+          <p:cNvPr id="3" name="Объект 2">
+            <a:extLst>
+              <a:ext uri="{FF2B5EF4-FFF2-40B4-BE49-F238E27FC236}">
+                <a16:creationId xmlns:a16="http://schemas.microsoft.com/office/drawing/2014/main" id="{22933FE1-F73A-4C21-955B-D3E3859CC63E}"/>
+              </a:ext>
+            </a:extLst>
+          </p:cNvPr>
+          <p:cNvSpPr>
+            <a:spLocks noGrp="1"/>
+          </p:cNvSpPr>
+          <p:nvPr>
+            <p:ph idx="1"/>
+          </p:nvPr>
+        </p:nvSpPr>
+        <p:spPr>
+          <a:xfrm>
+            <a:off x="987552" y="1956816"/>
+            <a:ext cx="5422392" cy="3776472"/>
+          </a:xfrm>
+        </p:spPr>
+        <p:txBody>
+          <a:bodyPr>
+            <a:normAutofit fontScale="77500" lnSpcReduction="20000"/>
+          </a:bodyPr>
+          <a:lstStyle/>
+          <a:p>
+            <a:pPr algn="just"/>
+            <a:r>
+              <a:rPr lang="ru-RU" b="1" dirty="0"/>
+              <a:t>Цель работы</a:t>
+            </a:r>
+            <a:endParaRPr lang="ru-RU" dirty="0"/>
+          </a:p>
+          <a:p>
+            <a:pPr algn="just"/>
+            <a:r>
+              <a:rPr lang="ru-RU" dirty="0"/>
+              <a:t>Разработка программного средства для сравнительного анализа методов преобразования категориальных признаков с сохранением семантической информации, позволяющего оценить эффективность различных подходов кодирования при работе с </a:t>
+            </a:r>
+            <a:r>
+              <a:rPr lang="ru-RU" dirty="0" err="1"/>
+              <a:t>высокоразмерными</a:t>
+            </a:r>
+            <a:r>
+              <a:rPr lang="ru-RU" dirty="0"/>
+              <a:t> данными.</a:t>
+            </a:r>
+          </a:p>
+          <a:p>
+            <a:pPr algn="just"/>
+            <a:r>
+              <a:rPr lang="ru-RU" b="1" dirty="0"/>
+              <a:t>Задачи </a:t>
+            </a:r>
+            <a:endParaRPr lang="ru-RU" dirty="0"/>
+          </a:p>
+          <a:p>
+            <a:pPr algn="just"/>
+            <a:r>
+              <a:rPr lang="ru-RU" dirty="0"/>
+              <a:t>Анализ существующих методов кодирования категориальных признаков</a:t>
+            </a:r>
+          </a:p>
+          <a:p>
+            <a:pPr algn="just"/>
+            <a:r>
+              <a:rPr lang="ru-RU" dirty="0"/>
+              <a:t>Разработка программной архитектуры</a:t>
+            </a:r>
+          </a:p>
+          <a:p>
+            <a:pPr algn="just"/>
+            <a:r>
+              <a:rPr lang="ru-RU" dirty="0"/>
+              <a:t>Реализация методов кодирования</a:t>
+            </a:r>
+          </a:p>
+          <a:p>
+            <a:pPr algn="just"/>
+            <a:r>
+              <a:rPr lang="ru-RU" dirty="0"/>
+              <a:t>Создание пользовательского интерфейса</a:t>
+            </a:r>
+          </a:p>
+          <a:p>
+            <a:pPr algn="just"/>
+            <a:r>
+              <a:rPr lang="ru-RU" dirty="0"/>
+              <a:t>Сравнительный анализ методов</a:t>
+            </a:r>
+          </a:p>
+          <a:p>
+            <a:pPr algn="just"/>
+            <a:endParaRPr lang="ru-RU" dirty="0"/>
+          </a:p>
+        </p:txBody>
+      </p:sp>
+      <p:sp>
+        <p:nvSpPr>
+          <p:cNvPr id="4" name="Номер слайда 3">
+            <a:extLst>
+              <a:ext uri="{FF2B5EF4-FFF2-40B4-BE49-F238E27FC236}">
+                <a16:creationId xmlns:a16="http://schemas.microsoft.com/office/drawing/2014/main" id="{9955CF68-9AFB-2489-8250-2379401D26CB}"/>
+              </a:ext>
+            </a:extLst>
+          </p:cNvPr>
+          <p:cNvSpPr>
+            <a:spLocks noGrp="1"/>
+          </p:cNvSpPr>
+          <p:nvPr>
+            <p:ph type="sldNum" sz="quarter" idx="12"/>
+          </p:nvPr>
+        </p:nvSpPr>
+        <p:spPr/>
+        <p:txBody>
+          <a:bodyPr/>
+          <a:lstStyle/>
+          <a:p>
+            <a:fld id="{25726283-AA38-4E85-AA5F-A5EF301525D1}" type="slidenum">
+              <a:rPr lang="ru-RU" smtClean="0"/>
+              <a:t>2</a:t>
+            </a:fld>
+            <a:endParaRPr lang="ru-RU"/>
+          </a:p>
+        </p:txBody>
+      </p:sp>
+      <p:pic>
+        <p:nvPicPr>
+          <p:cNvPr id="2050" name="Picture 2" descr="Picture background">
+            <a:extLst>
+              <a:ext uri="{FF2B5EF4-FFF2-40B4-BE49-F238E27FC236}">
+                <a16:creationId xmlns:a16="http://schemas.microsoft.com/office/drawing/2014/main" id="{A9FEFDE3-7EA6-3531-BE6C-32206C89D885}"/>
+              </a:ext>
+            </a:extLst>
+          </p:cNvPr>
+          <p:cNvPicPr>
+            <a:picLocks noChangeAspect="1" noChangeArrowheads="1"/>
+          </p:cNvPicPr>
+          <p:nvPr/>
+        </p:nvPicPr>
+        <p:blipFill>
+          <a:blip r:embed="rId2">
+            <a:extLst>
+              <a:ext uri="{28A0092B-C50C-407E-A947-70E740481C1C}">
+                <a14:useLocalDpi xmlns:a14="http://schemas.microsoft.com/office/drawing/2010/main" val="0"/>
+              </a:ext>
+            </a:extLst>
+          </a:blip>
+          <a:srcRect/>
+          <a:stretch>
+            <a:fillRect/>
+          </a:stretch>
+        </p:blipFill>
+        <p:spPr bwMode="auto">
+          <a:xfrm>
+            <a:off x="6973503" y="1942022"/>
+            <a:ext cx="4463724" cy="2973956"/>
+          </a:xfrm>
+          <a:prstGeom prst="rect">
+            <a:avLst/>
+          </a:prstGeom>
+          <a:noFill/>
+          <a:extLst>
+            <a:ext uri="{909E8E84-426E-40DD-AFC4-6F175D3DCCD1}">
+              <a14:hiddenFill xmlns:a14="http://schemas.microsoft.com/office/drawing/2010/main">
+                <a:solidFill>
+                  <a:srgbClr val="FFFFFF"/>
+                </a:solidFill>
+              </a14:hiddenFill>
+            </a:ext>
+          </a:extLst>
+        </p:spPr>
+      </p:pic>
+    </p:spTree>
+    <p:extLst>
+      <p:ext uri="{BB962C8B-B14F-4D97-AF65-F5344CB8AC3E}">
+        <p14:creationId xmlns:p14="http://schemas.microsoft.com/office/powerpoint/2010/main" val="648469292"/>
+      </p:ext>
+    </p:extLst>
+  </p:cSld>
+  <p:clrMapOvr>
+    <a:masterClrMapping/>
+  </p:clrMapOvr>
+</p:sld>
+</file>
+
+<file path=ppt/slides/slide20.xml><?xml version="1.0" encoding="utf-8"?>
+<p:sld xmlns:a="http://schemas.openxmlformats.org/drawingml/2006/main" xmlns:r="http://schemas.openxmlformats.org/officeDocument/2006/relationships" xmlns:p="http://schemas.openxmlformats.org/presentationml/2006/main">
+  <p:cSld>
+    <p:spTree>
+      <p:nvGrpSpPr>
+        <p:cNvPr id="1" name="">
+          <a:extLst>
+            <a:ext uri="{FF2B5EF4-FFF2-40B4-BE49-F238E27FC236}">
+              <a16:creationId xmlns:a16="http://schemas.microsoft.com/office/drawing/2014/main" id="{60C8EB8F-A8D6-8ECE-4296-7766A1B08C35}"/>
+            </a:ext>
+          </a:extLst>
+        </p:cNvPr>
+        <p:cNvGrpSpPr/>
+        <p:nvPr/>
+      </p:nvGrpSpPr>
+      <p:grpSpPr>
+        <a:xfrm>
+          <a:off x="0" y="0"/>
+          <a:ext cx="0" cy="0"/>
+          <a:chOff x="0" y="0"/>
+          <a:chExt cx="0" cy="0"/>
+        </a:xfrm>
+      </p:grpSpPr>
+      <p:sp>
+        <p:nvSpPr>
+          <p:cNvPr id="2" name="Заголовок 1">
+            <a:extLst>
+              <a:ext uri="{FF2B5EF4-FFF2-40B4-BE49-F238E27FC236}">
+                <a16:creationId xmlns:a16="http://schemas.microsoft.com/office/drawing/2014/main" id="{E99A630E-A8E9-6780-DE26-21D3461EC3E9}"/>
+              </a:ext>
+            </a:extLst>
+          </p:cNvPr>
+          <p:cNvSpPr>
+            <a:spLocks noGrp="1"/>
+          </p:cNvSpPr>
+          <p:nvPr>
+            <p:ph type="title"/>
+          </p:nvPr>
+        </p:nvSpPr>
+        <p:spPr>
+          <a:xfrm>
+            <a:off x="1066800" y="672336"/>
+            <a:ext cx="10058400" cy="801533"/>
+          </a:xfrm>
+        </p:spPr>
+        <p:txBody>
+          <a:bodyPr/>
+          <a:lstStyle/>
+          <a:p>
+            <a:pPr algn="ctr"/>
+            <a:r>
+              <a:rPr lang="ru-RU" dirty="0"/>
+              <a:t>Пример </a:t>
+            </a:r>
+            <a:r>
+              <a:rPr lang="ru-RU" dirty="0" err="1"/>
+              <a:t>датасета</a:t>
+            </a:r>
+            <a:endParaRPr lang="ru-RU" dirty="0"/>
+          </a:p>
+        </p:txBody>
+      </p:sp>
       <p:sp>
         <p:nvSpPr>
           <p:cNvPr id="8" name="Объект 6">
@@ -5715,16 +7654,355 @@
             <p:ph idx="1"/>
           </p:nvPr>
         </p:nvSpPr>
+        <p:spPr/>
+        <p:txBody>
+          <a:bodyPr/>
+          <a:lstStyle/>
+          <a:p>
+            <a:endParaRPr lang="ru-RU" dirty="0"/>
+          </a:p>
+        </p:txBody>
+      </p:sp>
+      <p:sp>
+        <p:nvSpPr>
+          <p:cNvPr id="4" name="Номер слайда 3">
+            <a:extLst>
+              <a:ext uri="{FF2B5EF4-FFF2-40B4-BE49-F238E27FC236}">
+                <a16:creationId xmlns:a16="http://schemas.microsoft.com/office/drawing/2014/main" id="{D44B5FF5-C00C-336B-6C04-0685094DD9D3}"/>
+              </a:ext>
+            </a:extLst>
+          </p:cNvPr>
+          <p:cNvSpPr>
+            <a:spLocks noGrp="1"/>
+          </p:cNvSpPr>
+          <p:nvPr>
+            <p:ph type="sldNum" sz="quarter" idx="12"/>
+          </p:nvPr>
+        </p:nvSpPr>
+        <p:spPr/>
+        <p:txBody>
+          <a:bodyPr/>
+          <a:lstStyle/>
+          <a:p>
+            <a:fld id="{25726283-AA38-4E85-AA5F-A5EF301525D1}" type="slidenum">
+              <a:rPr lang="ru-RU" smtClean="0"/>
+              <a:t>20</a:t>
+            </a:fld>
+            <a:endParaRPr lang="ru-RU"/>
+          </a:p>
+        </p:txBody>
+      </p:sp>
+      <p:sp>
+        <p:nvSpPr>
+          <p:cNvPr id="5" name="Объект 2">
+            <a:extLst>
+              <a:ext uri="{FF2B5EF4-FFF2-40B4-BE49-F238E27FC236}">
+                <a16:creationId xmlns:a16="http://schemas.microsoft.com/office/drawing/2014/main" id="{9C968E1E-FB54-8D99-75C7-E438991E89BB}"/>
+              </a:ext>
+            </a:extLst>
+          </p:cNvPr>
+          <p:cNvSpPr txBox="1">
+            <a:spLocks/>
+          </p:cNvSpPr>
+          <p:nvPr/>
+        </p:nvSpPr>
         <p:spPr>
           <a:xfrm>
-            <a:off x="1097280" y="1845734"/>
-            <a:ext cx="10058400" cy="4023360"/>
-          </a:xfrm>
-        </p:spPr>
-        <p:txBody>
-          <a:bodyPr/>
-          <a:lstStyle/>
-          <a:p>
+            <a:off x="6525768" y="2785450"/>
+            <a:ext cx="4599432" cy="3400214"/>
+          </a:xfrm>
+          <a:prstGeom prst="rect">
+            <a:avLst/>
+          </a:prstGeom>
+        </p:spPr>
+        <p:txBody>
+          <a:bodyPr vert="horz" lIns="0" tIns="45720" rIns="0" bIns="45720" rtlCol="0">
+            <a:normAutofit/>
+          </a:bodyPr>
+          <a:lstStyle>
+            <a:lvl1pPr marL="91440" indent="-91440" algn="l" defTabSz="914400" rtl="0" eaLnBrk="1" latinLnBrk="0" hangingPunct="1">
+              <a:lnSpc>
+                <a:spcPct val="90000"/>
+              </a:lnSpc>
+              <a:spcBef>
+                <a:spcPts val="1200"/>
+              </a:spcBef>
+              <a:spcAft>
+                <a:spcPts val="200"/>
+              </a:spcAft>
+              <a:buClr>
+                <a:schemeClr val="accent1"/>
+              </a:buClr>
+              <a:buSzPct val="100000"/>
+              <a:buFont typeface="Calibri" panose="020F0502020204030204" pitchFamily="34" charset="0"/>
+              <a:buChar char=" "/>
+              <a:defRPr sz="2000" kern="1200">
+                <a:solidFill>
+                  <a:schemeClr val="tx1">
+                    <a:lumMod val="75000"/>
+                    <a:lumOff val="25000"/>
+                  </a:schemeClr>
+                </a:solidFill>
+                <a:latin typeface="+mn-lt"/>
+                <a:ea typeface="+mn-ea"/>
+                <a:cs typeface="+mn-cs"/>
+              </a:defRPr>
+            </a:lvl1pPr>
+            <a:lvl2pPr marL="384048" indent="-182880" algn="l" defTabSz="914400" rtl="0" eaLnBrk="1" latinLnBrk="0" hangingPunct="1">
+              <a:lnSpc>
+                <a:spcPct val="90000"/>
+              </a:lnSpc>
+              <a:spcBef>
+                <a:spcPts val="200"/>
+              </a:spcBef>
+              <a:spcAft>
+                <a:spcPts val="400"/>
+              </a:spcAft>
+              <a:buClr>
+                <a:schemeClr val="accent1"/>
+              </a:buClr>
+              <a:buFont typeface="Calibri" pitchFamily="34" charset="0"/>
+              <a:buChar char="◦"/>
+              <a:defRPr sz="1800" kern="1200">
+                <a:solidFill>
+                  <a:schemeClr val="tx1">
+                    <a:lumMod val="75000"/>
+                    <a:lumOff val="25000"/>
+                  </a:schemeClr>
+                </a:solidFill>
+                <a:latin typeface="+mn-lt"/>
+                <a:ea typeface="+mn-ea"/>
+                <a:cs typeface="+mn-cs"/>
+              </a:defRPr>
+            </a:lvl2pPr>
+            <a:lvl3pPr marL="566928" indent="-182880" algn="l" defTabSz="914400" rtl="0" eaLnBrk="1" latinLnBrk="0" hangingPunct="1">
+              <a:lnSpc>
+                <a:spcPct val="90000"/>
+              </a:lnSpc>
+              <a:spcBef>
+                <a:spcPts val="200"/>
+              </a:spcBef>
+              <a:spcAft>
+                <a:spcPts val="400"/>
+              </a:spcAft>
+              <a:buClr>
+                <a:schemeClr val="accent1"/>
+              </a:buClr>
+              <a:buFont typeface="Calibri" pitchFamily="34" charset="0"/>
+              <a:buChar char="◦"/>
+              <a:defRPr sz="1400" kern="1200">
+                <a:solidFill>
+                  <a:schemeClr val="tx1">
+                    <a:lumMod val="75000"/>
+                    <a:lumOff val="25000"/>
+                  </a:schemeClr>
+                </a:solidFill>
+                <a:latin typeface="+mn-lt"/>
+                <a:ea typeface="+mn-ea"/>
+                <a:cs typeface="+mn-cs"/>
+              </a:defRPr>
+            </a:lvl3pPr>
+            <a:lvl4pPr marL="749808" indent="-182880" algn="l" defTabSz="914400" rtl="0" eaLnBrk="1" latinLnBrk="0" hangingPunct="1">
+              <a:lnSpc>
+                <a:spcPct val="90000"/>
+              </a:lnSpc>
+              <a:spcBef>
+                <a:spcPts val="200"/>
+              </a:spcBef>
+              <a:spcAft>
+                <a:spcPts val="400"/>
+              </a:spcAft>
+              <a:buClr>
+                <a:schemeClr val="accent1"/>
+              </a:buClr>
+              <a:buFont typeface="Calibri" pitchFamily="34" charset="0"/>
+              <a:buChar char="◦"/>
+              <a:defRPr sz="1400" kern="1200">
+                <a:solidFill>
+                  <a:schemeClr val="tx1">
+                    <a:lumMod val="75000"/>
+                    <a:lumOff val="25000"/>
+                  </a:schemeClr>
+                </a:solidFill>
+                <a:latin typeface="+mn-lt"/>
+                <a:ea typeface="+mn-ea"/>
+                <a:cs typeface="+mn-cs"/>
+              </a:defRPr>
+            </a:lvl4pPr>
+            <a:lvl5pPr marL="932688" indent="-182880" algn="l" defTabSz="914400" rtl="0" eaLnBrk="1" latinLnBrk="0" hangingPunct="1">
+              <a:lnSpc>
+                <a:spcPct val="90000"/>
+              </a:lnSpc>
+              <a:spcBef>
+                <a:spcPts val="200"/>
+              </a:spcBef>
+              <a:spcAft>
+                <a:spcPts val="400"/>
+              </a:spcAft>
+              <a:buClr>
+                <a:schemeClr val="accent1"/>
+              </a:buClr>
+              <a:buFont typeface="Calibri" pitchFamily="34" charset="0"/>
+              <a:buChar char="◦"/>
+              <a:defRPr sz="1400" kern="1200">
+                <a:solidFill>
+                  <a:schemeClr val="tx1">
+                    <a:lumMod val="75000"/>
+                    <a:lumOff val="25000"/>
+                  </a:schemeClr>
+                </a:solidFill>
+                <a:latin typeface="+mn-lt"/>
+                <a:ea typeface="+mn-ea"/>
+                <a:cs typeface="+mn-cs"/>
+              </a:defRPr>
+            </a:lvl5pPr>
+            <a:lvl6pPr marL="1100000" indent="-228600" algn="l" defTabSz="914400" rtl="0" eaLnBrk="1" latinLnBrk="0" hangingPunct="1">
+              <a:lnSpc>
+                <a:spcPct val="90000"/>
+              </a:lnSpc>
+              <a:spcBef>
+                <a:spcPts val="200"/>
+              </a:spcBef>
+              <a:spcAft>
+                <a:spcPts val="400"/>
+              </a:spcAft>
+              <a:buClr>
+                <a:schemeClr val="accent1"/>
+              </a:buClr>
+              <a:buFont typeface="Calibri" pitchFamily="34" charset="0"/>
+              <a:buChar char="◦"/>
+              <a:defRPr sz="1400" kern="1200">
+                <a:solidFill>
+                  <a:schemeClr val="tx1">
+                    <a:lumMod val="75000"/>
+                    <a:lumOff val="25000"/>
+                  </a:schemeClr>
+                </a:solidFill>
+                <a:latin typeface="+mn-lt"/>
+                <a:ea typeface="+mn-ea"/>
+                <a:cs typeface="+mn-cs"/>
+              </a:defRPr>
+            </a:lvl6pPr>
+            <a:lvl7pPr marL="1300000" indent="-228600" algn="l" defTabSz="914400" rtl="0" eaLnBrk="1" latinLnBrk="0" hangingPunct="1">
+              <a:lnSpc>
+                <a:spcPct val="90000"/>
+              </a:lnSpc>
+              <a:spcBef>
+                <a:spcPts val="200"/>
+              </a:spcBef>
+              <a:spcAft>
+                <a:spcPts val="400"/>
+              </a:spcAft>
+              <a:buClr>
+                <a:schemeClr val="accent1"/>
+              </a:buClr>
+              <a:buFont typeface="Calibri" pitchFamily="34" charset="0"/>
+              <a:buChar char="◦"/>
+              <a:defRPr sz="1400" kern="1200">
+                <a:solidFill>
+                  <a:schemeClr val="tx1">
+                    <a:lumMod val="75000"/>
+                    <a:lumOff val="25000"/>
+                  </a:schemeClr>
+                </a:solidFill>
+                <a:latin typeface="+mn-lt"/>
+                <a:ea typeface="+mn-ea"/>
+                <a:cs typeface="+mn-cs"/>
+              </a:defRPr>
+            </a:lvl7pPr>
+            <a:lvl8pPr marL="1500000" indent="-228600" algn="l" defTabSz="914400" rtl="0" eaLnBrk="1" latinLnBrk="0" hangingPunct="1">
+              <a:lnSpc>
+                <a:spcPct val="90000"/>
+              </a:lnSpc>
+              <a:spcBef>
+                <a:spcPts val="200"/>
+              </a:spcBef>
+              <a:spcAft>
+                <a:spcPts val="400"/>
+              </a:spcAft>
+              <a:buClr>
+                <a:schemeClr val="accent1"/>
+              </a:buClr>
+              <a:buFont typeface="Calibri" pitchFamily="34" charset="0"/>
+              <a:buChar char="◦"/>
+              <a:defRPr sz="1400" kern="1200">
+                <a:solidFill>
+                  <a:schemeClr val="tx1">
+                    <a:lumMod val="75000"/>
+                    <a:lumOff val="25000"/>
+                  </a:schemeClr>
+                </a:solidFill>
+                <a:latin typeface="+mn-lt"/>
+                <a:ea typeface="+mn-ea"/>
+                <a:cs typeface="+mn-cs"/>
+              </a:defRPr>
+            </a:lvl8pPr>
+            <a:lvl9pPr marL="1700000" indent="-228600" algn="l" defTabSz="914400" rtl="0" eaLnBrk="1" latinLnBrk="0" hangingPunct="1">
+              <a:lnSpc>
+                <a:spcPct val="90000"/>
+              </a:lnSpc>
+              <a:spcBef>
+                <a:spcPts val="200"/>
+              </a:spcBef>
+              <a:spcAft>
+                <a:spcPts val="400"/>
+              </a:spcAft>
+              <a:buClr>
+                <a:schemeClr val="accent1"/>
+              </a:buClr>
+              <a:buFont typeface="Calibri" pitchFamily="34" charset="0"/>
+              <a:buChar char="◦"/>
+              <a:defRPr sz="1400" kern="1200">
+                <a:solidFill>
+                  <a:schemeClr val="tx1">
+                    <a:lumMod val="75000"/>
+                    <a:lumOff val="25000"/>
+                  </a:schemeClr>
+                </a:solidFill>
+                <a:latin typeface="+mn-lt"/>
+                <a:ea typeface="+mn-ea"/>
+                <a:cs typeface="+mn-cs"/>
+              </a:defRPr>
+            </a:lvl9pPr>
+          </a:lstStyle>
+          <a:p>
+            <a:pPr algn="just"/>
+            <a:r>
+              <a:rPr lang="ru-RU" dirty="0"/>
+              <a:t>Датасеты:</a:t>
+            </a:r>
+          </a:p>
+          <a:p>
+            <a:pPr marL="457200" indent="-457200" algn="just">
+              <a:buFont typeface="+mj-lt"/>
+              <a:buAutoNum type="arabicPeriod"/>
+            </a:pPr>
+            <a:r>
+              <a:rPr lang="en-US" dirty="0" err="1"/>
+              <a:t>CarPrice_Assignment</a:t>
+            </a:r>
+            <a:endParaRPr lang="ru-RU" dirty="0"/>
+          </a:p>
+          <a:p>
+            <a:pPr marL="457200" indent="-457200" algn="just">
+              <a:buFont typeface="+mj-lt"/>
+              <a:buAutoNum type="arabicPeriod"/>
+            </a:pPr>
+            <a:r>
+              <a:rPr lang="en-US" dirty="0"/>
+              <a:t>Healthcare</a:t>
+            </a:r>
+            <a:endParaRPr lang="ru-RU" dirty="0"/>
+          </a:p>
+          <a:p>
+            <a:pPr marL="457200" indent="-457200" algn="just">
+              <a:buFont typeface="+mj-lt"/>
+              <a:buAutoNum type="arabicPeriod"/>
+            </a:pPr>
+            <a:r>
+              <a:rPr lang="en-US" dirty="0" err="1"/>
+              <a:t>Historical_Pandemic_Epidemic_Dataset</a:t>
+            </a:r>
             <a:endParaRPr lang="ru-RU" dirty="0"/>
           </a:p>
         </p:txBody>
@@ -5772,7 +8050,7 @@
 </p:sld>
 </file>
 
-<file path=ppt/slides/slide13.xml><?xml version="1.0" encoding="utf-8"?>
+<file path=ppt/slides/slide21.xml><?xml version="1.0" encoding="utf-8"?>
 <p:sld xmlns:a="http://schemas.openxmlformats.org/drawingml/2006/main" xmlns:r="http://schemas.openxmlformats.org/officeDocument/2006/relationships" xmlns:p="http://schemas.openxmlformats.org/presentationml/2006/main">
   <p:cSld>
     <p:bg>
@@ -5805,245 +8083,6 @@
       </p:grpSpPr>
       <p:sp>
         <p:nvSpPr>
-          <p:cNvPr id="15" name="Rectangle 14">
-            <a:extLst>
-              <a:ext uri="{FF2B5EF4-FFF2-40B4-BE49-F238E27FC236}">
-                <a16:creationId xmlns:a16="http://schemas.microsoft.com/office/drawing/2014/main" id="{26D75EE5-57FF-4D1E-B105-A6036B0FE6BD}"/>
-              </a:ext>
-              <a:ext uri="{C183D7F6-B498-43B3-948B-1728B52AA6E4}">
-                <adec:decorative xmlns:adec="http://schemas.microsoft.com/office/drawing/2017/decorative" val="1"/>
-              </a:ext>
-            </a:extLst>
-          </p:cNvPr>
-          <p:cNvSpPr>
-            <a:spLocks noGrp="1" noRot="1" noChangeAspect="1" noMove="1" noResize="1" noEditPoints="1" noAdjustHandles="1" noChangeArrowheads="1" noChangeShapeType="1" noTextEdit="1"/>
-          </p:cNvSpPr>
-          <p:nvPr>
-            <p:extLst>
-              <p:ext uri="{386F3935-93C4-4BCD-93E2-E3B085C9AB24}">
-                <p16:designElem xmlns:p16="http://schemas.microsoft.com/office/powerpoint/2015/main" val="1"/>
-              </p:ext>
-            </p:extLst>
-          </p:nvPr>
-        </p:nvSpPr>
-        <p:spPr>
-          <a:xfrm>
-            <a:off x="3175" y="6400800"/>
-            <a:ext cx="12188825" cy="457200"/>
-          </a:xfrm>
-          <a:prstGeom prst="rect">
-            <a:avLst/>
-          </a:prstGeom>
-          <a:solidFill>
-            <a:schemeClr val="accent2"/>
-          </a:solidFill>
-          <a:ln>
-            <a:noFill/>
-          </a:ln>
-        </p:spPr>
-        <p:style>
-          <a:lnRef idx="2">
-            <a:schemeClr val="accent1">
-              <a:shade val="50000"/>
-            </a:schemeClr>
-          </a:lnRef>
-          <a:fillRef idx="1">
-            <a:schemeClr val="accent1"/>
-          </a:fillRef>
-          <a:effectRef idx="0">
-            <a:schemeClr val="accent1"/>
-          </a:effectRef>
-          <a:fontRef idx="minor">
-            <a:schemeClr val="lt1"/>
-          </a:fontRef>
-        </p:style>
-        <p:txBody>
-          <a:bodyPr/>
-          <a:lstStyle/>
-          <a:p>
-            <a:endParaRPr lang="ru-RU"/>
-          </a:p>
-        </p:txBody>
-      </p:sp>
-      <p:sp>
-        <p:nvSpPr>
-          <p:cNvPr id="17" name="Rectangle 16">
-            <a:extLst>
-              <a:ext uri="{FF2B5EF4-FFF2-40B4-BE49-F238E27FC236}">
-                <a16:creationId xmlns:a16="http://schemas.microsoft.com/office/drawing/2014/main" id="{C913828F-06C6-4172-B0DE-BAB0120201D3}"/>
-              </a:ext>
-              <a:ext uri="{C183D7F6-B498-43B3-948B-1728B52AA6E4}">
-                <adec:decorative xmlns:adec="http://schemas.microsoft.com/office/drawing/2017/decorative" val="1"/>
-              </a:ext>
-            </a:extLst>
-          </p:cNvPr>
-          <p:cNvSpPr>
-            <a:spLocks noGrp="1" noRot="1" noChangeAspect="1" noMove="1" noResize="1" noEditPoints="1" noAdjustHandles="1" noChangeArrowheads="1" noChangeShapeType="1" noTextEdit="1"/>
-          </p:cNvSpPr>
-          <p:nvPr>
-            <p:extLst>
-              <p:ext uri="{386F3935-93C4-4BCD-93E2-E3B085C9AB24}">
-                <p16:designElem xmlns:p16="http://schemas.microsoft.com/office/powerpoint/2015/main" val="1"/>
-              </p:ext>
-            </p:extLst>
-          </p:nvPr>
-        </p:nvSpPr>
-        <p:spPr>
-          <a:xfrm>
-            <a:off x="15" y="6334316"/>
-            <a:ext cx="12188825" cy="64008"/>
-          </a:xfrm>
-          <a:prstGeom prst="rect">
-            <a:avLst/>
-          </a:prstGeom>
-          <a:solidFill>
-            <a:schemeClr val="accent1"/>
-          </a:solidFill>
-          <a:ln>
-            <a:noFill/>
-          </a:ln>
-        </p:spPr>
-        <p:style>
-          <a:lnRef idx="2">
-            <a:schemeClr val="accent1">
-              <a:shade val="50000"/>
-            </a:schemeClr>
-          </a:lnRef>
-          <a:fillRef idx="1">
-            <a:schemeClr val="accent1"/>
-          </a:fillRef>
-          <a:effectRef idx="0">
-            <a:schemeClr val="accent1"/>
-          </a:effectRef>
-          <a:fontRef idx="minor">
-            <a:schemeClr val="lt1"/>
-          </a:fontRef>
-        </p:style>
-        <p:txBody>
-          <a:bodyPr/>
-          <a:lstStyle/>
-          <a:p>
-            <a:endParaRPr lang="ru-RU"/>
-          </a:p>
-        </p:txBody>
-      </p:sp>
-      <p:cxnSp>
-        <p:nvCxnSpPr>
-          <p:cNvPr id="19" name="Straight Connector 18">
-            <a:extLst>
-              <a:ext uri="{FF2B5EF4-FFF2-40B4-BE49-F238E27FC236}">
-                <a16:creationId xmlns:a16="http://schemas.microsoft.com/office/drawing/2014/main" id="{0CB2A3A6-962C-4D7A-8272-EDEDD881F07E}"/>
-              </a:ext>
-              <a:ext uri="{C183D7F6-B498-43B3-948B-1728B52AA6E4}">
-                <adec:decorative xmlns:adec="http://schemas.microsoft.com/office/drawing/2017/decorative" val="1"/>
-              </a:ext>
-            </a:extLst>
-          </p:cNvPr>
-          <p:cNvCxnSpPr>
-            <a:cxnSpLocks noGrp="1" noRot="1" noChangeAspect="1" noMove="1" noResize="1" noEditPoints="1" noAdjustHandles="1" noChangeArrowheads="1" noChangeShapeType="1"/>
-          </p:cNvCxnSpPr>
-          <p:nvPr>
-            <p:extLst>
-              <p:ext uri="{386F3935-93C4-4BCD-93E2-E3B085C9AB24}">
-                <p16:designElem xmlns:p16="http://schemas.microsoft.com/office/powerpoint/2015/main" val="1"/>
-              </p:ext>
-            </p:extLst>
-          </p:nvPr>
-        </p:nvCxnSpPr>
-        <p:spPr>
-          <a:xfrm>
-            <a:off x="1207658" y="4343400"/>
-            <a:ext cx="9875520" cy="0"/>
-          </a:xfrm>
-          <a:prstGeom prst="line">
-            <a:avLst/>
-          </a:prstGeom>
-          <a:ln w="6350">
-            <a:solidFill>
-              <a:schemeClr val="tx1">
-                <a:lumMod val="50000"/>
-                <a:lumOff val="50000"/>
-              </a:schemeClr>
-            </a:solidFill>
-          </a:ln>
-        </p:spPr>
-        <p:style>
-          <a:lnRef idx="1">
-            <a:schemeClr val="accent1"/>
-          </a:lnRef>
-          <a:fillRef idx="0">
-            <a:schemeClr val="accent1"/>
-          </a:fillRef>
-          <a:effectRef idx="0">
-            <a:schemeClr val="accent1"/>
-          </a:effectRef>
-          <a:fontRef idx="minor">
-            <a:schemeClr val="tx1"/>
-          </a:fontRef>
-        </p:style>
-      </p:cxnSp>
-      <p:sp useBgFill="1">
-        <p:nvSpPr>
-          <p:cNvPr id="21" name="Rectangle 20">
-            <a:extLst>
-              <a:ext uri="{FF2B5EF4-FFF2-40B4-BE49-F238E27FC236}">
-                <a16:creationId xmlns:a16="http://schemas.microsoft.com/office/drawing/2014/main" id="{21348D5E-A2F9-4457-85D6-EF33B01C1B86}"/>
-              </a:ext>
-              <a:ext uri="{C183D7F6-B498-43B3-948B-1728B52AA6E4}">
-                <adec:decorative xmlns:adec="http://schemas.microsoft.com/office/drawing/2017/decorative" val="1"/>
-              </a:ext>
-            </a:extLst>
-          </p:cNvPr>
-          <p:cNvSpPr>
-            <a:spLocks noGrp="1" noRot="1" noChangeAspect="1" noMove="1" noResize="1" noEditPoints="1" noAdjustHandles="1" noChangeArrowheads="1" noChangeShapeType="1" noTextEdit="1"/>
-          </p:cNvSpPr>
-          <p:nvPr>
-            <p:extLst>
-              <p:ext uri="{386F3935-93C4-4BCD-93E2-E3B085C9AB24}">
-                <p16:designElem xmlns:p16="http://schemas.microsoft.com/office/powerpoint/2015/main" val="1"/>
-              </p:ext>
-            </p:extLst>
-          </p:nvPr>
-        </p:nvSpPr>
-        <p:spPr>
-          <a:xfrm>
-            <a:off x="0" y="0"/>
-            <a:ext cx="12192001" cy="6334316"/>
-          </a:xfrm>
-          <a:prstGeom prst="rect">
-            <a:avLst/>
-          </a:prstGeom>
-          <a:ln>
-            <a:noFill/>
-          </a:ln>
-        </p:spPr>
-        <p:style>
-          <a:lnRef idx="2">
-            <a:schemeClr val="accent1">
-              <a:shade val="50000"/>
-            </a:schemeClr>
-          </a:lnRef>
-          <a:fillRef idx="1">
-            <a:schemeClr val="accent1"/>
-          </a:fillRef>
-          <a:effectRef idx="0">
-            <a:schemeClr val="accent1"/>
-          </a:effectRef>
-          <a:fontRef idx="minor">
-            <a:schemeClr val="lt1"/>
-          </a:fontRef>
-        </p:style>
-        <p:txBody>
-          <a:bodyPr rtlCol="0" anchor="ctr"/>
-          <a:lstStyle/>
-          <a:p>
-            <a:pPr algn="ctr"/>
-            <a:endParaRPr lang="en-US"/>
-          </a:p>
-        </p:txBody>
-      </p:sp>
-      <p:sp>
-        <p:nvSpPr>
           <p:cNvPr id="2" name="Заголовок 1">
             <a:extLst>
               <a:ext uri="{FF2B5EF4-FFF2-40B4-BE49-F238E27FC236}">
@@ -6060,295 +8099,109 @@
         </p:nvSpPr>
         <p:spPr>
           <a:xfrm>
-            <a:off x="609459" y="4711473"/>
-            <a:ext cx="10909073" cy="1057655"/>
+            <a:off x="1154083" y="864323"/>
+            <a:ext cx="10058400" cy="822960"/>
           </a:xfrm>
         </p:spPr>
         <p:txBody>
           <a:bodyPr vert="horz" lIns="91440" tIns="45720" rIns="91440" bIns="45720" rtlCol="0" anchor="b">
-            <a:normAutofit/>
+            <a:noAutofit/>
           </a:bodyPr>
           <a:lstStyle/>
           <a:p>
             <a:r>
-              <a:rPr lang="en-US" sz="6000" dirty="0" err="1">
-                <a:solidFill>
-                  <a:schemeClr val="tx1">
-                    <a:lumMod val="85000"/>
-                    <a:lumOff val="15000"/>
-                  </a:schemeClr>
+              <a:rPr lang="en-US" sz="4000" dirty="0" err="1">
+                <a:solidFill>
+                  <a:schemeClr val="tx1"/>
                 </a:solidFill>
               </a:rPr>
-              <a:t>Результаты</a:t>
-            </a:r>
-            <a:r>
-              <a:rPr lang="en-US" sz="6000" dirty="0">
-                <a:solidFill>
-                  <a:schemeClr val="tx1">
-                    <a:lumMod val="85000"/>
-                    <a:lumOff val="15000"/>
-                  </a:schemeClr>
+              <a:t>Результат</a:t>
+            </a:r>
+            <a:r>
+              <a:rPr lang="en-US" sz="4000" dirty="0">
+                <a:solidFill>
+                  <a:schemeClr val="tx1"/>
                 </a:solidFill>
               </a:rPr>
               <a:t> </a:t>
             </a:r>
             <a:r>
-              <a:rPr lang="en-US" sz="6000" dirty="0" err="1">
-                <a:solidFill>
-                  <a:schemeClr val="tx1">
-                    <a:lumMod val="85000"/>
-                    <a:lumOff val="15000"/>
-                  </a:schemeClr>
+              <a:rPr lang="en-US" sz="4000" dirty="0" err="1">
+                <a:solidFill>
+                  <a:schemeClr val="tx1"/>
                 </a:solidFill>
               </a:rPr>
-              <a:t>анализа</a:t>
-            </a:r>
-            <a:endParaRPr lang="en-US" sz="6000" dirty="0">
+              <a:t>попарной</a:t>
+            </a:r>
+            <a:r>
+              <a:rPr lang="en-US" sz="4000" dirty="0">
+                <a:solidFill>
+                  <a:schemeClr val="tx1"/>
+                </a:solidFill>
+              </a:rPr>
+              <a:t> </a:t>
+            </a:r>
+            <a:r>
+              <a:rPr lang="en-US" sz="4000" dirty="0" err="1">
+                <a:solidFill>
+                  <a:schemeClr val="tx1"/>
+                </a:solidFill>
+              </a:rPr>
+              <a:t>корреляции</a:t>
+            </a:r>
+            <a:r>
+              <a:rPr lang="en-US" sz="4000" dirty="0">
+                <a:solidFill>
+                  <a:schemeClr val="tx1"/>
+                </a:solidFill>
+              </a:rPr>
+              <a:t> </a:t>
+            </a:r>
+            <a:r>
+              <a:rPr lang="en-US" sz="4000" dirty="0" err="1">
+                <a:solidFill>
+                  <a:schemeClr val="tx1"/>
+                </a:solidFill>
+              </a:rPr>
+              <a:t>признаков</a:t>
+            </a:r>
+            <a:r>
+              <a:rPr lang="en-US" sz="4000" dirty="0">
+                <a:solidFill>
+                  <a:schemeClr val="tx1"/>
+                </a:solidFill>
+              </a:rPr>
+              <a:t> с </a:t>
+            </a:r>
+            <a:r>
+              <a:rPr lang="en-US" sz="4000" dirty="0" err="1">
+                <a:solidFill>
+                  <a:schemeClr val="tx1"/>
+                </a:solidFill>
+              </a:rPr>
+              <a:t>целевой</a:t>
+            </a:r>
+            <a:r>
+              <a:rPr lang="en-US" sz="4000" dirty="0">
+                <a:solidFill>
+                  <a:schemeClr val="tx1"/>
+                </a:solidFill>
+              </a:rPr>
+              <a:t> </a:t>
+            </a:r>
+            <a:r>
+              <a:rPr lang="en-US" sz="4000" dirty="0" err="1">
+                <a:solidFill>
+                  <a:schemeClr val="tx1"/>
+                </a:solidFill>
+              </a:rPr>
+              <a:t>переменной</a:t>
+            </a:r>
+            <a:endParaRPr lang="en-US" sz="4000" dirty="0">
               <a:solidFill>
-                <a:schemeClr val="tx1">
-                  <a:lumMod val="85000"/>
-                  <a:lumOff val="15000"/>
-                </a:schemeClr>
+                <a:schemeClr val="tx1"/>
               </a:solidFill>
             </a:endParaRPr>
-          </a:p>
-        </p:txBody>
-      </p:sp>
-      <p:sp>
-        <p:nvSpPr>
-          <p:cNvPr id="23" name="Rectangle 22">
-            <a:extLst>
-              <a:ext uri="{FF2B5EF4-FFF2-40B4-BE49-F238E27FC236}">
-                <a16:creationId xmlns:a16="http://schemas.microsoft.com/office/drawing/2014/main" id="{62E5679E-AF9A-4675-8EB9-82F877C47B17}"/>
-              </a:ext>
-              <a:ext uri="{C183D7F6-B498-43B3-948B-1728B52AA6E4}">
-                <adec:decorative xmlns:adec="http://schemas.microsoft.com/office/drawing/2017/decorative" val="1"/>
-              </a:ext>
-            </a:extLst>
-          </p:cNvPr>
-          <p:cNvSpPr>
-            <a:spLocks noGrp="1" noRot="1" noChangeAspect="1" noMove="1" noResize="1" noEditPoints="1" noAdjustHandles="1" noChangeArrowheads="1" noChangeShapeType="1" noTextEdit="1"/>
-          </p:cNvSpPr>
-          <p:nvPr>
-            <p:extLst>
-              <p:ext uri="{386F3935-93C4-4BCD-93E2-E3B085C9AB24}">
-                <p16:designElem xmlns:p16="http://schemas.microsoft.com/office/powerpoint/2015/main" val="1"/>
-              </p:ext>
-            </p:extLst>
-          </p:nvPr>
-        </p:nvSpPr>
-        <p:spPr>
-          <a:xfrm>
-            <a:off x="6063996" y="886968"/>
-            <a:ext cx="64008" cy="3108960"/>
-          </a:xfrm>
-          <a:prstGeom prst="rect">
-            <a:avLst/>
-          </a:prstGeom>
-          <a:ln>
-            <a:noFill/>
-          </a:ln>
-        </p:spPr>
-        <p:style>
-          <a:lnRef idx="2">
-            <a:schemeClr val="accent1">
-              <a:shade val="50000"/>
-            </a:schemeClr>
-          </a:lnRef>
-          <a:fillRef idx="1">
-            <a:schemeClr val="accent1"/>
-          </a:fillRef>
-          <a:effectRef idx="0">
-            <a:schemeClr val="accent1"/>
-          </a:effectRef>
-          <a:fontRef idx="minor">
-            <a:schemeClr val="lt1"/>
-          </a:fontRef>
-        </p:style>
-        <p:txBody>
-          <a:bodyPr rtlCol="0" anchor="ctr"/>
-          <a:lstStyle/>
-          <a:p>
-            <a:pPr algn="ctr"/>
-            <a:endParaRPr lang="en-US"/>
-          </a:p>
-        </p:txBody>
-      </p:sp>
-      <p:cxnSp>
-        <p:nvCxnSpPr>
-          <p:cNvPr id="25" name="Straight Connector 24">
-            <a:extLst>
-              <a:ext uri="{FF2B5EF4-FFF2-40B4-BE49-F238E27FC236}">
-                <a16:creationId xmlns:a16="http://schemas.microsoft.com/office/drawing/2014/main" id="{A4193D27-0DF9-4485-90D7-D8E69A3F4459}"/>
-              </a:ext>
-              <a:ext uri="{C183D7F6-B498-43B3-948B-1728B52AA6E4}">
-                <adec:decorative xmlns:adec="http://schemas.microsoft.com/office/drawing/2017/decorative" val="1"/>
-              </a:ext>
-            </a:extLst>
-          </p:cNvPr>
-          <p:cNvCxnSpPr>
-            <a:cxnSpLocks noGrp="1" noRot="1" noChangeAspect="1" noMove="1" noResize="1" noEditPoints="1" noAdjustHandles="1" noChangeArrowheads="1" noChangeShapeType="1"/>
-          </p:cNvCxnSpPr>
-          <p:nvPr>
-            <p:extLst>
-              <p:ext uri="{386F3935-93C4-4BCD-93E2-E3B085C9AB24}">
-                <p16:designElem xmlns:p16="http://schemas.microsoft.com/office/powerpoint/2015/main" val="1"/>
-              </p:ext>
-            </p:extLst>
-          </p:nvPr>
-        </p:nvCxnSpPr>
-        <p:spPr>
-          <a:xfrm>
-            <a:off x="721086" y="5618770"/>
-            <a:ext cx="10515600" cy="0"/>
-          </a:xfrm>
-          <a:prstGeom prst="line">
-            <a:avLst/>
-          </a:prstGeom>
-          <a:ln w="6350">
-            <a:solidFill>
-              <a:schemeClr val="tx2">
-                <a:alpha val="90000"/>
-              </a:schemeClr>
-            </a:solidFill>
-          </a:ln>
-        </p:spPr>
-        <p:style>
-          <a:lnRef idx="1">
-            <a:schemeClr val="accent1"/>
-          </a:lnRef>
-          <a:fillRef idx="0">
-            <a:schemeClr val="accent1"/>
-          </a:fillRef>
-          <a:effectRef idx="0">
-            <a:schemeClr val="accent1"/>
-          </a:effectRef>
-          <a:fontRef idx="minor">
-            <a:schemeClr val="tx1"/>
-          </a:fontRef>
-        </p:style>
-      </p:cxnSp>
-      <p:sp>
-        <p:nvSpPr>
-          <p:cNvPr id="27" name="Rectangle 26">
-            <a:extLst>
-              <a:ext uri="{FF2B5EF4-FFF2-40B4-BE49-F238E27FC236}">
-                <a16:creationId xmlns:a16="http://schemas.microsoft.com/office/drawing/2014/main" id="{7EF5A4DD-17B0-415A-8F3A-0DEE3FF8F8C5}"/>
-              </a:ext>
-              <a:ext uri="{C183D7F6-B498-43B3-948B-1728B52AA6E4}">
-                <adec:decorative xmlns:adec="http://schemas.microsoft.com/office/drawing/2017/decorative" val="1"/>
-              </a:ext>
-            </a:extLst>
-          </p:cNvPr>
-          <p:cNvSpPr>
-            <a:spLocks noGrp="1" noRot="1" noChangeAspect="1" noMove="1" noResize="1" noEditPoints="1" noAdjustHandles="1" noChangeArrowheads="1" noChangeShapeType="1" noTextEdit="1"/>
-          </p:cNvSpPr>
-          <p:nvPr>
-            <p:extLst>
-              <p:ext uri="{386F3935-93C4-4BCD-93E2-E3B085C9AB24}">
-                <p16:designElem xmlns:p16="http://schemas.microsoft.com/office/powerpoint/2015/main" val="1"/>
-              </p:ext>
-            </p:extLst>
-          </p:nvPr>
-        </p:nvSpPr>
-        <p:spPr>
-          <a:xfrm>
-            <a:off x="15" y="6334316"/>
-            <a:ext cx="12191985" cy="66484"/>
-          </a:xfrm>
-          <a:prstGeom prst="rect">
-            <a:avLst/>
-          </a:prstGeom>
-          <a:solidFill>
-            <a:schemeClr val="accent1"/>
-          </a:solidFill>
-          <a:ln>
-            <a:noFill/>
-          </a:ln>
-        </p:spPr>
-        <p:style>
-          <a:lnRef idx="2">
-            <a:schemeClr val="accent1">
-              <a:shade val="50000"/>
-            </a:schemeClr>
-          </a:lnRef>
-          <a:fillRef idx="1">
-            <a:schemeClr val="accent1"/>
-          </a:fillRef>
-          <a:effectRef idx="0">
-            <a:schemeClr val="accent1"/>
-          </a:effectRef>
-          <a:fontRef idx="minor">
-            <a:schemeClr val="lt1"/>
-          </a:fontRef>
-        </p:style>
-        <p:txBody>
-          <a:bodyPr/>
-          <a:lstStyle/>
-          <a:p>
-            <a:endParaRPr lang="ru-RU"/>
-          </a:p>
-        </p:txBody>
-      </p:sp>
-      <p:sp>
-        <p:nvSpPr>
-          <p:cNvPr id="29" name="Rectangle 28">
-            <a:extLst>
-              <a:ext uri="{FF2B5EF4-FFF2-40B4-BE49-F238E27FC236}">
-                <a16:creationId xmlns:a16="http://schemas.microsoft.com/office/drawing/2014/main" id="{4AA73B4A-2570-4D18-9566-12E68828C417}"/>
-              </a:ext>
-              <a:ext uri="{C183D7F6-B498-43B3-948B-1728B52AA6E4}">
-                <adec:decorative xmlns:adec="http://schemas.microsoft.com/office/drawing/2017/decorative" val="1"/>
-              </a:ext>
-            </a:extLst>
-          </p:cNvPr>
-          <p:cNvSpPr>
-            <a:spLocks noGrp="1" noRot="1" noChangeAspect="1" noMove="1" noResize="1" noEditPoints="1" noAdjustHandles="1" noChangeArrowheads="1" noChangeShapeType="1" noTextEdit="1"/>
-          </p:cNvSpPr>
-          <p:nvPr>
-            <p:extLst>
-              <p:ext uri="{386F3935-93C4-4BCD-93E2-E3B085C9AB24}">
-                <p16:designElem xmlns:p16="http://schemas.microsoft.com/office/powerpoint/2015/main" val="1"/>
-              </p:ext>
-            </p:extLst>
-          </p:nvPr>
-        </p:nvSpPr>
-        <p:spPr>
-          <a:xfrm>
-            <a:off x="1" y="6400800"/>
-            <a:ext cx="12192000" cy="457200"/>
-          </a:xfrm>
-          <a:prstGeom prst="rect">
-            <a:avLst/>
-          </a:prstGeom>
-          <a:solidFill>
-            <a:schemeClr val="accent2"/>
-          </a:solidFill>
-          <a:ln>
-            <a:noFill/>
-          </a:ln>
-        </p:spPr>
-        <p:style>
-          <a:lnRef idx="2">
-            <a:schemeClr val="accent1">
-              <a:shade val="50000"/>
-            </a:schemeClr>
-          </a:lnRef>
-          <a:fillRef idx="1">
-            <a:schemeClr val="accent1"/>
-          </a:fillRef>
-          <a:effectRef idx="0">
-            <a:schemeClr val="accent1"/>
-          </a:effectRef>
-          <a:fontRef idx="minor">
-            <a:schemeClr val="lt1"/>
-          </a:fontRef>
-        </p:style>
-        <p:txBody>
-          <a:bodyPr/>
-          <a:lstStyle/>
-          <a:p>
-            <a:endParaRPr lang="ru-RU"/>
           </a:p>
         </p:txBody>
       </p:sp>
@@ -6368,31 +8221,26 @@
             <p:ph type="sldNum" sz="quarter" idx="12"/>
           </p:nvPr>
         </p:nvSpPr>
-        <p:spPr>
-          <a:xfrm>
-            <a:off x="9900458" y="6459785"/>
-            <a:ext cx="1312025" cy="365125"/>
-          </a:xfrm>
-        </p:spPr>
+        <p:spPr/>
         <p:txBody>
           <a:bodyPr vert="horz" lIns="91440" tIns="45720" rIns="91440" bIns="45720" rtlCol="0" anchor="ctr">
             <a:normAutofit/>
           </a:bodyPr>
           <a:lstStyle/>
           <a:p>
-            <a:pPr>
+            <a:pPr defTabSz="914400">
               <a:spcAft>
                 <a:spcPts val="600"/>
               </a:spcAft>
             </a:pPr>
             <a:fld id="{25726283-AA38-4E85-AA5F-A5EF301525D1}" type="slidenum">
               <a:rPr lang="en-US" smtClean="0"/>
-              <a:pPr>
+              <a:pPr defTabSz="914400">
                 <a:spcAft>
                   <a:spcPts val="600"/>
                 </a:spcAft>
               </a:pPr>
-              <a:t>13</a:t>
+              <a:t>21</a:t>
             </a:fld>
             <a:endParaRPr lang="en-US"/>
           </a:p>
@@ -6400,10 +8248,10 @@
       </p:sp>
       <p:pic>
         <p:nvPicPr>
-          <p:cNvPr id="8" name="Рисунок 7">
+          <p:cNvPr id="5" name="Рисунок 4">
             <a:extLst>
               <a:ext uri="{FF2B5EF4-FFF2-40B4-BE49-F238E27FC236}">
-                <a16:creationId xmlns:a16="http://schemas.microsoft.com/office/drawing/2014/main" id="{32857F67-499D-45E7-A8CF-6FDD2134621F}"/>
+                <a16:creationId xmlns:a16="http://schemas.microsoft.com/office/drawing/2014/main" id="{39ED9569-F9C9-41B6-F6FD-8025166D0CBC}"/>
               </a:ext>
             </a:extLst>
           </p:cNvPr>
@@ -6420,8 +8268,8 @@
         </p:blipFill>
         <p:spPr>
           <a:xfrm>
-            <a:off x="679283" y="654877"/>
-            <a:ext cx="10897441" cy="3770283"/>
+            <a:off x="524941" y="2059770"/>
+            <a:ext cx="11593265" cy="3648009"/>
           </a:xfrm>
           <a:prstGeom prst="rect">
             <a:avLst/>
@@ -6441,7 +8289,194 @@
 </p:sld>
 </file>
 
-<file path=ppt/slides/slide14.xml><?xml version="1.0" encoding="utf-8"?>
+<file path=ppt/slides/slide22.xml><?xml version="1.0" encoding="utf-8"?>
+<p:sld xmlns:a="http://schemas.openxmlformats.org/drawingml/2006/main" xmlns:r="http://schemas.openxmlformats.org/officeDocument/2006/relationships" xmlns:p="http://schemas.openxmlformats.org/presentationml/2006/main">
+  <p:cSld>
+    <p:bg>
+      <p:bgPr>
+        <a:solidFill>
+          <a:schemeClr val="bg1"/>
+        </a:solidFill>
+        <a:effectLst/>
+      </p:bgPr>
+    </p:bg>
+    <p:spTree>
+      <p:nvGrpSpPr>
+        <p:cNvPr id="1" name="">
+          <a:extLst>
+            <a:ext uri="{FF2B5EF4-FFF2-40B4-BE49-F238E27FC236}">
+              <a16:creationId xmlns:a16="http://schemas.microsoft.com/office/drawing/2014/main" id="{8A924BF2-0E12-93C0-0925-471BDB6AA3DD}"/>
+            </a:ext>
+          </a:extLst>
+        </p:cNvPr>
+        <p:cNvGrpSpPr/>
+        <p:nvPr/>
+      </p:nvGrpSpPr>
+      <p:grpSpPr>
+        <a:xfrm>
+          <a:off x="0" y="0"/>
+          <a:ext cx="0" cy="0"/>
+          <a:chOff x="0" y="0"/>
+          <a:chExt cx="0" cy="0"/>
+        </a:xfrm>
+      </p:grpSpPr>
+      <p:sp>
+        <p:nvSpPr>
+          <p:cNvPr id="2" name="Заголовок 1">
+            <a:extLst>
+              <a:ext uri="{FF2B5EF4-FFF2-40B4-BE49-F238E27FC236}">
+                <a16:creationId xmlns:a16="http://schemas.microsoft.com/office/drawing/2014/main" id="{2F5DE444-52BC-1F34-1CDC-9A2046E1EE7A}"/>
+              </a:ext>
+            </a:extLst>
+          </p:cNvPr>
+          <p:cNvSpPr>
+            <a:spLocks noGrp="1"/>
+          </p:cNvSpPr>
+          <p:nvPr>
+            <p:ph type="title"/>
+          </p:nvPr>
+        </p:nvSpPr>
+        <p:spPr>
+          <a:xfrm>
+            <a:off x="929499" y="331497"/>
+            <a:ext cx="10909073" cy="1057655"/>
+          </a:xfrm>
+        </p:spPr>
+        <p:txBody>
+          <a:bodyPr vert="horz" lIns="91440" tIns="45720" rIns="91440" bIns="45720" rtlCol="0" anchor="b">
+            <a:normAutofit fontScale="90000"/>
+          </a:bodyPr>
+          <a:lstStyle/>
+          <a:p>
+            <a:r>
+              <a:rPr lang="en-US" sz="6000" dirty="0" err="1">
+                <a:solidFill>
+                  <a:schemeClr val="tx1">
+                    <a:lumMod val="85000"/>
+                    <a:lumOff val="15000"/>
+                  </a:schemeClr>
+                </a:solidFill>
+              </a:rPr>
+              <a:t>Результаты</a:t>
+            </a:r>
+            <a:r>
+              <a:rPr lang="en-US" sz="6000" dirty="0">
+                <a:solidFill>
+                  <a:schemeClr val="tx1">
+                    <a:lumMod val="85000"/>
+                    <a:lumOff val="15000"/>
+                  </a:schemeClr>
+                </a:solidFill>
+              </a:rPr>
+              <a:t> </a:t>
+            </a:r>
+            <a:r>
+              <a:rPr lang="ru-RU" sz="6000" dirty="0">
+                <a:solidFill>
+                  <a:schemeClr val="tx1">
+                    <a:lumMod val="85000"/>
+                    <a:lumOff val="15000"/>
+                  </a:schemeClr>
+                </a:solidFill>
+              </a:rPr>
+              <a:t>построения регрессии</a:t>
+            </a:r>
+            <a:endParaRPr lang="en-US" sz="6000" dirty="0">
+              <a:solidFill>
+                <a:schemeClr val="tx1">
+                  <a:lumMod val="85000"/>
+                  <a:lumOff val="15000"/>
+                </a:schemeClr>
+              </a:solidFill>
+            </a:endParaRPr>
+          </a:p>
+        </p:txBody>
+      </p:sp>
+      <p:sp>
+        <p:nvSpPr>
+          <p:cNvPr id="4" name="Номер слайда 3">
+            <a:extLst>
+              <a:ext uri="{FF2B5EF4-FFF2-40B4-BE49-F238E27FC236}">
+                <a16:creationId xmlns:a16="http://schemas.microsoft.com/office/drawing/2014/main" id="{8D6AAF1D-6928-2C16-14DB-777C4270F2BB}"/>
+              </a:ext>
+            </a:extLst>
+          </p:cNvPr>
+          <p:cNvSpPr>
+            <a:spLocks noGrp="1"/>
+          </p:cNvSpPr>
+          <p:nvPr>
+            <p:ph type="sldNum" sz="quarter" idx="12"/>
+          </p:nvPr>
+        </p:nvSpPr>
+        <p:spPr/>
+        <p:txBody>
+          <a:bodyPr vert="horz" lIns="91440" tIns="45720" rIns="91440" bIns="45720" rtlCol="0" anchor="ctr">
+            <a:normAutofit/>
+          </a:bodyPr>
+          <a:lstStyle/>
+          <a:p>
+            <a:pPr>
+              <a:spcAft>
+                <a:spcPts val="600"/>
+              </a:spcAft>
+            </a:pPr>
+            <a:fld id="{25726283-AA38-4E85-AA5F-A5EF301525D1}" type="slidenum">
+              <a:rPr lang="en-US" smtClean="0"/>
+              <a:pPr>
+                <a:spcAft>
+                  <a:spcPts val="600"/>
+                </a:spcAft>
+              </a:pPr>
+              <a:t>22</a:t>
+            </a:fld>
+            <a:endParaRPr lang="en-US"/>
+          </a:p>
+        </p:txBody>
+      </p:sp>
+      <p:pic>
+        <p:nvPicPr>
+          <p:cNvPr id="5" name="Рисунок 4">
+            <a:extLst>
+              <a:ext uri="{FF2B5EF4-FFF2-40B4-BE49-F238E27FC236}">
+                <a16:creationId xmlns:a16="http://schemas.microsoft.com/office/drawing/2014/main" id="{0969153C-D485-74DA-A7F7-774BBA63A28D}"/>
+              </a:ext>
+            </a:extLst>
+          </p:cNvPr>
+          <p:cNvPicPr>
+            <a:picLocks noChangeAspect="1"/>
+          </p:cNvPicPr>
+          <p:nvPr/>
+        </p:nvPicPr>
+        <p:blipFill>
+          <a:blip r:embed="rId2"/>
+          <a:stretch>
+            <a:fillRect/>
+          </a:stretch>
+        </p:blipFill>
+        <p:spPr>
+          <a:xfrm>
+            <a:off x="929499" y="1505298"/>
+            <a:ext cx="10282984" cy="4954487"/>
+          </a:xfrm>
+          <a:prstGeom prst="rect">
+            <a:avLst/>
+          </a:prstGeom>
+        </p:spPr>
+      </p:pic>
+    </p:spTree>
+    <p:extLst>
+      <p:ext uri="{BB962C8B-B14F-4D97-AF65-F5344CB8AC3E}">
+        <p14:creationId xmlns:p14="http://schemas.microsoft.com/office/powerpoint/2010/main" val="4031931766"/>
+      </p:ext>
+    </p:extLst>
+  </p:cSld>
+  <p:clrMapOvr>
+    <a:masterClrMapping/>
+  </p:clrMapOvr>
+</p:sld>
+</file>
+
+<file path=ppt/slides/slide23.xml><?xml version="1.0" encoding="utf-8"?>
 <p:sld xmlns:a="http://schemas.openxmlformats.org/drawingml/2006/main" xmlns:r="http://schemas.openxmlformats.org/officeDocument/2006/relationships" xmlns:p="http://schemas.openxmlformats.org/presentationml/2006/main">
   <p:cSld>
     <p:spTree>
@@ -6563,7 +8598,7 @@
           <a:p>
             <a:fld id="{25726283-AA38-4E85-AA5F-A5EF301525D1}" type="slidenum">
               <a:rPr lang="ru-RU" smtClean="0"/>
-              <a:t>14</a:t>
+              <a:t>23</a:t>
             </a:fld>
             <a:endParaRPr lang="ru-RU"/>
           </a:p>
@@ -6612,7 +8647,7 @@
 </p:sld>
 </file>
 
-<file path=ppt/slides/slide15.xml><?xml version="1.0" encoding="utf-8"?>
+<file path=ppt/slides/slide24.xml><?xml version="1.0" encoding="utf-8"?>
 <p:sld xmlns:a="http://schemas.openxmlformats.org/drawingml/2006/main" xmlns:r="http://schemas.openxmlformats.org/officeDocument/2006/relationships" xmlns:p="http://schemas.openxmlformats.org/presentationml/2006/main">
   <p:cSld>
     <p:spTree>
@@ -6671,6 +8706,50 @@
       </p:sp>
       <p:sp>
         <p:nvSpPr>
+          <p:cNvPr id="6" name="Объект 2">
+            <a:extLst>
+              <a:ext uri="{FF2B5EF4-FFF2-40B4-BE49-F238E27FC236}">
+                <a16:creationId xmlns:a16="http://schemas.microsoft.com/office/drawing/2014/main" id="{45AE6DD8-D3DE-8884-E79E-F5B54B79C686}"/>
+              </a:ext>
+            </a:extLst>
+          </p:cNvPr>
+          <p:cNvSpPr>
+            <a:spLocks noGrp="1"/>
+          </p:cNvSpPr>
+          <p:nvPr>
+            <p:ph idx="1"/>
+          </p:nvPr>
+        </p:nvSpPr>
+        <p:spPr>
+          <a:xfrm>
+            <a:off x="1154083" y="2002536"/>
+            <a:ext cx="5877653" cy="3465576"/>
+          </a:xfrm>
+        </p:spPr>
+        <p:txBody>
+          <a:bodyPr>
+            <a:normAutofit/>
+          </a:bodyPr>
+          <a:lstStyle/>
+          <a:p>
+            <a:pPr algn="just"/>
+            <a:r>
+              <a:rPr lang="ru-RU" dirty="0"/>
+              <a:t>В ходе выполнения данной работы была достигнута поставленная цель — разработано программное средство для сравнительного анализа методов преобразования категориальных признаков с сохранением семантической информации, позволяющее оценить эффективность различных подходов кодирования при работе с </a:t>
+            </a:r>
+            <a:r>
+              <a:rPr lang="ru-RU" dirty="0" err="1"/>
+              <a:t>высокоразмерными</a:t>
+            </a:r>
+            <a:r>
+              <a:rPr lang="ru-RU" dirty="0"/>
+              <a:t> данными. Все поставленные задачи были успешно выполнены. </a:t>
+            </a:r>
+          </a:p>
+        </p:txBody>
+      </p:sp>
+      <p:sp>
+        <p:nvSpPr>
           <p:cNvPr id="3" name="Номер слайда 2">
             <a:extLst>
               <a:ext uri="{FF2B5EF4-FFF2-40B4-BE49-F238E27FC236}">
@@ -6692,53 +8771,9 @@
           <a:p>
             <a:fld id="{25726283-AA38-4E85-AA5F-A5EF301525D1}" type="slidenum">
               <a:rPr lang="ru-RU" smtClean="0"/>
-              <a:t>15</a:t>
+              <a:t>24</a:t>
             </a:fld>
             <a:endParaRPr lang="ru-RU"/>
-          </a:p>
-        </p:txBody>
-      </p:sp>
-      <p:sp>
-        <p:nvSpPr>
-          <p:cNvPr id="6" name="Объект 2">
-            <a:extLst>
-              <a:ext uri="{FF2B5EF4-FFF2-40B4-BE49-F238E27FC236}">
-                <a16:creationId xmlns:a16="http://schemas.microsoft.com/office/drawing/2014/main" id="{45AE6DD8-D3DE-8884-E79E-F5B54B79C686}"/>
-              </a:ext>
-            </a:extLst>
-          </p:cNvPr>
-          <p:cNvSpPr>
-            <a:spLocks noGrp="1"/>
-          </p:cNvSpPr>
-          <p:nvPr>
-            <p:ph idx="1"/>
-          </p:nvPr>
-        </p:nvSpPr>
-        <p:spPr>
-          <a:xfrm>
-            <a:off x="1154083" y="2002536"/>
-            <a:ext cx="5877653" cy="3465576"/>
-          </a:xfrm>
-        </p:spPr>
-        <p:txBody>
-          <a:bodyPr>
-            <a:normAutofit/>
-          </a:bodyPr>
-          <a:lstStyle/>
-          <a:p>
-            <a:pPr algn="just"/>
-            <a:r>
-              <a:rPr lang="ru-RU" dirty="0"/>
-              <a:t>В ходе выполнения данной работы была достигнута поставленная цель — разработано программное средство для сравнительного анализа методов преобразования категориальных признаков с сохранением семантической информации, позволяющее оценить эффективность различных подходов кодирования при работе с </a:t>
-            </a:r>
-            <a:r>
-              <a:rPr lang="ru-RU" dirty="0" err="1"/>
-              <a:t>высокоразмерными</a:t>
-            </a:r>
-            <a:r>
-              <a:rPr lang="ru-RU" dirty="0"/>
-              <a:t> данными. Все поставленные задачи были успешно выполнены. </a:t>
-            </a:r>
           </a:p>
         </p:txBody>
       </p:sp>
@@ -6802,7 +8837,7 @@
 </p:sld>
 </file>
 
-<file path=ppt/slides/slide16.xml><?xml version="1.0" encoding="utf-8"?>
+<file path=ppt/slides/slide25.xml><?xml version="1.0" encoding="utf-8"?>
 <p:sld xmlns:a="http://schemas.openxmlformats.org/drawingml/2006/main" xmlns:r="http://schemas.openxmlformats.org/officeDocument/2006/relationships" xmlns:p="http://schemas.openxmlformats.org/presentationml/2006/main">
   <p:cSld>
     <p:spTree>
@@ -6848,7 +8883,7 @@
           <a:p>
             <a:fld id="{25726283-AA38-4E85-AA5F-A5EF301525D1}" type="slidenum">
               <a:rPr lang="ru-RU" smtClean="0"/>
-              <a:t>16</a:t>
+              <a:t>25</a:t>
             </a:fld>
             <a:endParaRPr lang="ru-RU"/>
           </a:p>
@@ -6905,245 +8940,6 @@
     <p:extLst>
       <p:ext uri="{BB962C8B-B14F-4D97-AF65-F5344CB8AC3E}">
         <p14:creationId xmlns:p14="http://schemas.microsoft.com/office/powerpoint/2010/main" val="419094909"/>
-      </p:ext>
-    </p:extLst>
-  </p:cSld>
-  <p:clrMapOvr>
-    <a:masterClrMapping/>
-  </p:clrMapOvr>
-</p:sld>
-</file>
-
-<file path=ppt/slides/slide2.xml><?xml version="1.0" encoding="utf-8"?>
-<p:sld xmlns:a="http://schemas.openxmlformats.org/drawingml/2006/main" xmlns:r="http://schemas.openxmlformats.org/officeDocument/2006/relationships" xmlns:p="http://schemas.openxmlformats.org/presentationml/2006/main">
-  <p:cSld>
-    <p:spTree>
-      <p:nvGrpSpPr>
-        <p:cNvPr id="1" name=""/>
-        <p:cNvGrpSpPr/>
-        <p:nvPr/>
-      </p:nvGrpSpPr>
-      <p:grpSpPr>
-        <a:xfrm>
-          <a:off x="0" y="0"/>
-          <a:ext cx="0" cy="0"/>
-          <a:chOff x="0" y="0"/>
-          <a:chExt cx="0" cy="0"/>
-        </a:xfrm>
-      </p:grpSpPr>
-      <p:sp>
-        <p:nvSpPr>
-          <p:cNvPr id="2" name="Заголовок 1">
-            <a:extLst>
-              <a:ext uri="{FF2B5EF4-FFF2-40B4-BE49-F238E27FC236}">
-                <a16:creationId xmlns:a16="http://schemas.microsoft.com/office/drawing/2014/main" id="{5C752277-5DE6-44A2-ADB8-C7CB9675725C}"/>
-              </a:ext>
-            </a:extLst>
-          </p:cNvPr>
-          <p:cNvSpPr>
-            <a:spLocks noGrp="1"/>
-          </p:cNvSpPr>
-          <p:nvPr>
-            <p:ph type="title"/>
-          </p:nvPr>
-        </p:nvSpPr>
-        <p:spPr>
-          <a:xfrm>
-            <a:off x="1066800" y="672336"/>
-            <a:ext cx="10058400" cy="801533"/>
-          </a:xfrm>
-        </p:spPr>
-        <p:txBody>
-          <a:bodyPr/>
-          <a:lstStyle/>
-          <a:p>
-            <a:pPr algn="ctr"/>
-            <a:r>
-              <a:rPr lang="ru-RU" dirty="0"/>
-              <a:t>Цель и задачи работы</a:t>
-            </a:r>
-          </a:p>
-        </p:txBody>
-      </p:sp>
-      <p:sp>
-        <p:nvSpPr>
-          <p:cNvPr id="3" name="Объект 2">
-            <a:extLst>
-              <a:ext uri="{FF2B5EF4-FFF2-40B4-BE49-F238E27FC236}">
-                <a16:creationId xmlns:a16="http://schemas.microsoft.com/office/drawing/2014/main" id="{22933FE1-F73A-4C21-955B-D3E3859CC63E}"/>
-              </a:ext>
-            </a:extLst>
-          </p:cNvPr>
-          <p:cNvSpPr>
-            <a:spLocks noGrp="1"/>
-          </p:cNvSpPr>
-          <p:nvPr>
-            <p:ph idx="1"/>
-          </p:nvPr>
-        </p:nvSpPr>
-        <p:spPr>
-          <a:xfrm>
-            <a:off x="987552" y="1956816"/>
-            <a:ext cx="5422392" cy="3776472"/>
-          </a:xfrm>
-        </p:spPr>
-        <p:txBody>
-          <a:bodyPr>
-            <a:normAutofit fontScale="77500" lnSpcReduction="20000"/>
-          </a:bodyPr>
-          <a:lstStyle/>
-          <a:p>
-            <a:pPr algn="just"/>
-            <a:r>
-              <a:rPr lang="ru-RU" b="1" dirty="0"/>
-              <a:t>Цель работы</a:t>
-            </a:r>
-            <a:endParaRPr lang="ru-RU" dirty="0"/>
-          </a:p>
-          <a:p>
-            <a:pPr algn="just"/>
-            <a:r>
-              <a:rPr lang="ru-RU" dirty="0"/>
-              <a:t>Разработка программного средства для сравнительного анализа методов преобразования категориальных признаков с сохранением семантической информации, позволяющего оценить эффективность различных подходов кодирования при работе с </a:t>
-            </a:r>
-            <a:r>
-              <a:rPr lang="ru-RU" dirty="0" err="1"/>
-              <a:t>высокоразмерными</a:t>
-            </a:r>
-            <a:r>
-              <a:rPr lang="ru-RU" dirty="0"/>
-              <a:t> данными.</a:t>
-            </a:r>
-          </a:p>
-          <a:p>
-            <a:pPr algn="just"/>
-            <a:r>
-              <a:rPr lang="ru-RU" b="1" dirty="0"/>
-              <a:t>Задачи </a:t>
-            </a:r>
-            <a:endParaRPr lang="ru-RU" dirty="0"/>
-          </a:p>
-          <a:p>
-            <a:pPr algn="just"/>
-            <a:r>
-              <a:rPr lang="ru-RU" dirty="0"/>
-              <a:t>Анализ существующих методов кодирования категориальных признаков</a:t>
-            </a:r>
-          </a:p>
-          <a:p>
-            <a:pPr algn="just"/>
-            <a:r>
-              <a:rPr lang="ru-RU" dirty="0"/>
-              <a:t>Разработка программной архитектуры</a:t>
-            </a:r>
-          </a:p>
-          <a:p>
-            <a:pPr algn="just"/>
-            <a:r>
-              <a:rPr lang="ru-RU" dirty="0"/>
-              <a:t>Реализация методов кодирования</a:t>
-            </a:r>
-          </a:p>
-          <a:p>
-            <a:pPr algn="just"/>
-            <a:r>
-              <a:rPr lang="ru-RU" dirty="0"/>
-              <a:t>Создание пользовательского интерфейса</a:t>
-            </a:r>
-          </a:p>
-          <a:p>
-            <a:pPr algn="just"/>
-            <a:r>
-              <a:rPr lang="ru-RU" dirty="0"/>
-              <a:t>Сравнительный анализ методов</a:t>
-            </a:r>
-          </a:p>
-          <a:p>
-            <a:pPr algn="just"/>
-            <a:endParaRPr lang="ru-RU" dirty="0"/>
-          </a:p>
-        </p:txBody>
-      </p:sp>
-      <p:sp>
-        <p:nvSpPr>
-          <p:cNvPr id="4" name="Номер слайда 3">
-            <a:extLst>
-              <a:ext uri="{FF2B5EF4-FFF2-40B4-BE49-F238E27FC236}">
-                <a16:creationId xmlns:a16="http://schemas.microsoft.com/office/drawing/2014/main" id="{9955CF68-9AFB-2489-8250-2379401D26CB}"/>
-              </a:ext>
-            </a:extLst>
-          </p:cNvPr>
-          <p:cNvSpPr>
-            <a:spLocks noGrp="1"/>
-          </p:cNvSpPr>
-          <p:nvPr>
-            <p:ph type="sldNum" sz="quarter" idx="12"/>
-          </p:nvPr>
-        </p:nvSpPr>
-        <p:spPr/>
-        <p:txBody>
-          <a:bodyPr/>
-          <a:lstStyle/>
-          <a:p>
-            <a:fld id="{25726283-AA38-4E85-AA5F-A5EF301525D1}" type="slidenum">
-              <a:rPr lang="ru-RU" smtClean="0"/>
-              <a:t>2</a:t>
-            </a:fld>
-            <a:endParaRPr lang="ru-RU"/>
-          </a:p>
-        </p:txBody>
-      </p:sp>
-      <p:pic>
-        <p:nvPicPr>
-          <p:cNvPr id="2050" name="Picture 2" descr="Picture background">
-            <a:extLst>
-              <a:ext uri="{FF2B5EF4-FFF2-40B4-BE49-F238E27FC236}">
-                <a16:creationId xmlns:a16="http://schemas.microsoft.com/office/drawing/2014/main" id="{A9FEFDE3-7EA6-3531-BE6C-32206C89D885}"/>
-              </a:ext>
-            </a:extLst>
-          </p:cNvPr>
-          <p:cNvPicPr>
-            <a:picLocks noChangeAspect="1" noChangeArrowheads="1"/>
-          </p:cNvPicPr>
-          <p:nvPr/>
-        </p:nvPicPr>
-        <p:blipFill>
-          <a:blip r:embed="rId2">
-            <a:extLst>
-              <a:ext uri="{28A0092B-C50C-407E-A947-70E740481C1C}">
-                <a14:useLocalDpi xmlns:a14="http://schemas.microsoft.com/office/drawing/2010/main" val="0"/>
-              </a:ext>
-            </a:extLst>
-          </a:blip>
-          <a:srcRect/>
-          <a:stretch>
-            <a:fillRect/>
-          </a:stretch>
-        </p:blipFill>
-        <p:spPr bwMode="auto">
-          <a:xfrm>
-            <a:off x="6973503" y="1942022"/>
-            <a:ext cx="4463724" cy="2973956"/>
-          </a:xfrm>
-          <a:prstGeom prst="rect">
-            <a:avLst/>
-          </a:prstGeom>
-          <a:noFill/>
-          <a:extLst>
-            <a:ext uri="{909E8E84-426E-40DD-AFC4-6F175D3DCCD1}">
-              <a14:hiddenFill xmlns:a14="http://schemas.microsoft.com/office/drawing/2010/main">
-                <a:solidFill>
-                  <a:srgbClr val="FFFFFF"/>
-                </a:solidFill>
-              </a14:hiddenFill>
-            </a:ext>
-          </a:extLst>
-        </p:spPr>
-      </p:pic>
-    </p:spTree>
-    <p:extLst>
-      <p:ext uri="{BB962C8B-B14F-4D97-AF65-F5344CB8AC3E}">
-        <p14:creationId xmlns:p14="http://schemas.microsoft.com/office/powerpoint/2010/main" val="648469292"/>
       </p:ext>
     </p:extLst>
   </p:cSld>
